--- a/Delivery 2 A_B_testing/Deliverables/Presentation.pptx
+++ b/Delivery 2 A_B_testing/Deliverables/Presentation.pptx
@@ -4,19 +4,22 @@
   <p:sldMasterIdLst>
     <p:sldMasterId id="2147483648" r:id="rId1"/>
   </p:sldMasterIdLst>
+  <p:notesMasterIdLst>
+    <p:notesMasterId r:id="rId12"/>
+  </p:notesMasterIdLst>
   <p:sldIdLst>
-    <p:sldId id="256" r:id="rId7"/>
-    <p:sldId id="257" r:id="rId8"/>
-    <p:sldId id="258" r:id="rId9"/>
-    <p:sldId id="259" r:id="rId10"/>
-    <p:sldId id="260" r:id="rId11"/>
-    <p:sldId id="261" r:id="rId12"/>
-    <p:sldId id="262" r:id="rId13"/>
-    <p:sldId id="263" r:id="rId14"/>
-    <p:sldId id="264" r:id="rId15"/>
-    <p:sldId id="265" r:id="rId16"/>
+    <p:sldId id="256" r:id="rId2"/>
+    <p:sldId id="257" r:id="rId3"/>
+    <p:sldId id="258" r:id="rId4"/>
+    <p:sldId id="259" r:id="rId5"/>
+    <p:sldId id="260" r:id="rId6"/>
+    <p:sldId id="261" r:id="rId7"/>
+    <p:sldId id="262" r:id="rId8"/>
+    <p:sldId id="263" r:id="rId9"/>
+    <p:sldId id="264" r:id="rId10"/>
+    <p:sldId id="265" r:id="rId11"/>
   </p:sldIdLst>
-  <p:sldSz cx="12191695" cy="6858000" type="screen4x3"/>
+  <p:sldSz cx="12192000" cy="6858000"/>
   <p:notesSz cx="6858000" cy="9144000"/>
   <p:defaultTextStyle>
     <a:defPPr>
@@ -113,7 +116,456 @@
       </a:defRPr>
     </a:lvl9pPr>
   </p:defaultTextStyle>
+  <p:extLst>
+    <p:ext uri="{EFAFB233-063F-42B5-8137-9DF3F51BA10A}">
+      <p15:sldGuideLst xmlns:p15="http://schemas.microsoft.com/office/powerpoint/2012/main">
+        <p15:guide id="1" orient="horz" pos="2160">
+          <p15:clr>
+            <a:srgbClr val="A4A3A4"/>
+          </p15:clr>
+        </p15:guide>
+        <p15:guide id="2" pos="2880">
+          <p15:clr>
+            <a:srgbClr val="A4A3A4"/>
+          </p15:clr>
+        </p15:guide>
+      </p15:sldGuideLst>
+    </p:ext>
+  </p:extLst>
 </p:presentation>
+</file>
+
+<file path=ppt/notesMasters/notesMaster1.xml><?xml version="1.0" encoding="utf-8"?>
+<p:notesMaster xmlns:a="http://schemas.openxmlformats.org/drawingml/2006/main" xmlns:r="http://schemas.openxmlformats.org/officeDocument/2006/relationships" xmlns:p="http://schemas.openxmlformats.org/presentationml/2006/main">
+  <p:cSld>
+    <p:bg>
+      <p:bgRef idx="1001">
+        <a:schemeClr val="bg1"/>
+      </p:bgRef>
+    </p:bg>
+    <p:spTree>
+      <p:nvGrpSpPr>
+        <p:cNvPr id="1" name=""/>
+        <p:cNvGrpSpPr/>
+        <p:nvPr/>
+      </p:nvGrpSpPr>
+      <p:grpSpPr>
+        <a:xfrm>
+          <a:off x="0" y="0"/>
+          <a:ext cx="0" cy="0"/>
+          <a:chOff x="0" y="0"/>
+          <a:chExt cx="0" cy="0"/>
+        </a:xfrm>
+      </p:grpSpPr>
+      <p:sp>
+        <p:nvSpPr>
+          <p:cNvPr id="2" name="Header Placeholder 1"/>
+          <p:cNvSpPr>
+            <a:spLocks noGrp="1"/>
+          </p:cNvSpPr>
+          <p:nvPr>
+            <p:ph type="hdr" sz="quarter"/>
+          </p:nvPr>
+        </p:nvSpPr>
+        <p:spPr>
+          <a:xfrm>
+            <a:off x="0" y="0"/>
+            <a:ext cx="2971800" cy="458788"/>
+          </a:xfrm>
+          <a:prstGeom prst="rect">
+            <a:avLst/>
+          </a:prstGeom>
+        </p:spPr>
+        <p:txBody>
+          <a:bodyPr vert="horz" lIns="91440" tIns="45720" rIns="91440" bIns="45720" rtlCol="0"/>
+          <a:lstStyle>
+            <a:lvl1pPr algn="l">
+              <a:defRPr sz="1200"/>
+            </a:lvl1pPr>
+          </a:lstStyle>
+          <a:p>
+            <a:endParaRPr lang="en-US"/>
+          </a:p>
+        </p:txBody>
+      </p:sp>
+      <p:sp>
+        <p:nvSpPr>
+          <p:cNvPr id="3" name="Date Placeholder 2"/>
+          <p:cNvSpPr>
+            <a:spLocks noGrp="1"/>
+          </p:cNvSpPr>
+          <p:nvPr>
+            <p:ph type="dt" idx="1"/>
+          </p:nvPr>
+        </p:nvSpPr>
+        <p:spPr>
+          <a:xfrm>
+            <a:off x="3884613" y="0"/>
+            <a:ext cx="2971800" cy="458788"/>
+          </a:xfrm>
+          <a:prstGeom prst="rect">
+            <a:avLst/>
+          </a:prstGeom>
+        </p:spPr>
+        <p:txBody>
+          <a:bodyPr vert="horz" lIns="91440" tIns="45720" rIns="91440" bIns="45720" rtlCol="0"/>
+          <a:lstStyle>
+            <a:lvl1pPr algn="r">
+              <a:defRPr sz="1200"/>
+            </a:lvl1pPr>
+          </a:lstStyle>
+          <a:p>
+            <a:fld id="{5469EA12-FA4F-AB43-B68A-1CF278AD91AC}" type="datetimeFigureOut">
+              <a:rPr lang="en-US" smtClean="0"/>
+              <a:t>12/6/25</a:t>
+            </a:fld>
+            <a:endParaRPr lang="en-US"/>
+          </a:p>
+        </p:txBody>
+      </p:sp>
+      <p:sp>
+        <p:nvSpPr>
+          <p:cNvPr id="4" name="Slide Image Placeholder 3"/>
+          <p:cNvSpPr>
+            <a:spLocks noGrp="1" noRot="1" noChangeAspect="1"/>
+          </p:cNvSpPr>
+          <p:nvPr>
+            <p:ph type="sldImg" idx="2"/>
+          </p:nvPr>
+        </p:nvSpPr>
+        <p:spPr>
+          <a:xfrm>
+            <a:off x="685800" y="1143000"/>
+            <a:ext cx="5486400" cy="3086100"/>
+          </a:xfrm>
+          <a:prstGeom prst="rect">
+            <a:avLst/>
+          </a:prstGeom>
+          <a:noFill/>
+          <a:ln w="12700">
+            <a:solidFill>
+              <a:prstClr val="black"/>
+            </a:solidFill>
+          </a:ln>
+        </p:spPr>
+        <p:txBody>
+          <a:bodyPr vert="horz" lIns="91440" tIns="45720" rIns="91440" bIns="45720" rtlCol="0" anchor="ctr"/>
+          <a:lstStyle/>
+          <a:p>
+            <a:endParaRPr lang="en-US"/>
+          </a:p>
+        </p:txBody>
+      </p:sp>
+      <p:sp>
+        <p:nvSpPr>
+          <p:cNvPr id="5" name="Notes Placeholder 4"/>
+          <p:cNvSpPr>
+            <a:spLocks noGrp="1"/>
+          </p:cNvSpPr>
+          <p:nvPr>
+            <p:ph type="body" sz="quarter" idx="3"/>
+          </p:nvPr>
+        </p:nvSpPr>
+        <p:spPr>
+          <a:xfrm>
+            <a:off x="685800" y="4400550"/>
+            <a:ext cx="5486400" cy="3600450"/>
+          </a:xfrm>
+          <a:prstGeom prst="rect">
+            <a:avLst/>
+          </a:prstGeom>
+        </p:spPr>
+        <p:txBody>
+          <a:bodyPr vert="horz" lIns="91440" tIns="45720" rIns="91440" bIns="45720" rtlCol="0"/>
+          <a:lstStyle/>
+          <a:p>
+            <a:pPr lvl="0"/>
+            <a:r>
+              <a:rPr lang="en-US"/>
+              <a:t>Click to edit Master text styles</a:t>
+            </a:r>
+          </a:p>
+          <a:p>
+            <a:pPr lvl="1"/>
+            <a:r>
+              <a:rPr lang="en-US"/>
+              <a:t>Second level</a:t>
+            </a:r>
+          </a:p>
+          <a:p>
+            <a:pPr lvl="2"/>
+            <a:r>
+              <a:rPr lang="en-US"/>
+              <a:t>Third level</a:t>
+            </a:r>
+          </a:p>
+          <a:p>
+            <a:pPr lvl="3"/>
+            <a:r>
+              <a:rPr lang="en-US"/>
+              <a:t>Fourth level</a:t>
+            </a:r>
+          </a:p>
+          <a:p>
+            <a:pPr lvl="4"/>
+            <a:r>
+              <a:rPr lang="en-US"/>
+              <a:t>Fifth level</a:t>
+            </a:r>
+          </a:p>
+        </p:txBody>
+      </p:sp>
+      <p:sp>
+        <p:nvSpPr>
+          <p:cNvPr id="6" name="Footer Placeholder 5"/>
+          <p:cNvSpPr>
+            <a:spLocks noGrp="1"/>
+          </p:cNvSpPr>
+          <p:nvPr>
+            <p:ph type="ftr" sz="quarter" idx="4"/>
+          </p:nvPr>
+        </p:nvSpPr>
+        <p:spPr>
+          <a:xfrm>
+            <a:off x="0" y="8685213"/>
+            <a:ext cx="2971800" cy="458787"/>
+          </a:xfrm>
+          <a:prstGeom prst="rect">
+            <a:avLst/>
+          </a:prstGeom>
+        </p:spPr>
+        <p:txBody>
+          <a:bodyPr vert="horz" lIns="91440" tIns="45720" rIns="91440" bIns="45720" rtlCol="0" anchor="b"/>
+          <a:lstStyle>
+            <a:lvl1pPr algn="l">
+              <a:defRPr sz="1200"/>
+            </a:lvl1pPr>
+          </a:lstStyle>
+          <a:p>
+            <a:endParaRPr lang="en-US"/>
+          </a:p>
+        </p:txBody>
+      </p:sp>
+      <p:sp>
+        <p:nvSpPr>
+          <p:cNvPr id="7" name="Slide Number Placeholder 6"/>
+          <p:cNvSpPr>
+            <a:spLocks noGrp="1"/>
+          </p:cNvSpPr>
+          <p:nvPr>
+            <p:ph type="sldNum" sz="quarter" idx="5"/>
+          </p:nvPr>
+        </p:nvSpPr>
+        <p:spPr>
+          <a:xfrm>
+            <a:off x="3884613" y="8685213"/>
+            <a:ext cx="2971800" cy="458787"/>
+          </a:xfrm>
+          <a:prstGeom prst="rect">
+            <a:avLst/>
+          </a:prstGeom>
+        </p:spPr>
+        <p:txBody>
+          <a:bodyPr vert="horz" lIns="91440" tIns="45720" rIns="91440" bIns="45720" rtlCol="0" anchor="b"/>
+          <a:lstStyle>
+            <a:lvl1pPr algn="r">
+              <a:defRPr sz="1200"/>
+            </a:lvl1pPr>
+          </a:lstStyle>
+          <a:p>
+            <a:fld id="{29F64C75-E8BC-064F-B9E6-E7F54CDD3E39}" type="slidenum">
+              <a:rPr lang="en-US" smtClean="0"/>
+              <a:t>‹#›</a:t>
+            </a:fld>
+            <a:endParaRPr lang="en-US"/>
+          </a:p>
+        </p:txBody>
+      </p:sp>
+    </p:spTree>
+    <p:extLst>
+      <p:ext uri="{BB962C8B-B14F-4D97-AF65-F5344CB8AC3E}">
+        <p14:creationId xmlns:p14="http://schemas.microsoft.com/office/powerpoint/2010/main" val="1077335442"/>
+      </p:ext>
+    </p:extLst>
+  </p:cSld>
+  <p:clrMap bg1="lt1" tx1="dk1" bg2="lt2" tx2="dk2" accent1="accent1" accent2="accent2" accent3="accent3" accent4="accent4" accent5="accent5" accent6="accent6" hlink="hlink" folHlink="folHlink"/>
+  <p:notesStyle>
+    <a:lvl1pPr marL="0" algn="l" defTabSz="914400" rtl="0" eaLnBrk="1" latinLnBrk="0" hangingPunct="1">
+      <a:defRPr sz="1200" kern="1200">
+        <a:solidFill>
+          <a:schemeClr val="tx1"/>
+        </a:solidFill>
+        <a:latin typeface="+mn-lt"/>
+        <a:ea typeface="+mn-ea"/>
+        <a:cs typeface="+mn-cs"/>
+      </a:defRPr>
+    </a:lvl1pPr>
+    <a:lvl2pPr marL="457200" algn="l" defTabSz="914400" rtl="0" eaLnBrk="1" latinLnBrk="0" hangingPunct="1">
+      <a:defRPr sz="1200" kern="1200">
+        <a:solidFill>
+          <a:schemeClr val="tx1"/>
+        </a:solidFill>
+        <a:latin typeface="+mn-lt"/>
+        <a:ea typeface="+mn-ea"/>
+        <a:cs typeface="+mn-cs"/>
+      </a:defRPr>
+    </a:lvl2pPr>
+    <a:lvl3pPr marL="914400" algn="l" defTabSz="914400" rtl="0" eaLnBrk="1" latinLnBrk="0" hangingPunct="1">
+      <a:defRPr sz="1200" kern="1200">
+        <a:solidFill>
+          <a:schemeClr val="tx1"/>
+        </a:solidFill>
+        <a:latin typeface="+mn-lt"/>
+        <a:ea typeface="+mn-ea"/>
+        <a:cs typeface="+mn-cs"/>
+      </a:defRPr>
+    </a:lvl3pPr>
+    <a:lvl4pPr marL="1371600" algn="l" defTabSz="914400" rtl="0" eaLnBrk="1" latinLnBrk="0" hangingPunct="1">
+      <a:defRPr sz="1200" kern="1200">
+        <a:solidFill>
+          <a:schemeClr val="tx1"/>
+        </a:solidFill>
+        <a:latin typeface="+mn-lt"/>
+        <a:ea typeface="+mn-ea"/>
+        <a:cs typeface="+mn-cs"/>
+      </a:defRPr>
+    </a:lvl4pPr>
+    <a:lvl5pPr marL="1828800" algn="l" defTabSz="914400" rtl="0" eaLnBrk="1" latinLnBrk="0" hangingPunct="1">
+      <a:defRPr sz="1200" kern="1200">
+        <a:solidFill>
+          <a:schemeClr val="tx1"/>
+        </a:solidFill>
+        <a:latin typeface="+mn-lt"/>
+        <a:ea typeface="+mn-ea"/>
+        <a:cs typeface="+mn-cs"/>
+      </a:defRPr>
+    </a:lvl5pPr>
+    <a:lvl6pPr marL="2286000" algn="l" defTabSz="914400" rtl="0" eaLnBrk="1" latinLnBrk="0" hangingPunct="1">
+      <a:defRPr sz="1200" kern="1200">
+        <a:solidFill>
+          <a:schemeClr val="tx1"/>
+        </a:solidFill>
+        <a:latin typeface="+mn-lt"/>
+        <a:ea typeface="+mn-ea"/>
+        <a:cs typeface="+mn-cs"/>
+      </a:defRPr>
+    </a:lvl6pPr>
+    <a:lvl7pPr marL="2743200" algn="l" defTabSz="914400" rtl="0" eaLnBrk="1" latinLnBrk="0" hangingPunct="1">
+      <a:defRPr sz="1200" kern="1200">
+        <a:solidFill>
+          <a:schemeClr val="tx1"/>
+        </a:solidFill>
+        <a:latin typeface="+mn-lt"/>
+        <a:ea typeface="+mn-ea"/>
+        <a:cs typeface="+mn-cs"/>
+      </a:defRPr>
+    </a:lvl7pPr>
+    <a:lvl8pPr marL="3200400" algn="l" defTabSz="914400" rtl="0" eaLnBrk="1" latinLnBrk="0" hangingPunct="1">
+      <a:defRPr sz="1200" kern="1200">
+        <a:solidFill>
+          <a:schemeClr val="tx1"/>
+        </a:solidFill>
+        <a:latin typeface="+mn-lt"/>
+        <a:ea typeface="+mn-ea"/>
+        <a:cs typeface="+mn-cs"/>
+      </a:defRPr>
+    </a:lvl8pPr>
+    <a:lvl9pPr marL="3657600" algn="l" defTabSz="914400" rtl="0" eaLnBrk="1" latinLnBrk="0" hangingPunct="1">
+      <a:defRPr sz="1200" kern="1200">
+        <a:solidFill>
+          <a:schemeClr val="tx1"/>
+        </a:solidFill>
+        <a:latin typeface="+mn-lt"/>
+        <a:ea typeface="+mn-ea"/>
+        <a:cs typeface="+mn-cs"/>
+      </a:defRPr>
+    </a:lvl9pPr>
+  </p:notesStyle>
+</p:notesMaster>
+</file>
+
+<file path=ppt/notesSlides/notesSlide1.xml><?xml version="1.0" encoding="utf-8"?>
+<p:notes xmlns:a="http://schemas.openxmlformats.org/drawingml/2006/main" xmlns:r="http://schemas.openxmlformats.org/officeDocument/2006/relationships" xmlns:p="http://schemas.openxmlformats.org/presentationml/2006/main">
+  <p:cSld>
+    <p:spTree>
+      <p:nvGrpSpPr>
+        <p:cNvPr id="1" name=""/>
+        <p:cNvGrpSpPr/>
+        <p:nvPr/>
+      </p:nvGrpSpPr>
+      <p:grpSpPr>
+        <a:xfrm>
+          <a:off x="0" y="0"/>
+          <a:ext cx="0" cy="0"/>
+          <a:chOff x="0" y="0"/>
+          <a:chExt cx="0" cy="0"/>
+        </a:xfrm>
+      </p:grpSpPr>
+      <p:sp>
+        <p:nvSpPr>
+          <p:cNvPr id="2" name="Slide Image Placeholder 1"/>
+          <p:cNvSpPr>
+            <a:spLocks noGrp="1" noRot="1" noChangeAspect="1"/>
+          </p:cNvSpPr>
+          <p:nvPr>
+            <p:ph type="sldImg"/>
+          </p:nvPr>
+        </p:nvSpPr>
+        <p:spPr/>
+      </p:sp>
+      <p:sp>
+        <p:nvSpPr>
+          <p:cNvPr id="3" name="Notes Placeholder 2"/>
+          <p:cNvSpPr>
+            <a:spLocks noGrp="1"/>
+          </p:cNvSpPr>
+          <p:nvPr>
+            <p:ph type="body" idx="1"/>
+          </p:nvPr>
+        </p:nvSpPr>
+        <p:spPr/>
+        <p:txBody>
+          <a:bodyPr/>
+          <a:lstStyle/>
+          <a:p>
+            <a:endParaRPr lang="en-US" dirty="0"/>
+          </a:p>
+        </p:txBody>
+      </p:sp>
+      <p:sp>
+        <p:nvSpPr>
+          <p:cNvPr id="4" name="Slide Number Placeholder 3"/>
+          <p:cNvSpPr>
+            <a:spLocks noGrp="1"/>
+          </p:cNvSpPr>
+          <p:nvPr>
+            <p:ph type="sldNum" sz="quarter" idx="5"/>
+          </p:nvPr>
+        </p:nvSpPr>
+        <p:spPr/>
+        <p:txBody>
+          <a:bodyPr/>
+          <a:lstStyle/>
+          <a:p>
+            <a:fld id="{29F64C75-E8BC-064F-B9E6-E7F54CDD3E39}" type="slidenum">
+              <a:rPr lang="en-US" smtClean="0"/>
+              <a:t>4</a:t>
+            </a:fld>
+            <a:endParaRPr lang="en-US"/>
+          </a:p>
+        </p:txBody>
+      </p:sp>
+    </p:spTree>
+    <p:extLst>
+      <p:ext uri="{BB962C8B-B14F-4D97-AF65-F5344CB8AC3E}">
+        <p14:creationId xmlns:p14="http://schemas.microsoft.com/office/powerpoint/2010/main" val="2373904187"/>
+      </p:ext>
+    </p:extLst>
+  </p:cSld>
+  <p:clrMapOvr>
+    <a:masterClrMapping/>
+  </p:clrMapOvr>
+</p:notes>
 </file>
 
 <file path=ppt/slideLayouts/slideLayout1.xml><?xml version="1.0" encoding="utf-8"?>
@@ -154,10 +606,9 @@
           <a:lstStyle/>
           <a:p>
             <a:r>
-              <a:rPr lang="en-US" smtClean="0"/>
+              <a:rPr lang="en-US"/>
               <a:t>Click to edit Master title style</a:t>
             </a:r>
-            <a:endParaRPr lang="en-US"/>
           </a:p>
         </p:txBody>
       </p:sp>
@@ -273,10 +724,9 @@
           </a:lstStyle>
           <a:p>
             <a:r>
-              <a:rPr lang="en-US" smtClean="0"/>
+              <a:rPr lang="en-US"/>
               <a:t>Click to edit Master subtitle style</a:t>
             </a:r>
-            <a:endParaRPr lang="en-US"/>
           </a:p>
         </p:txBody>
       </p:sp>
@@ -297,7 +747,7 @@
           <a:p>
             <a:fld id="{5BCAD085-E8A6-8845-BD4E-CB4CCA059FC4}" type="datetimeFigureOut">
               <a:rPr lang="en-US" smtClean="0"/>
-              <a:t>1/27/13</a:t>
+              <a:t>12/6/25</a:t>
             </a:fld>
             <a:endParaRPr lang="en-US"/>
           </a:p>
@@ -391,10 +841,9 @@
           <a:lstStyle/>
           <a:p>
             <a:r>
-              <a:rPr lang="en-US" smtClean="0"/>
+              <a:rPr lang="en-US"/>
               <a:t>Click to edit Master title style</a:t>
             </a:r>
-            <a:endParaRPr lang="en-US"/>
           </a:p>
         </p:txBody>
       </p:sp>
@@ -415,38 +864,37 @@
           <a:p>
             <a:pPr lvl="0"/>
             <a:r>
-              <a:rPr lang="en-US" smtClean="0"/>
+              <a:rPr lang="en-US"/>
               <a:t>Click to edit Master text styles</a:t>
             </a:r>
           </a:p>
           <a:p>
             <a:pPr lvl="1"/>
             <a:r>
-              <a:rPr lang="en-US" smtClean="0"/>
+              <a:rPr lang="en-US"/>
               <a:t>Second level</a:t>
             </a:r>
           </a:p>
           <a:p>
             <a:pPr lvl="2"/>
             <a:r>
-              <a:rPr lang="en-US" smtClean="0"/>
+              <a:rPr lang="en-US"/>
               <a:t>Third level</a:t>
             </a:r>
           </a:p>
           <a:p>
             <a:pPr lvl="3"/>
             <a:r>
-              <a:rPr lang="en-US" smtClean="0"/>
+              <a:rPr lang="en-US"/>
               <a:t>Fourth level</a:t>
             </a:r>
           </a:p>
           <a:p>
             <a:pPr lvl="4"/>
             <a:r>
-              <a:rPr lang="en-US" smtClean="0"/>
+              <a:rPr lang="en-US"/>
               <a:t>Fifth level</a:t>
             </a:r>
-            <a:endParaRPr lang="en-US"/>
           </a:p>
         </p:txBody>
       </p:sp>
@@ -467,7 +915,7 @@
           <a:p>
             <a:fld id="{5BCAD085-E8A6-8845-BD4E-CB4CCA059FC4}" type="datetimeFigureOut">
               <a:rPr lang="en-US" smtClean="0"/>
-              <a:t>1/27/13</a:t>
+              <a:t>12/6/25</a:t>
             </a:fld>
             <a:endParaRPr lang="en-US"/>
           </a:p>
@@ -566,10 +1014,9 @@
           <a:lstStyle/>
           <a:p>
             <a:r>
-              <a:rPr lang="en-US" smtClean="0"/>
+              <a:rPr lang="en-US"/>
               <a:t>Click to edit Master title style</a:t>
             </a:r>
-            <a:endParaRPr lang="en-US"/>
           </a:p>
         </p:txBody>
       </p:sp>
@@ -595,38 +1042,37 @@
           <a:p>
             <a:pPr lvl="0"/>
             <a:r>
-              <a:rPr lang="en-US" smtClean="0"/>
+              <a:rPr lang="en-US"/>
               <a:t>Click to edit Master text styles</a:t>
             </a:r>
           </a:p>
           <a:p>
             <a:pPr lvl="1"/>
             <a:r>
-              <a:rPr lang="en-US" smtClean="0"/>
+              <a:rPr lang="en-US"/>
               <a:t>Second level</a:t>
             </a:r>
           </a:p>
           <a:p>
             <a:pPr lvl="2"/>
             <a:r>
-              <a:rPr lang="en-US" smtClean="0"/>
+              <a:rPr lang="en-US"/>
               <a:t>Third level</a:t>
             </a:r>
           </a:p>
           <a:p>
             <a:pPr lvl="3"/>
             <a:r>
-              <a:rPr lang="en-US" smtClean="0"/>
+              <a:rPr lang="en-US"/>
               <a:t>Fourth level</a:t>
             </a:r>
           </a:p>
           <a:p>
             <a:pPr lvl="4"/>
             <a:r>
-              <a:rPr lang="en-US" smtClean="0"/>
+              <a:rPr lang="en-US"/>
               <a:t>Fifth level</a:t>
             </a:r>
-            <a:endParaRPr lang="en-US"/>
           </a:p>
         </p:txBody>
       </p:sp>
@@ -647,7 +1093,7 @@
           <a:p>
             <a:fld id="{5BCAD085-E8A6-8845-BD4E-CB4CCA059FC4}" type="datetimeFigureOut">
               <a:rPr lang="en-US" smtClean="0"/>
-              <a:t>1/27/13</a:t>
+              <a:t>12/6/25</a:t>
             </a:fld>
             <a:endParaRPr lang="en-US"/>
           </a:p>
@@ -741,10 +1187,9 @@
           <a:lstStyle/>
           <a:p>
             <a:r>
-              <a:rPr lang="en-US" smtClean="0"/>
+              <a:rPr lang="en-US"/>
               <a:t>Click to edit Master title style</a:t>
             </a:r>
-            <a:endParaRPr lang="en-US"/>
           </a:p>
         </p:txBody>
       </p:sp>
@@ -765,38 +1210,37 @@
           <a:p>
             <a:pPr lvl="0"/>
             <a:r>
-              <a:rPr lang="en-US" smtClean="0"/>
+              <a:rPr lang="en-US"/>
               <a:t>Click to edit Master text styles</a:t>
             </a:r>
           </a:p>
           <a:p>
             <a:pPr lvl="1"/>
             <a:r>
-              <a:rPr lang="en-US" smtClean="0"/>
+              <a:rPr lang="en-US"/>
               <a:t>Second level</a:t>
             </a:r>
           </a:p>
           <a:p>
             <a:pPr lvl="2"/>
             <a:r>
-              <a:rPr lang="en-US" smtClean="0"/>
+              <a:rPr lang="en-US"/>
               <a:t>Third level</a:t>
             </a:r>
           </a:p>
           <a:p>
             <a:pPr lvl="3"/>
             <a:r>
-              <a:rPr lang="en-US" smtClean="0"/>
+              <a:rPr lang="en-US"/>
               <a:t>Fourth level</a:t>
             </a:r>
           </a:p>
           <a:p>
             <a:pPr lvl="4"/>
             <a:r>
-              <a:rPr lang="en-US" smtClean="0"/>
+              <a:rPr lang="en-US"/>
               <a:t>Fifth level</a:t>
             </a:r>
-            <a:endParaRPr lang="en-US"/>
           </a:p>
         </p:txBody>
       </p:sp>
@@ -817,7 +1261,7 @@
           <a:p>
             <a:fld id="{5BCAD085-E8A6-8845-BD4E-CB4CCA059FC4}" type="datetimeFigureOut">
               <a:rPr lang="en-US" smtClean="0"/>
-              <a:t>1/27/13</a:t>
+              <a:t>12/6/25</a:t>
             </a:fld>
             <a:endParaRPr lang="en-US"/>
           </a:p>
@@ -920,10 +1364,9 @@
           </a:lstStyle>
           <a:p>
             <a:r>
-              <a:rPr lang="en-US" smtClean="0"/>
+              <a:rPr lang="en-US"/>
               <a:t>Click to edit Master title style</a:t>
             </a:r>
-            <a:endParaRPr lang="en-US"/>
           </a:p>
         </p:txBody>
       </p:sp>
@@ -1040,7 +1483,7 @@
           <a:p>
             <a:pPr lvl="0"/>
             <a:r>
-              <a:rPr lang="en-US" smtClean="0"/>
+              <a:rPr lang="en-US"/>
               <a:t>Click to edit Master text styles</a:t>
             </a:r>
           </a:p>
@@ -1063,7 +1506,7 @@
           <a:p>
             <a:fld id="{5BCAD085-E8A6-8845-BD4E-CB4CCA059FC4}" type="datetimeFigureOut">
               <a:rPr lang="en-US" smtClean="0"/>
-              <a:t>1/27/13</a:t>
+              <a:t>12/6/25</a:t>
             </a:fld>
             <a:endParaRPr lang="en-US"/>
           </a:p>
@@ -1157,10 +1600,9 @@
           <a:lstStyle/>
           <a:p>
             <a:r>
-              <a:rPr lang="en-US" smtClean="0"/>
+              <a:rPr lang="en-US"/>
               <a:t>Click to edit Master title style</a:t>
             </a:r>
-            <a:endParaRPr lang="en-US"/>
           </a:p>
         </p:txBody>
       </p:sp>
@@ -1214,38 +1656,37 @@
           <a:p>
             <a:pPr lvl="0"/>
             <a:r>
-              <a:rPr lang="en-US" smtClean="0"/>
+              <a:rPr lang="en-US"/>
               <a:t>Click to edit Master text styles</a:t>
             </a:r>
           </a:p>
           <a:p>
             <a:pPr lvl="1"/>
             <a:r>
-              <a:rPr lang="en-US" smtClean="0"/>
+              <a:rPr lang="en-US"/>
               <a:t>Second level</a:t>
             </a:r>
           </a:p>
           <a:p>
             <a:pPr lvl="2"/>
             <a:r>
-              <a:rPr lang="en-US" smtClean="0"/>
+              <a:rPr lang="en-US"/>
               <a:t>Third level</a:t>
             </a:r>
           </a:p>
           <a:p>
             <a:pPr lvl="3"/>
             <a:r>
-              <a:rPr lang="en-US" smtClean="0"/>
+              <a:rPr lang="en-US"/>
               <a:t>Fourth level</a:t>
             </a:r>
           </a:p>
           <a:p>
             <a:pPr lvl="4"/>
             <a:r>
-              <a:rPr lang="en-US" smtClean="0"/>
+              <a:rPr lang="en-US"/>
               <a:t>Fifth level</a:t>
             </a:r>
-            <a:endParaRPr lang="en-US"/>
           </a:p>
         </p:txBody>
       </p:sp>
@@ -1299,38 +1740,37 @@
           <a:p>
             <a:pPr lvl="0"/>
             <a:r>
-              <a:rPr lang="en-US" smtClean="0"/>
+              <a:rPr lang="en-US"/>
               <a:t>Click to edit Master text styles</a:t>
             </a:r>
           </a:p>
           <a:p>
             <a:pPr lvl="1"/>
             <a:r>
-              <a:rPr lang="en-US" smtClean="0"/>
+              <a:rPr lang="en-US"/>
               <a:t>Second level</a:t>
             </a:r>
           </a:p>
           <a:p>
             <a:pPr lvl="2"/>
             <a:r>
-              <a:rPr lang="en-US" smtClean="0"/>
+              <a:rPr lang="en-US"/>
               <a:t>Third level</a:t>
             </a:r>
           </a:p>
           <a:p>
             <a:pPr lvl="3"/>
             <a:r>
-              <a:rPr lang="en-US" smtClean="0"/>
+              <a:rPr lang="en-US"/>
               <a:t>Fourth level</a:t>
             </a:r>
           </a:p>
           <a:p>
             <a:pPr lvl="4"/>
             <a:r>
-              <a:rPr lang="en-US" smtClean="0"/>
+              <a:rPr lang="en-US"/>
               <a:t>Fifth level</a:t>
             </a:r>
-            <a:endParaRPr lang="en-US"/>
           </a:p>
         </p:txBody>
       </p:sp>
@@ -1351,7 +1791,7 @@
           <a:p>
             <a:fld id="{5BCAD085-E8A6-8845-BD4E-CB4CCA059FC4}" type="datetimeFigureOut">
               <a:rPr lang="en-US" smtClean="0"/>
-              <a:t>1/27/13</a:t>
+              <a:t>12/6/25</a:t>
             </a:fld>
             <a:endParaRPr lang="en-US"/>
           </a:p>
@@ -1449,10 +1889,9 @@
           </a:lstStyle>
           <a:p>
             <a:r>
-              <a:rPr lang="en-US" smtClean="0"/>
+              <a:rPr lang="en-US"/>
               <a:t>Click to edit Master title style</a:t>
             </a:r>
-            <a:endParaRPr lang="en-US"/>
           </a:p>
         </p:txBody>
       </p:sp>
@@ -1515,7 +1954,7 @@
           <a:p>
             <a:pPr lvl="0"/>
             <a:r>
-              <a:rPr lang="en-US" smtClean="0"/>
+              <a:rPr lang="en-US"/>
               <a:t>Click to edit Master text styles</a:t>
             </a:r>
           </a:p>
@@ -1571,38 +2010,37 @@
           <a:p>
             <a:pPr lvl="0"/>
             <a:r>
-              <a:rPr lang="en-US" smtClean="0"/>
+              <a:rPr lang="en-US"/>
               <a:t>Click to edit Master text styles</a:t>
             </a:r>
           </a:p>
           <a:p>
             <a:pPr lvl="1"/>
             <a:r>
-              <a:rPr lang="en-US" smtClean="0"/>
+              <a:rPr lang="en-US"/>
               <a:t>Second level</a:t>
             </a:r>
           </a:p>
           <a:p>
             <a:pPr lvl="2"/>
             <a:r>
-              <a:rPr lang="en-US" smtClean="0"/>
+              <a:rPr lang="en-US"/>
               <a:t>Third level</a:t>
             </a:r>
           </a:p>
           <a:p>
             <a:pPr lvl="3"/>
             <a:r>
-              <a:rPr lang="en-US" smtClean="0"/>
+              <a:rPr lang="en-US"/>
               <a:t>Fourth level</a:t>
             </a:r>
           </a:p>
           <a:p>
             <a:pPr lvl="4"/>
             <a:r>
-              <a:rPr lang="en-US" smtClean="0"/>
+              <a:rPr lang="en-US"/>
               <a:t>Fifth level</a:t>
             </a:r>
-            <a:endParaRPr lang="en-US"/>
           </a:p>
         </p:txBody>
       </p:sp>
@@ -1665,7 +2103,7 @@
           <a:p>
             <a:pPr lvl="0"/>
             <a:r>
-              <a:rPr lang="en-US" smtClean="0"/>
+              <a:rPr lang="en-US"/>
               <a:t>Click to edit Master text styles</a:t>
             </a:r>
           </a:p>
@@ -1721,38 +2159,37 @@
           <a:p>
             <a:pPr lvl="0"/>
             <a:r>
-              <a:rPr lang="en-US" smtClean="0"/>
+              <a:rPr lang="en-US"/>
               <a:t>Click to edit Master text styles</a:t>
             </a:r>
           </a:p>
           <a:p>
             <a:pPr lvl="1"/>
             <a:r>
-              <a:rPr lang="en-US" smtClean="0"/>
+              <a:rPr lang="en-US"/>
               <a:t>Second level</a:t>
             </a:r>
           </a:p>
           <a:p>
             <a:pPr lvl="2"/>
             <a:r>
-              <a:rPr lang="en-US" smtClean="0"/>
+              <a:rPr lang="en-US"/>
               <a:t>Third level</a:t>
             </a:r>
           </a:p>
           <a:p>
             <a:pPr lvl="3"/>
             <a:r>
-              <a:rPr lang="en-US" smtClean="0"/>
+              <a:rPr lang="en-US"/>
               <a:t>Fourth level</a:t>
             </a:r>
           </a:p>
           <a:p>
             <a:pPr lvl="4"/>
             <a:r>
-              <a:rPr lang="en-US" smtClean="0"/>
+              <a:rPr lang="en-US"/>
               <a:t>Fifth level</a:t>
             </a:r>
-            <a:endParaRPr lang="en-US"/>
           </a:p>
         </p:txBody>
       </p:sp>
@@ -1773,7 +2210,7 @@
           <a:p>
             <a:fld id="{5BCAD085-E8A6-8845-BD4E-CB4CCA059FC4}" type="datetimeFigureOut">
               <a:rPr lang="en-US" smtClean="0"/>
-              <a:t>1/27/13</a:t>
+              <a:t>12/6/25</a:t>
             </a:fld>
             <a:endParaRPr lang="en-US"/>
           </a:p>
@@ -1867,10 +2304,9 @@
           <a:lstStyle/>
           <a:p>
             <a:r>
-              <a:rPr lang="en-US" smtClean="0"/>
+              <a:rPr lang="en-US"/>
               <a:t>Click to edit Master title style</a:t>
             </a:r>
-            <a:endParaRPr lang="en-US"/>
           </a:p>
         </p:txBody>
       </p:sp>
@@ -1891,7 +2327,7 @@
           <a:p>
             <a:fld id="{5BCAD085-E8A6-8845-BD4E-CB4CCA059FC4}" type="datetimeFigureOut">
               <a:rPr lang="en-US" smtClean="0"/>
-              <a:t>1/27/13</a:t>
+              <a:t>12/6/25</a:t>
             </a:fld>
             <a:endParaRPr lang="en-US"/>
           </a:p>
@@ -1986,7 +2422,7 @@
           <a:p>
             <a:fld id="{5BCAD085-E8A6-8845-BD4E-CB4CCA059FC4}" type="datetimeFigureOut">
               <a:rPr lang="en-US" smtClean="0"/>
-              <a:t>1/27/13</a:t>
+              <a:t>12/6/25</a:t>
             </a:fld>
             <a:endParaRPr lang="en-US"/>
           </a:p>
@@ -2089,10 +2525,9 @@
           </a:lstStyle>
           <a:p>
             <a:r>
-              <a:rPr lang="en-US" smtClean="0"/>
+              <a:rPr lang="en-US"/>
               <a:t>Click to edit Master title style</a:t>
             </a:r>
-            <a:endParaRPr lang="en-US"/>
           </a:p>
         </p:txBody>
       </p:sp>
@@ -2146,38 +2581,37 @@
           <a:p>
             <a:pPr lvl="0"/>
             <a:r>
-              <a:rPr lang="en-US" smtClean="0"/>
+              <a:rPr lang="en-US"/>
               <a:t>Click to edit Master text styles</a:t>
             </a:r>
           </a:p>
           <a:p>
             <a:pPr lvl="1"/>
             <a:r>
-              <a:rPr lang="en-US" smtClean="0"/>
+              <a:rPr lang="en-US"/>
               <a:t>Second level</a:t>
             </a:r>
           </a:p>
           <a:p>
             <a:pPr lvl="2"/>
             <a:r>
-              <a:rPr lang="en-US" smtClean="0"/>
+              <a:rPr lang="en-US"/>
               <a:t>Third level</a:t>
             </a:r>
           </a:p>
           <a:p>
             <a:pPr lvl="3"/>
             <a:r>
-              <a:rPr lang="en-US" smtClean="0"/>
+              <a:rPr lang="en-US"/>
               <a:t>Fourth level</a:t>
             </a:r>
           </a:p>
           <a:p>
             <a:pPr lvl="4"/>
             <a:r>
-              <a:rPr lang="en-US" smtClean="0"/>
+              <a:rPr lang="en-US"/>
               <a:t>Fifth level</a:t>
             </a:r>
-            <a:endParaRPr lang="en-US"/>
           </a:p>
         </p:txBody>
       </p:sp>
@@ -2240,7 +2674,7 @@
           <a:p>
             <a:pPr lvl="0"/>
             <a:r>
-              <a:rPr lang="en-US" smtClean="0"/>
+              <a:rPr lang="en-US"/>
               <a:t>Click to edit Master text styles</a:t>
             </a:r>
           </a:p>
@@ -2263,7 +2697,7 @@
           <a:p>
             <a:fld id="{5BCAD085-E8A6-8845-BD4E-CB4CCA059FC4}" type="datetimeFigureOut">
               <a:rPr lang="en-US" smtClean="0"/>
-              <a:t>1/27/13</a:t>
+              <a:t>12/6/25</a:t>
             </a:fld>
             <a:endParaRPr lang="en-US"/>
           </a:p>
@@ -2366,10 +2800,9 @@
           </a:lstStyle>
           <a:p>
             <a:r>
-              <a:rPr lang="en-US" smtClean="0"/>
+              <a:rPr lang="en-US"/>
               <a:t>Click to edit Master title style</a:t>
             </a:r>
-            <a:endParaRPr lang="en-US"/>
           </a:p>
         </p:txBody>
       </p:sp>
@@ -2493,7 +2926,7 @@
           <a:p>
             <a:pPr lvl="0"/>
             <a:r>
-              <a:rPr lang="en-US" smtClean="0"/>
+              <a:rPr lang="en-US"/>
               <a:t>Click to edit Master text styles</a:t>
             </a:r>
           </a:p>
@@ -2516,7 +2949,7 @@
           <a:p>
             <a:fld id="{5BCAD085-E8A6-8845-BD4E-CB4CCA059FC4}" type="datetimeFigureOut">
               <a:rPr lang="en-US" smtClean="0"/>
-              <a:t>1/27/13</a:t>
+              <a:t>12/6/25</a:t>
             </a:fld>
             <a:endParaRPr lang="en-US"/>
           </a:p>
@@ -2625,10 +3058,9 @@
           <a:lstStyle/>
           <a:p>
             <a:r>
-              <a:rPr lang="en-US" smtClean="0"/>
+              <a:rPr lang="en-US"/>
               <a:t>Click to edit Master title style</a:t>
             </a:r>
-            <a:endParaRPr lang="en-US"/>
           </a:p>
         </p:txBody>
       </p:sp>
@@ -2659,38 +3091,37 @@
           <a:p>
             <a:pPr lvl="0"/>
             <a:r>
-              <a:rPr lang="en-US" smtClean="0"/>
+              <a:rPr lang="en-US"/>
               <a:t>Click to edit Master text styles</a:t>
             </a:r>
           </a:p>
           <a:p>
             <a:pPr lvl="1"/>
             <a:r>
-              <a:rPr lang="en-US" smtClean="0"/>
+              <a:rPr lang="en-US"/>
               <a:t>Second level</a:t>
             </a:r>
           </a:p>
           <a:p>
             <a:pPr lvl="2"/>
             <a:r>
-              <a:rPr lang="en-US" smtClean="0"/>
+              <a:rPr lang="en-US"/>
               <a:t>Third level</a:t>
             </a:r>
           </a:p>
           <a:p>
             <a:pPr lvl="3"/>
             <a:r>
-              <a:rPr lang="en-US" smtClean="0"/>
+              <a:rPr lang="en-US"/>
               <a:t>Fourth level</a:t>
             </a:r>
           </a:p>
           <a:p>
             <a:pPr lvl="4"/>
             <a:r>
-              <a:rPr lang="en-US" smtClean="0"/>
+              <a:rPr lang="en-US"/>
               <a:t>Fifth level</a:t>
             </a:r>
-            <a:endParaRPr lang="en-US"/>
           </a:p>
         </p:txBody>
       </p:sp>
@@ -2729,7 +3160,7 @@
           <a:p>
             <a:fld id="{5BCAD085-E8A6-8845-BD4E-CB4CCA059FC4}" type="datetimeFigureOut">
               <a:rPr lang="en-US" smtClean="0"/>
-              <a:t>1/27/13</a:t>
+              <a:t>12/6/25</a:t>
             </a:fld>
             <a:endParaRPr lang="en-US"/>
           </a:p>
@@ -3088,7 +3519,7 @@
 </file>
 
 <file path=ppt/slides/slide1.xml><?xml version="1.0" encoding="utf-8"?>
-<p:sld xmlns:a="http://schemas.openxmlformats.org/drawingml/2006/main" xmlns:p="http://schemas.openxmlformats.org/presentationml/2006/main" xmlns:r="http://schemas.openxmlformats.org/officeDocument/2006/relationships">
+<p:sld xmlns:a="http://schemas.openxmlformats.org/drawingml/2006/main" xmlns:r="http://schemas.openxmlformats.org/officeDocument/2006/relationships" xmlns:p="http://schemas.openxmlformats.org/presentationml/2006/main">
   <p:cSld>
     <p:spTree>
       <p:nvGrpSpPr>
@@ -3096,7 +3527,14 @@
         <p:cNvGrpSpPr/>
         <p:nvPr/>
       </p:nvGrpSpPr>
-      <p:grpSpPr/>
+      <p:grpSpPr>
+        <a:xfrm>
+          <a:off x="0" y="0"/>
+          <a:ext cx="0" cy="0"/>
+          <a:chOff x="0" y="0"/>
+          <a:chExt cx="0" cy="0"/>
+        </a:xfrm>
+      </p:grpSpPr>
       <p:sp>
         <p:nvSpPr>
           <p:cNvPr id="2" name="Rectangle 1"/>
@@ -3106,13 +3544,13 @@
         <p:spPr>
           <a:xfrm>
             <a:off x="0" y="0"/>
-            <a:ext cx="12191695" cy="6858000"/>
+            <a:ext cx="12191695" cy="137160"/>
           </a:xfrm>
           <a:prstGeom prst="rect">
             <a:avLst/>
           </a:prstGeom>
           <a:solidFill>
-            <a:srgbClr val="1E1E23"/>
+            <a:srgbClr val="4285F4"/>
           </a:solidFill>
           <a:ln>
             <a:noFill/>
@@ -3137,6 +3575,7 @@
           <a:lstStyle/>
           <a:p>
             <a:pPr algn="ctr"/>
+            <a:endParaRPr/>
           </a:p>
         </p:txBody>
       </p:sp>
@@ -3148,7 +3587,7 @@
         </p:nvSpPr>
         <p:spPr>
           <a:xfrm>
-            <a:off x="457200" y="2011680"/>
+            <a:off x="396392" y="789503"/>
             <a:ext cx="11277295" cy="914400"/>
           </a:xfrm>
           <a:prstGeom prst="rect">
@@ -3164,9 +3603,9 @@
           <a:p>
             <a:pPr algn="ctr"/>
             <a:r>
-              <a:rPr sz="3600" b="0">
-                <a:solidFill>
-                  <a:srgbClr val="969696"/>
+              <a:rPr sz="3200" b="0" dirty="0">
+                <a:solidFill>
+                  <a:srgbClr val="757575"/>
                 </a:solidFill>
                 <a:latin typeface="Calibri"/>
               </a:rPr>
@@ -3183,7 +3622,7 @@
         </p:nvSpPr>
         <p:spPr>
           <a:xfrm>
-            <a:off x="457200" y="2560320"/>
+            <a:off x="457200" y="1577340"/>
             <a:ext cx="11277295" cy="914400"/>
           </a:xfrm>
           <a:prstGeom prst="rect">
@@ -3199,9 +3638,9 @@
           <a:p>
             <a:pPr algn="ctr"/>
             <a:r>
-              <a:rPr sz="5600" b="1">
-                <a:solidFill>
-                  <a:srgbClr val="FFFFFF"/>
+              <a:rPr sz="5200" b="1" dirty="0">
+                <a:solidFill>
+                  <a:srgbClr val="212121"/>
                 </a:solidFill>
                 <a:latin typeface="Calibri"/>
               </a:rPr>
@@ -3212,14 +3651,146 @@
       </p:sp>
       <p:sp>
         <p:nvSpPr>
-          <p:cNvPr id="5" name="TextBox 4"/>
+          <p:cNvPr id="5" name="Oval 4"/>
+          <p:cNvSpPr/>
+          <p:nvPr/>
+        </p:nvSpPr>
+        <p:spPr>
+          <a:xfrm>
+            <a:off x="1920240" y="3144083"/>
+            <a:ext cx="731520" cy="731520"/>
+          </a:xfrm>
+          <a:prstGeom prst="ellipse">
+            <a:avLst/>
+          </a:prstGeom>
+          <a:solidFill>
+            <a:srgbClr val="4285F4"/>
+          </a:solidFill>
+          <a:ln>
+            <a:noFill/>
+          </a:ln>
+        </p:spPr>
+        <p:style>
+          <a:lnRef idx="1">
+            <a:schemeClr val="accent1"/>
+          </a:lnRef>
+          <a:fillRef idx="3">
+            <a:schemeClr val="accent1"/>
+          </a:fillRef>
+          <a:effectRef idx="2">
+            <a:schemeClr val="accent1"/>
+          </a:effectRef>
+          <a:fontRef idx="minor">
+            <a:schemeClr val="lt1"/>
+          </a:fontRef>
+        </p:style>
+        <p:txBody>
+          <a:bodyPr rtlCol="0" anchor="ctr"/>
+          <a:lstStyle/>
+          <a:p>
+            <a:pPr algn="ctr"/>
+            <a:endParaRPr/>
+          </a:p>
+        </p:txBody>
+      </p:sp>
+      <p:sp>
+        <p:nvSpPr>
+          <p:cNvPr id="6" name="Oval 5"/>
+          <p:cNvSpPr/>
+          <p:nvPr/>
+        </p:nvSpPr>
+        <p:spPr>
+          <a:xfrm>
+            <a:off x="5760720" y="3144083"/>
+            <a:ext cx="731520" cy="731520"/>
+          </a:xfrm>
+          <a:prstGeom prst="ellipse">
+            <a:avLst/>
+          </a:prstGeom>
+          <a:solidFill>
+            <a:srgbClr val="0F9D58"/>
+          </a:solidFill>
+          <a:ln>
+            <a:noFill/>
+          </a:ln>
+        </p:spPr>
+        <p:style>
+          <a:lnRef idx="1">
+            <a:schemeClr val="accent1"/>
+          </a:lnRef>
+          <a:fillRef idx="3">
+            <a:schemeClr val="accent1"/>
+          </a:fillRef>
+          <a:effectRef idx="2">
+            <a:schemeClr val="accent1"/>
+          </a:effectRef>
+          <a:fontRef idx="minor">
+            <a:schemeClr val="lt1"/>
+          </a:fontRef>
+        </p:style>
+        <p:txBody>
+          <a:bodyPr rtlCol="0" anchor="ctr"/>
+          <a:lstStyle/>
+          <a:p>
+            <a:pPr algn="ctr"/>
+            <a:endParaRPr/>
+          </a:p>
+        </p:txBody>
+      </p:sp>
+      <p:sp>
+        <p:nvSpPr>
+          <p:cNvPr id="7" name="Oval 6"/>
+          <p:cNvSpPr/>
+          <p:nvPr/>
+        </p:nvSpPr>
+        <p:spPr>
+          <a:xfrm>
+            <a:off x="9601200" y="3144083"/>
+            <a:ext cx="731520" cy="731520"/>
+          </a:xfrm>
+          <a:prstGeom prst="ellipse">
+            <a:avLst/>
+          </a:prstGeom>
+          <a:solidFill>
+            <a:srgbClr val="F4B400"/>
+          </a:solidFill>
+          <a:ln>
+            <a:noFill/>
+          </a:ln>
+        </p:spPr>
+        <p:style>
+          <a:lnRef idx="1">
+            <a:schemeClr val="accent1"/>
+          </a:lnRef>
+          <a:fillRef idx="3">
+            <a:schemeClr val="accent1"/>
+          </a:fillRef>
+          <a:effectRef idx="2">
+            <a:schemeClr val="accent1"/>
+          </a:effectRef>
+          <a:fontRef idx="minor">
+            <a:schemeClr val="lt1"/>
+          </a:fontRef>
+        </p:style>
+        <p:txBody>
+          <a:bodyPr rtlCol="0" anchor="ctr"/>
+          <a:lstStyle/>
+          <a:p>
+            <a:pPr algn="ctr"/>
+            <a:endParaRPr/>
+          </a:p>
+        </p:txBody>
+      </p:sp>
+      <p:sp>
+        <p:nvSpPr>
+          <p:cNvPr id="8" name="TextBox 7"/>
           <p:cNvSpPr txBox="1"/>
           <p:nvPr/>
         </p:nvSpPr>
         <p:spPr>
           <a:xfrm>
-            <a:off x="457200" y="3840480"/>
-            <a:ext cx="11277295" cy="914400"/>
+            <a:off x="1396313" y="4119145"/>
+            <a:ext cx="1828800" cy="914400"/>
           </a:xfrm>
           <a:prstGeom prst="rect">
             <a:avLst/>
@@ -3234,27 +3805,27 @@
           <a:p>
             <a:pPr algn="ctr"/>
             <a:r>
-              <a:rPr sz="2400" b="0">
-                <a:solidFill>
-                  <a:srgbClr val="4285F4"/>
+              <a:rPr sz="1400" b="0">
+                <a:solidFill>
+                  <a:srgbClr val="757575"/>
                 </a:solidFill>
                 <a:latin typeface="Calibri"/>
               </a:rPr>
-              <a:t>A/B Test Analysis Results</a:t>
-            </a:r>
-          </a:p>
-        </p:txBody>
-      </p:sp>
-      <p:sp>
-        <p:nvSpPr>
-          <p:cNvPr id="6" name="TextBox 5"/>
+              <a:t>A/B Test</a:t>
+            </a:r>
+          </a:p>
+        </p:txBody>
+      </p:sp>
+      <p:sp>
+        <p:nvSpPr>
+          <p:cNvPr id="9" name="TextBox 8"/>
           <p:cNvSpPr txBox="1"/>
           <p:nvPr/>
         </p:nvSpPr>
         <p:spPr>
           <a:xfrm>
-            <a:off x="457200" y="5943600"/>
-            <a:ext cx="11277295" cy="914400"/>
+            <a:off x="5236793" y="4119145"/>
+            <a:ext cx="1828800" cy="914400"/>
           </a:xfrm>
           <a:prstGeom prst="rect">
             <a:avLst/>
@@ -3271,11 +3842,139 @@
             <a:r>
               <a:rPr sz="1400" b="0">
                 <a:solidFill>
-                  <a:srgbClr val="969696"/>
+                  <a:srgbClr val="757575"/>
                 </a:solidFill>
                 <a:latin typeface="Calibri"/>
               </a:rPr>
-              <a:t>Game Data Analysis  |  December 2024</a:t>
+              <a:t>Analysis</a:t>
+            </a:r>
+          </a:p>
+        </p:txBody>
+      </p:sp>
+      <p:sp>
+        <p:nvSpPr>
+          <p:cNvPr id="10" name="TextBox 9"/>
+          <p:cNvSpPr txBox="1"/>
+          <p:nvPr/>
+        </p:nvSpPr>
+        <p:spPr>
+          <a:xfrm>
+            <a:off x="9077273" y="4119145"/>
+            <a:ext cx="1828800" cy="914400"/>
+          </a:xfrm>
+          <a:prstGeom prst="rect">
+            <a:avLst/>
+          </a:prstGeom>
+          <a:noFill/>
+        </p:spPr>
+        <p:txBody>
+          <a:bodyPr wrap="square">
+            <a:spAutoFit/>
+          </a:bodyPr>
+          <a:lstStyle/>
+          <a:p>
+            <a:pPr algn="ctr"/>
+            <a:r>
+              <a:rPr sz="1400" b="0" dirty="0">
+                <a:solidFill>
+                  <a:srgbClr val="757575"/>
+                </a:solidFill>
+                <a:latin typeface="Calibri"/>
+              </a:rPr>
+              <a:t>Results</a:t>
+            </a:r>
+          </a:p>
+        </p:txBody>
+      </p:sp>
+      <p:sp>
+        <p:nvSpPr>
+          <p:cNvPr id="11" name="TextBox 10"/>
+          <p:cNvSpPr txBox="1"/>
+          <p:nvPr/>
+        </p:nvSpPr>
+        <p:spPr>
+          <a:xfrm>
+            <a:off x="457200" y="5760720"/>
+            <a:ext cx="11277295" cy="307777"/>
+          </a:xfrm>
+          <a:prstGeom prst="rect">
+            <a:avLst/>
+          </a:prstGeom>
+          <a:noFill/>
+        </p:spPr>
+        <p:txBody>
+          <a:bodyPr wrap="square">
+            <a:spAutoFit/>
+          </a:bodyPr>
+          <a:lstStyle/>
+          <a:p>
+            <a:pPr algn="ctr"/>
+            <a:r>
+              <a:rPr sz="1400" b="0" dirty="0">
+                <a:solidFill>
+                  <a:srgbClr val="757575"/>
+                </a:solidFill>
+                <a:latin typeface="Calibri"/>
+              </a:rPr>
+              <a:t>Game Data Analysis  |  December </a:t>
+            </a:r>
+            <a:r>
+              <a:rPr lang="en-US" sz="1400" dirty="0">
+                <a:solidFill>
+                  <a:srgbClr val="757575"/>
+                </a:solidFill>
+                <a:latin typeface="Calibri"/>
+              </a:rPr>
+              <a:t>2025</a:t>
+            </a:r>
+            <a:endParaRPr sz="1400" b="0" dirty="0">
+              <a:solidFill>
+                <a:srgbClr val="757575"/>
+              </a:solidFill>
+              <a:latin typeface="Calibri"/>
+            </a:endParaRPr>
+          </a:p>
+        </p:txBody>
+      </p:sp>
+      <p:sp>
+        <p:nvSpPr>
+          <p:cNvPr id="12" name="TextBox 11">
+            <a:extLst>
+              <a:ext uri="{FF2B5EF4-FFF2-40B4-BE49-F238E27FC236}">
+                <a16:creationId xmlns:a16="http://schemas.microsoft.com/office/drawing/2014/main" id="{38E9F1A3-C31A-3676-0F88-A296CE8644E9}"/>
+              </a:ext>
+            </a:extLst>
+          </p:cNvPr>
+          <p:cNvSpPr txBox="1"/>
+          <p:nvPr/>
+        </p:nvSpPr>
+        <p:spPr>
+          <a:xfrm>
+            <a:off x="4934312" y="5117068"/>
+            <a:ext cx="2323070" cy="400110"/>
+          </a:xfrm>
+          <a:prstGeom prst="rect">
+            <a:avLst/>
+          </a:prstGeom>
+          <a:noFill/>
+        </p:spPr>
+        <p:txBody>
+          <a:bodyPr wrap="square" rtlCol="0">
+            <a:spAutoFit/>
+          </a:bodyPr>
+          <a:lstStyle/>
+          <a:p>
+            <a:pPr algn="ctr"/>
+            <a:r>
+              <a:rPr lang="en-US" sz="2000" dirty="0">
+                <a:solidFill>
+                  <a:schemeClr val="tx1">
+                    <a:lumMod val="75000"/>
+                    <a:lumOff val="25000"/>
+                  </a:schemeClr>
+                </a:solidFill>
+              </a:rPr>
+              <a:t>Yiwei Ye</a:t>
             </a:r>
           </a:p>
         </p:txBody>
@@ -3289,7 +3988,7 @@
 </file>
 
 <file path=ppt/slides/slide10.xml><?xml version="1.0" encoding="utf-8"?>
-<p:sld xmlns:a="http://schemas.openxmlformats.org/drawingml/2006/main" xmlns:p="http://schemas.openxmlformats.org/presentationml/2006/main" xmlns:r="http://schemas.openxmlformats.org/officeDocument/2006/relationships">
+<p:sld xmlns:a="http://schemas.openxmlformats.org/drawingml/2006/main" xmlns:r="http://schemas.openxmlformats.org/officeDocument/2006/relationships" xmlns:p="http://schemas.openxmlformats.org/presentationml/2006/main">
   <p:cSld>
     <p:spTree>
       <p:nvGrpSpPr>
@@ -3297,7 +3996,14 @@
         <p:cNvGrpSpPr/>
         <p:nvPr/>
       </p:nvGrpSpPr>
-      <p:grpSpPr/>
+      <p:grpSpPr>
+        <a:xfrm>
+          <a:off x="0" y="0"/>
+          <a:ext cx="0" cy="0"/>
+          <a:chOff x="0" y="0"/>
+          <a:chExt cx="0" cy="0"/>
+        </a:xfrm>
+      </p:grpSpPr>
       <p:sp>
         <p:nvSpPr>
           <p:cNvPr id="2" name="Rectangle 1"/>
@@ -3307,13 +4013,13 @@
         <p:spPr>
           <a:xfrm>
             <a:off x="0" y="0"/>
-            <a:ext cx="12191695" cy="6858000"/>
+            <a:ext cx="12191695" cy="91440"/>
           </a:xfrm>
           <a:prstGeom prst="rect">
             <a:avLst/>
           </a:prstGeom>
           <a:solidFill>
-            <a:srgbClr val="1E1E23"/>
+            <a:srgbClr val="4285F4"/>
           </a:solidFill>
           <a:ln>
             <a:noFill/>
@@ -3338,6 +4044,7 @@
           <a:lstStyle/>
           <a:p>
             <a:pPr algn="ctr"/>
+            <a:endParaRPr/>
           </a:p>
         </p:txBody>
       </p:sp>
@@ -3349,7 +4056,7 @@
         </p:nvSpPr>
         <p:spPr>
           <a:xfrm>
-            <a:off x="457200" y="2286000"/>
+            <a:off x="457200" y="1371600"/>
             <a:ext cx="11277295" cy="914400"/>
           </a:xfrm>
           <a:prstGeom prst="rect">
@@ -3365,9 +4072,9 @@
           <a:p>
             <a:pPr algn="ctr"/>
             <a:r>
-              <a:rPr sz="5600" b="1">
-                <a:solidFill>
-                  <a:srgbClr val="FFFFFF"/>
+              <a:rPr sz="5200" b="1" dirty="0">
+                <a:solidFill>
+                  <a:srgbClr val="212121"/>
                 </a:solidFill>
                 <a:latin typeface="Calibri"/>
               </a:rPr>
@@ -3384,8 +4091,8 @@
         </p:nvSpPr>
         <p:spPr>
           <a:xfrm>
-            <a:off x="457200" y="3657600"/>
-            <a:ext cx="10972800" cy="914400"/>
+            <a:off x="609447" y="2507902"/>
+            <a:ext cx="10972800" cy="400110"/>
           </a:xfrm>
           <a:prstGeom prst="rect">
             <a:avLst/>
@@ -3400,9 +4107,9 @@
           <a:p>
             <a:pPr algn="ctr"/>
             <a:r>
-              <a:rPr sz="1800" b="0">
-                <a:solidFill>
-                  <a:srgbClr val="969696"/>
+              <a:rPr sz="2000" b="0" dirty="0">
+                <a:solidFill>
+                  <a:srgbClr val="757575"/>
                 </a:solidFill>
                 <a:latin typeface="Calibri"/>
               </a:rPr>
@@ -3413,13 +4120,57 @@
       </p:sp>
       <p:sp>
         <p:nvSpPr>
-          <p:cNvPr id="5" name="TextBox 4"/>
+          <p:cNvPr id="5" name="Rounded Rectangle 4"/>
+          <p:cNvSpPr/>
+          <p:nvPr/>
+        </p:nvSpPr>
+        <p:spPr>
+          <a:xfrm>
+            <a:off x="2286000" y="3200400"/>
+            <a:ext cx="2286000" cy="1645920"/>
+          </a:xfrm>
+          <a:prstGeom prst="roundRect">
+            <a:avLst/>
+          </a:prstGeom>
+          <a:solidFill>
+            <a:srgbClr val="F5F5F5"/>
+          </a:solidFill>
+          <a:ln>
+            <a:noFill/>
+          </a:ln>
+        </p:spPr>
+        <p:style>
+          <a:lnRef idx="1">
+            <a:schemeClr val="accent1"/>
+          </a:lnRef>
+          <a:fillRef idx="3">
+            <a:schemeClr val="accent1"/>
+          </a:fillRef>
+          <a:effectRef idx="2">
+            <a:schemeClr val="accent1"/>
+          </a:effectRef>
+          <a:fontRef idx="minor">
+            <a:schemeClr val="lt1"/>
+          </a:fontRef>
+        </p:style>
+        <p:txBody>
+          <a:bodyPr rtlCol="0" anchor="ctr"/>
+          <a:lstStyle/>
+          <a:p>
+            <a:pPr algn="ctr"/>
+            <a:endParaRPr/>
+          </a:p>
+        </p:txBody>
+      </p:sp>
+      <p:sp>
+        <p:nvSpPr>
+          <p:cNvPr id="6" name="TextBox 5"/>
           <p:cNvSpPr txBox="1"/>
           <p:nvPr/>
         </p:nvSpPr>
         <p:spPr>
           <a:xfrm>
-            <a:off x="2743200" y="4114800"/>
+            <a:off x="2286000" y="3383280"/>
             <a:ext cx="2286000" cy="914400"/>
           </a:xfrm>
           <a:prstGeom prst="rect">
@@ -3437,7 +4188,7 @@
             <a:r>
               <a:rPr sz="3600" b="1">
                 <a:solidFill>
-                  <a:srgbClr val="34A853"/>
+                  <a:srgbClr val="0F9D58"/>
                 </a:solidFill>
                 <a:latin typeface="Calibri"/>
               </a:rPr>
@@ -3448,14 +4199,14 @@
       </p:sp>
       <p:sp>
         <p:nvSpPr>
-          <p:cNvPr id="6" name="TextBox 5"/>
+          <p:cNvPr id="7" name="TextBox 6"/>
           <p:cNvSpPr txBox="1"/>
           <p:nvPr/>
         </p:nvSpPr>
         <p:spPr>
           <a:xfrm>
-            <a:off x="2743200" y="4754880"/>
-            <a:ext cx="2286000" cy="914400"/>
+            <a:off x="2286000" y="4114800"/>
+            <a:ext cx="2286000" cy="338554"/>
           </a:xfrm>
           <a:prstGeom prst="rect">
             <a:avLst/>
@@ -3470,26 +4221,70 @@
           <a:p>
             <a:pPr algn="ctr"/>
             <a:r>
-              <a:rPr sz="1400" b="0">
-                <a:solidFill>
-                  <a:srgbClr val="969696"/>
+              <a:rPr sz="1600" b="0" dirty="0">
+                <a:solidFill>
+                  <a:srgbClr val="757575"/>
                 </a:solidFill>
                 <a:latin typeface="Calibri"/>
               </a:rPr>
-              <a:t>Success</a:t>
-            </a:r>
-          </a:p>
-        </p:txBody>
-      </p:sp>
-      <p:sp>
-        <p:nvSpPr>
-          <p:cNvPr id="7" name="TextBox 6"/>
+              <a:t>Success Rate</a:t>
+            </a:r>
+          </a:p>
+        </p:txBody>
+      </p:sp>
+      <p:sp>
+        <p:nvSpPr>
+          <p:cNvPr id="8" name="Rounded Rectangle 7"/>
+          <p:cNvSpPr/>
+          <p:nvPr/>
+        </p:nvSpPr>
+        <p:spPr>
+          <a:xfrm>
+            <a:off x="5029200" y="3200400"/>
+            <a:ext cx="2286000" cy="1645920"/>
+          </a:xfrm>
+          <a:prstGeom prst="roundRect">
+            <a:avLst/>
+          </a:prstGeom>
+          <a:solidFill>
+            <a:srgbClr val="F5F5F5"/>
+          </a:solidFill>
+          <a:ln>
+            <a:noFill/>
+          </a:ln>
+        </p:spPr>
+        <p:style>
+          <a:lnRef idx="1">
+            <a:schemeClr val="accent1"/>
+          </a:lnRef>
+          <a:fillRef idx="3">
+            <a:schemeClr val="accent1"/>
+          </a:fillRef>
+          <a:effectRef idx="2">
+            <a:schemeClr val="accent1"/>
+          </a:effectRef>
+          <a:fontRef idx="minor">
+            <a:schemeClr val="lt1"/>
+          </a:fontRef>
+        </p:style>
+        <p:txBody>
+          <a:bodyPr rtlCol="0" anchor="ctr"/>
+          <a:lstStyle/>
+          <a:p>
+            <a:pPr algn="ctr"/>
+            <a:endParaRPr/>
+          </a:p>
+        </p:txBody>
+      </p:sp>
+      <p:sp>
+        <p:nvSpPr>
+          <p:cNvPr id="9" name="TextBox 8"/>
           <p:cNvSpPr txBox="1"/>
           <p:nvPr/>
         </p:nvSpPr>
         <p:spPr>
           <a:xfrm>
-            <a:off x="5029200" y="4114800"/>
+            <a:off x="5029200" y="3383280"/>
             <a:ext cx="2286000" cy="914400"/>
           </a:xfrm>
           <a:prstGeom prst="rect">
@@ -3507,7 +4302,7 @@
             <a:r>
               <a:rPr sz="3600" b="1">
                 <a:solidFill>
-                  <a:srgbClr val="34A853"/>
+                  <a:srgbClr val="4285F4"/>
                 </a:solidFill>
                 <a:latin typeface="Calibri"/>
               </a:rPr>
@@ -3518,14 +4313,14 @@
       </p:sp>
       <p:sp>
         <p:nvSpPr>
-          <p:cNvPr id="8" name="TextBox 7"/>
+          <p:cNvPr id="10" name="TextBox 9"/>
           <p:cNvSpPr txBox="1"/>
           <p:nvPr/>
         </p:nvSpPr>
         <p:spPr>
           <a:xfrm>
-            <a:off x="5029200" y="4754880"/>
-            <a:ext cx="2286000" cy="914400"/>
+            <a:off x="5029200" y="4114800"/>
+            <a:ext cx="2286000" cy="338554"/>
           </a:xfrm>
           <a:prstGeom prst="rect">
             <a:avLst/>
@@ -3540,9 +4335,9 @@
           <a:p>
             <a:pPr algn="ctr"/>
             <a:r>
-              <a:rPr sz="1400" b="0">
-                <a:solidFill>
-                  <a:srgbClr val="969696"/>
+              <a:rPr sz="1600" b="0" dirty="0">
+                <a:solidFill>
+                  <a:srgbClr val="757575"/>
                 </a:solidFill>
                 <a:latin typeface="Calibri"/>
               </a:rPr>
@@ -3553,13 +4348,57 @@
       </p:sp>
       <p:sp>
         <p:nvSpPr>
-          <p:cNvPr id="9" name="TextBox 8"/>
+          <p:cNvPr id="11" name="Rounded Rectangle 10"/>
+          <p:cNvSpPr/>
+          <p:nvPr/>
+        </p:nvSpPr>
+        <p:spPr>
+          <a:xfrm>
+            <a:off x="7772400" y="3200400"/>
+            <a:ext cx="2286000" cy="1645920"/>
+          </a:xfrm>
+          <a:prstGeom prst="roundRect">
+            <a:avLst/>
+          </a:prstGeom>
+          <a:solidFill>
+            <a:srgbClr val="F5F5F5"/>
+          </a:solidFill>
+          <a:ln>
+            <a:noFill/>
+          </a:ln>
+        </p:spPr>
+        <p:style>
+          <a:lnRef idx="1">
+            <a:schemeClr val="accent1"/>
+          </a:lnRef>
+          <a:fillRef idx="3">
+            <a:schemeClr val="accent1"/>
+          </a:fillRef>
+          <a:effectRef idx="2">
+            <a:schemeClr val="accent1"/>
+          </a:effectRef>
+          <a:fontRef idx="minor">
+            <a:schemeClr val="lt1"/>
+          </a:fontRef>
+        </p:style>
+        <p:txBody>
+          <a:bodyPr rtlCol="0" anchor="ctr"/>
+          <a:lstStyle/>
+          <a:p>
+            <a:pPr algn="ctr"/>
+            <a:endParaRPr/>
+          </a:p>
+        </p:txBody>
+      </p:sp>
+      <p:sp>
+        <p:nvSpPr>
+          <p:cNvPr id="12" name="TextBox 11"/>
           <p:cNvSpPr txBox="1"/>
           <p:nvPr/>
         </p:nvSpPr>
         <p:spPr>
           <a:xfrm>
-            <a:off x="7315200" y="4114800"/>
+            <a:off x="7772400" y="3383280"/>
             <a:ext cx="2286000" cy="914400"/>
           </a:xfrm>
           <a:prstGeom prst="rect">
@@ -3577,7 +4416,7 @@
             <a:r>
               <a:rPr sz="3600" b="1">
                 <a:solidFill>
-                  <a:srgbClr val="34A853"/>
+                  <a:srgbClr val="0F9D58"/>
                 </a:solidFill>
                 <a:latin typeface="Calibri"/>
               </a:rPr>
@@ -3588,14 +4427,14 @@
       </p:sp>
       <p:sp>
         <p:nvSpPr>
-          <p:cNvPr id="10" name="TextBox 9"/>
+          <p:cNvPr id="13" name="TextBox 12"/>
           <p:cNvSpPr txBox="1"/>
           <p:nvPr/>
         </p:nvSpPr>
         <p:spPr>
           <a:xfrm>
-            <a:off x="7315200" y="4754880"/>
-            <a:ext cx="2286000" cy="914400"/>
+            <a:off x="7772400" y="4114800"/>
+            <a:ext cx="2286000" cy="338554"/>
           </a:xfrm>
           <a:prstGeom prst="rect">
             <a:avLst/>
@@ -3610,9 +4449,9 @@
           <a:p>
             <a:pPr algn="ctr"/>
             <a:r>
-              <a:rPr sz="1400" b="0">
-                <a:solidFill>
-                  <a:srgbClr val="969696"/>
+              <a:rPr sz="1600" b="0" dirty="0">
+                <a:solidFill>
+                  <a:srgbClr val="757575"/>
                 </a:solidFill>
                 <a:latin typeface="Calibri"/>
               </a:rPr>
@@ -3623,14 +4462,14 @@
       </p:sp>
       <p:sp>
         <p:nvSpPr>
-          <p:cNvPr id="11" name="TextBox 10"/>
+          <p:cNvPr id="17" name="TextBox 16"/>
           <p:cNvSpPr txBox="1"/>
           <p:nvPr/>
         </p:nvSpPr>
         <p:spPr>
           <a:xfrm>
-            <a:off x="457200" y="5943600"/>
-            <a:ext cx="10972800" cy="914400"/>
+            <a:off x="457200" y="5486400"/>
+            <a:ext cx="11277295" cy="914400"/>
           </a:xfrm>
           <a:prstGeom prst="rect">
             <a:avLst/>
@@ -3645,9 +4484,9 @@
           <a:p>
             <a:pPr algn="ctr"/>
             <a:r>
-              <a:rPr sz="2000" b="0">
-                <a:solidFill>
-                  <a:srgbClr val="969696"/>
+              <a:rPr sz="2000" b="0" dirty="0">
+                <a:solidFill>
+                  <a:srgbClr val="757575"/>
                 </a:solidFill>
                 <a:latin typeface="Calibri"/>
               </a:rPr>
@@ -3665,7 +4504,7 @@
 </file>
 
 <file path=ppt/slides/slide2.xml><?xml version="1.0" encoding="utf-8"?>
-<p:sld xmlns:a="http://schemas.openxmlformats.org/drawingml/2006/main" xmlns:p="http://schemas.openxmlformats.org/presentationml/2006/main" xmlns:r="http://schemas.openxmlformats.org/officeDocument/2006/relationships">
+<p:sld xmlns:a="http://schemas.openxmlformats.org/drawingml/2006/main" xmlns:r="http://schemas.openxmlformats.org/officeDocument/2006/relationships" xmlns:p="http://schemas.openxmlformats.org/presentationml/2006/main">
   <p:cSld>
     <p:spTree>
       <p:nvGrpSpPr>
@@ -3673,7 +4512,14 @@
         <p:cNvGrpSpPr/>
         <p:nvPr/>
       </p:nvGrpSpPr>
-      <p:grpSpPr/>
+      <p:grpSpPr>
+        <a:xfrm>
+          <a:off x="0" y="0"/>
+          <a:ext cx="0" cy="0"/>
+          <a:chOff x="0" y="0"/>
+          <a:chExt cx="0" cy="0"/>
+        </a:xfrm>
+      </p:grpSpPr>
       <p:sp>
         <p:nvSpPr>
           <p:cNvPr id="2" name="Rectangle 1"/>
@@ -3683,13 +4529,13 @@
         <p:spPr>
           <a:xfrm>
             <a:off x="0" y="0"/>
-            <a:ext cx="12191695" cy="6858000"/>
+            <a:ext cx="12191695" cy="91440"/>
           </a:xfrm>
           <a:prstGeom prst="rect">
             <a:avLst/>
           </a:prstGeom>
           <a:solidFill>
-            <a:srgbClr val="1E1E23"/>
+            <a:srgbClr val="DB4437"/>
           </a:solidFill>
           <a:ln>
             <a:noFill/>
@@ -3714,6 +4560,7 @@
           <a:lstStyle/>
           <a:p>
             <a:pPr algn="ctr"/>
+            <a:endParaRPr/>
           </a:p>
         </p:txBody>
       </p:sp>
@@ -3725,7 +4572,7 @@
         </p:nvSpPr>
         <p:spPr>
           <a:xfrm>
-            <a:off x="457200" y="457200"/>
+            <a:off x="457200" y="365760"/>
             <a:ext cx="11277295" cy="914400"/>
           </a:xfrm>
           <a:prstGeom prst="rect">
@@ -3741,9 +4588,9 @@
           <a:p>
             <a:pPr algn="ctr"/>
             <a:r>
-              <a:rPr sz="4000" b="1">
-                <a:solidFill>
-                  <a:srgbClr val="FFFFFF"/>
+              <a:rPr sz="3600" b="1">
+                <a:solidFill>
+                  <a:srgbClr val="212121"/>
                 </a:solidFill>
                 <a:latin typeface="Calibri"/>
               </a:rPr>
@@ -3754,14 +4601,58 @@
       </p:sp>
       <p:sp>
         <p:nvSpPr>
-          <p:cNvPr id="4" name="TextBox 3"/>
+          <p:cNvPr id="4" name="Rounded Rectangle 3"/>
+          <p:cNvSpPr/>
+          <p:nvPr/>
+        </p:nvSpPr>
+        <p:spPr>
+          <a:xfrm>
+            <a:off x="1828800" y="1280160"/>
+            <a:ext cx="8503920" cy="1097280"/>
+          </a:xfrm>
+          <a:prstGeom prst="roundRect">
+            <a:avLst/>
+          </a:prstGeom>
+          <a:solidFill>
+            <a:srgbClr val="F5F5F5"/>
+          </a:solidFill>
+          <a:ln>
+            <a:noFill/>
+          </a:ln>
+        </p:spPr>
+        <p:style>
+          <a:lnRef idx="1">
+            <a:schemeClr val="accent1"/>
+          </a:lnRef>
+          <a:fillRef idx="3">
+            <a:schemeClr val="accent1"/>
+          </a:fillRef>
+          <a:effectRef idx="2">
+            <a:schemeClr val="accent1"/>
+          </a:effectRef>
+          <a:fontRef idx="minor">
+            <a:schemeClr val="lt1"/>
+          </a:fontRef>
+        </p:style>
+        <p:txBody>
+          <a:bodyPr rtlCol="0" anchor="ctr"/>
+          <a:lstStyle/>
+          <a:p>
+            <a:pPr algn="ctr"/>
+            <a:endParaRPr/>
+          </a:p>
+        </p:txBody>
+      </p:sp>
+      <p:sp>
+        <p:nvSpPr>
+          <p:cNvPr id="5" name="TextBox 4"/>
           <p:cNvSpPr txBox="1"/>
           <p:nvPr/>
         </p:nvSpPr>
         <p:spPr>
           <a:xfrm>
-            <a:off x="914400" y="1645920"/>
-            <a:ext cx="10058400" cy="914400"/>
+            <a:off x="1828800" y="1463040"/>
+            <a:ext cx="8503920" cy="914400"/>
           </a:xfrm>
           <a:prstGeom prst="rect">
             <a:avLst/>
@@ -3776,9 +4667,9 @@
           <a:p>
             <a:pPr algn="ctr"/>
             <a:r>
-              <a:rPr sz="3200" b="0">
-                <a:solidFill>
-                  <a:srgbClr val="C8C8C8"/>
+              <a:rPr sz="2800" b="0">
+                <a:solidFill>
+                  <a:srgbClr val="212121"/>
                 </a:solidFill>
                 <a:latin typeface="Calibri"/>
               </a:rPr>
@@ -3789,14 +4680,14 @@
       </p:sp>
       <p:sp>
         <p:nvSpPr>
-          <p:cNvPr id="5" name="TextBox 4"/>
+          <p:cNvPr id="6" name="TextBox 5"/>
           <p:cNvSpPr txBox="1"/>
           <p:nvPr/>
         </p:nvSpPr>
         <p:spPr>
           <a:xfrm>
-            <a:off x="914400" y="2286000"/>
-            <a:ext cx="10058400" cy="914400"/>
+            <a:off x="1828800" y="1965960"/>
+            <a:ext cx="8503920" cy="914400"/>
           </a:xfrm>
           <a:prstGeom prst="rect">
             <a:avLst/>
@@ -3811,9 +4702,9 @@
           <a:p>
             <a:pPr algn="ctr"/>
             <a:r>
-              <a:rPr sz="1800" b="0">
-                <a:solidFill>
-                  <a:srgbClr val="969696"/>
+              <a:rPr sz="1400" b="0">
+                <a:solidFill>
+                  <a:srgbClr val="757575"/>
                 </a:solidFill>
                 <a:latin typeface="Calibri"/>
               </a:rPr>
@@ -3824,14 +4715,69 @@
       </p:sp>
       <p:sp>
         <p:nvSpPr>
-          <p:cNvPr id="6" name="TextBox 5"/>
+          <p:cNvPr id="7" name="Oval 6"/>
+          <p:cNvSpPr/>
+          <p:nvPr/>
+        </p:nvSpPr>
+        <p:spPr>
+          <a:xfrm>
+            <a:off x="2286000" y="2926080"/>
+            <a:ext cx="914400" cy="914400"/>
+          </a:xfrm>
+          <a:prstGeom prst="ellipse">
+            <a:avLst/>
+          </a:prstGeom>
+          <a:solidFill>
+            <a:srgbClr val="DB4437"/>
+          </a:solidFill>
+          <a:ln>
+            <a:noFill/>
+          </a:ln>
+        </p:spPr>
+        <p:style>
+          <a:lnRef idx="1">
+            <a:schemeClr val="accent1"/>
+          </a:lnRef>
+          <a:fillRef idx="3">
+            <a:schemeClr val="accent1"/>
+          </a:fillRef>
+          <a:effectRef idx="2">
+            <a:schemeClr val="accent1"/>
+          </a:effectRef>
+          <a:fontRef idx="minor">
+            <a:schemeClr val="lt1"/>
+          </a:fontRef>
+        </p:style>
+        <p:txBody>
+          <a:bodyPr rtlCol="0" anchor="ctr"/>
+          <a:lstStyle/>
+          <a:p>
+            <a:pPr algn="ctr">
+              <a:spcBef>
+                <a:spcPts val="0"/>
+              </a:spcBef>
+            </a:pPr>
+            <a:r>
+              <a:rPr sz="2800" b="1">
+                <a:solidFill>
+                  <a:srgbClr val="FFFFFF"/>
+                </a:solidFill>
+              </a:rPr>
+              <a:t>:(</a:t>
+            </a:r>
+          </a:p>
+        </p:txBody>
+      </p:sp>
+      <p:sp>
+        <p:nvSpPr>
+          <p:cNvPr id="8" name="TextBox 7"/>
           <p:cNvSpPr txBox="1"/>
           <p:nvPr/>
         </p:nvSpPr>
         <p:spPr>
           <a:xfrm>
-            <a:off x="914400" y="3200400"/>
-            <a:ext cx="10058400" cy="914400"/>
+            <a:off x="1828800" y="3931920"/>
+            <a:ext cx="1828800" cy="914400"/>
           </a:xfrm>
           <a:prstGeom prst="rect">
             <a:avLst/>
@@ -3846,27 +4792,126 @@
           <a:p>
             <a:pPr algn="ctr"/>
             <a:r>
-              <a:rPr sz="2400" b="0">
-                <a:solidFill>
-                  <a:srgbClr val="EA4335"/>
+              <a:rPr sz="1400" b="0">
+                <a:solidFill>
+                  <a:srgbClr val="757575"/>
                 </a:solidFill>
                 <a:latin typeface="Calibri"/>
               </a:rPr>
-              <a:t>Player frustration → Potential churn</a:t>
-            </a:r>
-          </a:p>
-        </p:txBody>
-      </p:sp>
-      <p:sp>
-        <p:nvSpPr>
-          <p:cNvPr id="7" name="TextBox 6"/>
+              <a:t>Frustration</a:t>
+            </a:r>
+          </a:p>
+        </p:txBody>
+      </p:sp>
+      <p:sp>
+        <p:nvSpPr>
+          <p:cNvPr id="9" name="Right Arrow 8"/>
+          <p:cNvSpPr/>
+          <p:nvPr/>
+        </p:nvSpPr>
+        <p:spPr>
+          <a:xfrm>
+            <a:off x="3657600" y="3200400"/>
+            <a:ext cx="1097280" cy="365760"/>
+          </a:xfrm>
+          <a:prstGeom prst="rightArrow">
+            <a:avLst/>
+          </a:prstGeom>
+          <a:solidFill>
+            <a:srgbClr val="BDBDBD"/>
+          </a:solidFill>
+          <a:ln>
+            <a:noFill/>
+          </a:ln>
+        </p:spPr>
+        <p:style>
+          <a:lnRef idx="1">
+            <a:schemeClr val="accent1"/>
+          </a:lnRef>
+          <a:fillRef idx="3">
+            <a:schemeClr val="accent1"/>
+          </a:fillRef>
+          <a:effectRef idx="2">
+            <a:schemeClr val="accent1"/>
+          </a:effectRef>
+          <a:fontRef idx="minor">
+            <a:schemeClr val="lt1"/>
+          </a:fontRef>
+        </p:style>
+        <p:txBody>
+          <a:bodyPr rtlCol="0" anchor="ctr"/>
+          <a:lstStyle/>
+          <a:p>
+            <a:pPr algn="ctr"/>
+            <a:endParaRPr/>
+          </a:p>
+        </p:txBody>
+      </p:sp>
+      <p:sp>
+        <p:nvSpPr>
+          <p:cNvPr id="10" name="Oval 9"/>
+          <p:cNvSpPr/>
+          <p:nvPr/>
+        </p:nvSpPr>
+        <p:spPr>
+          <a:xfrm>
+            <a:off x="5303520" y="2926080"/>
+            <a:ext cx="914400" cy="914400"/>
+          </a:xfrm>
+          <a:prstGeom prst="ellipse">
+            <a:avLst/>
+          </a:prstGeom>
+          <a:solidFill>
+            <a:srgbClr val="F4B400"/>
+          </a:solidFill>
+          <a:ln>
+            <a:noFill/>
+          </a:ln>
+        </p:spPr>
+        <p:style>
+          <a:lnRef idx="1">
+            <a:schemeClr val="accent1"/>
+          </a:lnRef>
+          <a:fillRef idx="3">
+            <a:schemeClr val="accent1"/>
+          </a:fillRef>
+          <a:effectRef idx="2">
+            <a:schemeClr val="accent1"/>
+          </a:effectRef>
+          <a:fontRef idx="minor">
+            <a:schemeClr val="lt1"/>
+          </a:fontRef>
+        </p:style>
+        <p:txBody>
+          <a:bodyPr rtlCol="0" anchor="ctr"/>
+          <a:lstStyle/>
+          <a:p>
+            <a:pPr algn="ctr">
+              <a:spcBef>
+                <a:spcPts val="0"/>
+              </a:spcBef>
+            </a:pPr>
+            <a:r>
+              <a:rPr sz="2800" b="1">
+                <a:solidFill>
+                  <a:srgbClr val="FFFFFF"/>
+                </a:solidFill>
+              </a:rPr>
+              <a:t>→</a:t>
+            </a:r>
+          </a:p>
+        </p:txBody>
+      </p:sp>
+      <p:sp>
+        <p:nvSpPr>
+          <p:cNvPr id="11" name="TextBox 10"/>
           <p:cNvSpPr txBox="1"/>
           <p:nvPr/>
         </p:nvSpPr>
         <p:spPr>
           <a:xfrm>
-            <a:off x="914400" y="4389120"/>
-            <a:ext cx="10058400" cy="914400"/>
+            <a:off x="4846320" y="3931920"/>
+            <a:ext cx="1828800" cy="914400"/>
           </a:xfrm>
           <a:prstGeom prst="rect">
             <a:avLst/>
@@ -3881,27 +4926,126 @@
           <a:p>
             <a:pPr algn="ctr"/>
             <a:r>
-              <a:rPr sz="2000" b="0">
-                <a:solidFill>
-                  <a:srgbClr val="969696"/>
+              <a:rPr sz="1400" b="0">
+                <a:solidFill>
+                  <a:srgbClr val="757575"/>
                 </a:solidFill>
                 <a:latin typeface="Calibri"/>
               </a:rPr>
-              <a:t>Hypothesis:</a:t>
-            </a:r>
-          </a:p>
-        </p:txBody>
-      </p:sp>
-      <p:sp>
-        <p:nvSpPr>
-          <p:cNvPr id="8" name="TextBox 7"/>
+              <a:t>Potential Churn</a:t>
+            </a:r>
+          </a:p>
+        </p:txBody>
+      </p:sp>
+      <p:sp>
+        <p:nvSpPr>
+          <p:cNvPr id="12" name="Right Arrow 11"/>
+          <p:cNvSpPr/>
+          <p:nvPr/>
+        </p:nvSpPr>
+        <p:spPr>
+          <a:xfrm>
+            <a:off x="6675120" y="3200400"/>
+            <a:ext cx="1097280" cy="365760"/>
+          </a:xfrm>
+          <a:prstGeom prst="rightArrow">
+            <a:avLst/>
+          </a:prstGeom>
+          <a:solidFill>
+            <a:srgbClr val="BDBDBD"/>
+          </a:solidFill>
+          <a:ln>
+            <a:noFill/>
+          </a:ln>
+        </p:spPr>
+        <p:style>
+          <a:lnRef idx="1">
+            <a:schemeClr val="accent1"/>
+          </a:lnRef>
+          <a:fillRef idx="3">
+            <a:schemeClr val="accent1"/>
+          </a:fillRef>
+          <a:effectRef idx="2">
+            <a:schemeClr val="accent1"/>
+          </a:effectRef>
+          <a:fontRef idx="minor">
+            <a:schemeClr val="lt1"/>
+          </a:fontRef>
+        </p:style>
+        <p:txBody>
+          <a:bodyPr rtlCol="0" anchor="ctr"/>
+          <a:lstStyle/>
+          <a:p>
+            <a:pPr algn="ctr"/>
+            <a:endParaRPr/>
+          </a:p>
+        </p:txBody>
+      </p:sp>
+      <p:sp>
+        <p:nvSpPr>
+          <p:cNvPr id="13" name="Oval 12"/>
+          <p:cNvSpPr/>
+          <p:nvPr/>
+        </p:nvSpPr>
+        <p:spPr>
+          <a:xfrm>
+            <a:off x="8321040" y="2926080"/>
+            <a:ext cx="914400" cy="914400"/>
+          </a:xfrm>
+          <a:prstGeom prst="ellipse">
+            <a:avLst/>
+          </a:prstGeom>
+          <a:solidFill>
+            <a:srgbClr val="0F9D58"/>
+          </a:solidFill>
+          <a:ln>
+            <a:noFill/>
+          </a:ln>
+        </p:spPr>
+        <p:style>
+          <a:lnRef idx="1">
+            <a:schemeClr val="accent1"/>
+          </a:lnRef>
+          <a:fillRef idx="3">
+            <a:schemeClr val="accent1"/>
+          </a:fillRef>
+          <a:effectRef idx="2">
+            <a:schemeClr val="accent1"/>
+          </a:effectRef>
+          <a:fontRef idx="minor">
+            <a:schemeClr val="lt1"/>
+          </a:fontRef>
+        </p:style>
+        <p:txBody>
+          <a:bodyPr rtlCol="0" anchor="ctr"/>
+          <a:lstStyle/>
+          <a:p>
+            <a:pPr algn="ctr">
+              <a:spcBef>
+                <a:spcPts val="0"/>
+              </a:spcBef>
+            </a:pPr>
+            <a:r>
+              <a:rPr sz="2800" b="1">
+                <a:solidFill>
+                  <a:srgbClr val="FFFFFF"/>
+                </a:solidFill>
+              </a:rPr>
+              <a:t>?</a:t>
+            </a:r>
+          </a:p>
+        </p:txBody>
+      </p:sp>
+      <p:sp>
+        <p:nvSpPr>
+          <p:cNvPr id="14" name="TextBox 13"/>
           <p:cNvSpPr txBox="1"/>
           <p:nvPr/>
         </p:nvSpPr>
         <p:spPr>
           <a:xfrm>
-            <a:off x="914400" y="4846320"/>
-            <a:ext cx="10058400" cy="914400"/>
+            <a:off x="7863840" y="3931920"/>
+            <a:ext cx="1828800" cy="914400"/>
           </a:xfrm>
           <a:prstGeom prst="rect">
             <a:avLst/>
@@ -3916,27 +5060,73 @@
           <a:p>
             <a:pPr algn="ctr"/>
             <a:r>
-              <a:rPr sz="2800" b="1">
-                <a:solidFill>
-                  <a:srgbClr val="34A853"/>
+              <a:rPr sz="1400" b="0">
+                <a:solidFill>
+                  <a:srgbClr val="757575"/>
                 </a:solidFill>
                 <a:latin typeface="Calibri"/>
               </a:rPr>
-              <a:t>A stronger boost will help players succeed</a:t>
-            </a:r>
-          </a:p>
-        </p:txBody>
-      </p:sp>
-      <p:sp>
-        <p:nvSpPr>
-          <p:cNvPr id="9" name="TextBox 8"/>
+              <a:t>Solution?</a:t>
+            </a:r>
+          </a:p>
+        </p:txBody>
+      </p:sp>
+      <p:sp>
+        <p:nvSpPr>
+          <p:cNvPr id="15" name="Rounded Rectangle 14"/>
+          <p:cNvSpPr/>
+          <p:nvPr/>
+        </p:nvSpPr>
+        <p:spPr>
+          <a:xfrm>
+            <a:off x="1828800" y="4754880"/>
+            <a:ext cx="8503920" cy="1371600"/>
+          </a:xfrm>
+          <a:prstGeom prst="roundRect">
+            <a:avLst/>
+          </a:prstGeom>
+          <a:solidFill>
+            <a:srgbClr val="E8F5E9"/>
+          </a:solidFill>
+          <a:ln w="25400">
+            <a:solidFill>
+              <a:srgbClr val="0F9D58"/>
+            </a:solidFill>
+          </a:ln>
+        </p:spPr>
+        <p:style>
+          <a:lnRef idx="1">
+            <a:schemeClr val="accent1"/>
+          </a:lnRef>
+          <a:fillRef idx="3">
+            <a:schemeClr val="accent1"/>
+          </a:fillRef>
+          <a:effectRef idx="2">
+            <a:schemeClr val="accent1"/>
+          </a:effectRef>
+          <a:fontRef idx="minor">
+            <a:schemeClr val="lt1"/>
+          </a:fontRef>
+        </p:style>
+        <p:txBody>
+          <a:bodyPr rtlCol="0" anchor="ctr"/>
+          <a:lstStyle/>
+          <a:p>
+            <a:pPr algn="ctr"/>
+            <a:endParaRPr/>
+          </a:p>
+        </p:txBody>
+      </p:sp>
+      <p:sp>
+        <p:nvSpPr>
+          <p:cNvPr id="16" name="TextBox 15"/>
           <p:cNvSpPr txBox="1"/>
           <p:nvPr/>
         </p:nvSpPr>
         <p:spPr>
           <a:xfrm>
-            <a:off x="914400" y="5394960"/>
-            <a:ext cx="10058400" cy="914400"/>
+            <a:off x="1828800" y="4892040"/>
+            <a:ext cx="8503920" cy="914400"/>
           </a:xfrm>
           <a:prstGeom prst="rect">
             <a:avLst/>
@@ -3951,9 +5141,79 @@
           <a:p>
             <a:pPr algn="ctr"/>
             <a:r>
-              <a:rPr sz="2800" b="1">
-                <a:solidFill>
-                  <a:srgbClr val="34A853"/>
+              <a:rPr sz="1400" b="1">
+                <a:solidFill>
+                  <a:srgbClr val="0F9D58"/>
+                </a:solidFill>
+                <a:latin typeface="Calibri"/>
+              </a:rPr>
+              <a:t>Hypothesis</a:t>
+            </a:r>
+          </a:p>
+        </p:txBody>
+      </p:sp>
+      <p:sp>
+        <p:nvSpPr>
+          <p:cNvPr id="17" name="TextBox 16"/>
+          <p:cNvSpPr txBox="1"/>
+          <p:nvPr/>
+        </p:nvSpPr>
+        <p:spPr>
+          <a:xfrm>
+            <a:off x="1828800" y="5212080"/>
+            <a:ext cx="8503920" cy="914400"/>
+          </a:xfrm>
+          <a:prstGeom prst="rect">
+            <a:avLst/>
+          </a:prstGeom>
+          <a:noFill/>
+        </p:spPr>
+        <p:txBody>
+          <a:bodyPr wrap="square">
+            <a:spAutoFit/>
+          </a:bodyPr>
+          <a:lstStyle/>
+          <a:p>
+            <a:pPr algn="ctr"/>
+            <a:r>
+              <a:rPr sz="2200" b="1">
+                <a:solidFill>
+                  <a:srgbClr val="212121"/>
+                </a:solidFill>
+                <a:latin typeface="Calibri"/>
+              </a:rPr>
+              <a:t>A stronger boost will help players succeed</a:t>
+            </a:r>
+          </a:p>
+        </p:txBody>
+      </p:sp>
+      <p:sp>
+        <p:nvSpPr>
+          <p:cNvPr id="18" name="TextBox 17"/>
+          <p:cNvSpPr txBox="1"/>
+          <p:nvPr/>
+        </p:nvSpPr>
+        <p:spPr>
+          <a:xfrm>
+            <a:off x="1828800" y="5623560"/>
+            <a:ext cx="8503920" cy="914400"/>
+          </a:xfrm>
+          <a:prstGeom prst="rect">
+            <a:avLst/>
+          </a:prstGeom>
+          <a:noFill/>
+        </p:spPr>
+        <p:txBody>
+          <a:bodyPr wrap="square">
+            <a:spAutoFit/>
+          </a:bodyPr>
+          <a:lstStyle/>
+          <a:p>
+            <a:pPr algn="ctr"/>
+            <a:r>
+              <a:rPr sz="1800" b="0">
+                <a:solidFill>
+                  <a:srgbClr val="757575"/>
                 </a:solidFill>
                 <a:latin typeface="Calibri"/>
               </a:rPr>
@@ -3971,7 +5231,7 @@
 </file>
 
 <file path=ppt/slides/slide3.xml><?xml version="1.0" encoding="utf-8"?>
-<p:sld xmlns:a="http://schemas.openxmlformats.org/drawingml/2006/main" xmlns:p="http://schemas.openxmlformats.org/presentationml/2006/main" xmlns:r="http://schemas.openxmlformats.org/officeDocument/2006/relationships">
+<p:sld xmlns:a="http://schemas.openxmlformats.org/drawingml/2006/main" xmlns:r="http://schemas.openxmlformats.org/officeDocument/2006/relationships" xmlns:p="http://schemas.openxmlformats.org/presentationml/2006/main">
   <p:cSld>
     <p:spTree>
       <p:nvGrpSpPr>
@@ -3979,7 +5239,14 @@
         <p:cNvGrpSpPr/>
         <p:nvPr/>
       </p:nvGrpSpPr>
-      <p:grpSpPr/>
+      <p:grpSpPr>
+        <a:xfrm>
+          <a:off x="0" y="0"/>
+          <a:ext cx="0" cy="0"/>
+          <a:chOff x="0" y="0"/>
+          <a:chExt cx="0" cy="0"/>
+        </a:xfrm>
+      </p:grpSpPr>
       <p:sp>
         <p:nvSpPr>
           <p:cNvPr id="2" name="Rectangle 1"/>
@@ -3989,478 +5256,7 @@
         <p:spPr>
           <a:xfrm>
             <a:off x="0" y="0"/>
-            <a:ext cx="12191695" cy="6858000"/>
-          </a:xfrm>
-          <a:prstGeom prst="rect">
-            <a:avLst/>
-          </a:prstGeom>
-          <a:solidFill>
-            <a:srgbClr val="1E1E23"/>
-          </a:solidFill>
-          <a:ln>
-            <a:noFill/>
-          </a:ln>
-        </p:spPr>
-        <p:style>
-          <a:lnRef idx="1">
-            <a:schemeClr val="accent1"/>
-          </a:lnRef>
-          <a:fillRef idx="3">
-            <a:schemeClr val="accent1"/>
-          </a:fillRef>
-          <a:effectRef idx="2">
-            <a:schemeClr val="accent1"/>
-          </a:effectRef>
-          <a:fontRef idx="minor">
-            <a:schemeClr val="lt1"/>
-          </a:fontRef>
-        </p:style>
-        <p:txBody>
-          <a:bodyPr rtlCol="0" anchor="ctr"/>
-          <a:lstStyle/>
-          <a:p>
-            <a:pPr algn="ctr"/>
-          </a:p>
-        </p:txBody>
-      </p:sp>
-      <p:sp>
-        <p:nvSpPr>
-          <p:cNvPr id="3" name="TextBox 2"/>
-          <p:cNvSpPr txBox="1"/>
-          <p:nvPr/>
-        </p:nvSpPr>
-        <p:spPr>
-          <a:xfrm>
-            <a:off x="457200" y="274320"/>
-            <a:ext cx="11277295" cy="914400"/>
-          </a:xfrm>
-          <a:prstGeom prst="rect">
-            <a:avLst/>
-          </a:prstGeom>
-          <a:noFill/>
-        </p:spPr>
-        <p:txBody>
-          <a:bodyPr wrap="square">
-            <a:spAutoFit/>
-          </a:bodyPr>
-          <a:lstStyle/>
-          <a:p>
-            <a:pPr algn="ctr"/>
-            <a:r>
-              <a:rPr sz="4000" b="1">
-                <a:solidFill>
-                  <a:srgbClr val="FFFFFF"/>
-                </a:solidFill>
-                <a:latin typeface="Calibri"/>
-              </a:rPr>
-              <a:t>The Experiment</a:t>
-            </a:r>
-          </a:p>
-        </p:txBody>
-      </p:sp>
-      <p:sp>
-        <p:nvSpPr>
-          <p:cNvPr id="4" name="TextBox 3"/>
-          <p:cNvSpPr txBox="1"/>
-          <p:nvPr/>
-        </p:nvSpPr>
-        <p:spPr>
-          <a:xfrm>
-            <a:off x="1828800" y="1371600"/>
-            <a:ext cx="3657600" cy="914400"/>
-          </a:xfrm>
-          <a:prstGeom prst="rect">
-            <a:avLst/>
-          </a:prstGeom>
-          <a:noFill/>
-        </p:spPr>
-        <p:txBody>
-          <a:bodyPr wrap="square">
-            <a:spAutoFit/>
-          </a:bodyPr>
-          <a:lstStyle/>
-          <a:p>
-            <a:pPr algn="ctr"/>
-            <a:r>
-              <a:rPr sz="2400" b="1">
-                <a:solidFill>
-                  <a:srgbClr val="4285F4"/>
-                </a:solidFill>
-                <a:latin typeface="Calibri"/>
-              </a:rPr>
-              <a:t>GROUP A</a:t>
-            </a:r>
-          </a:p>
-        </p:txBody>
-      </p:sp>
-      <p:sp>
-        <p:nvSpPr>
-          <p:cNvPr id="5" name="TextBox 4"/>
-          <p:cNvSpPr txBox="1"/>
-          <p:nvPr/>
-        </p:nvSpPr>
-        <p:spPr>
-          <a:xfrm>
-            <a:off x="1828800" y="1920240"/>
-            <a:ext cx="3657600" cy="914400"/>
-          </a:xfrm>
-          <a:prstGeom prst="rect">
-            <a:avLst/>
-          </a:prstGeom>
-          <a:noFill/>
-        </p:spPr>
-        <p:txBody>
-          <a:bodyPr wrap="square">
-            <a:spAutoFit/>
-          </a:bodyPr>
-          <a:lstStyle/>
-          <a:p>
-            <a:pPr algn="ctr"/>
-            <a:r>
-              <a:rPr sz="2000" b="0">
-                <a:solidFill>
-                  <a:srgbClr val="FFFFFF"/>
-                </a:solidFill>
-                <a:latin typeface="Calibri"/>
-              </a:rPr>
-              <a:t>Stronger Boost</a:t>
-            </a:r>
-          </a:p>
-        </p:txBody>
-      </p:sp>
-      <p:sp>
-        <p:nvSpPr>
-          <p:cNvPr id="6" name="TextBox 5"/>
-          <p:cNvSpPr txBox="1"/>
-          <p:nvPr/>
-        </p:nvSpPr>
-        <p:spPr>
-          <a:xfrm>
-            <a:off x="1828800" y="2377440"/>
-            <a:ext cx="3657600" cy="914400"/>
-          </a:xfrm>
-          <a:prstGeom prst="rect">
-            <a:avLst/>
-          </a:prstGeom>
-          <a:noFill/>
-        </p:spPr>
-        <p:txBody>
-          <a:bodyPr wrap="square">
-            <a:spAutoFit/>
-          </a:bodyPr>
-          <a:lstStyle/>
-          <a:p>
-            <a:pPr algn="ctr"/>
-            <a:r>
-              <a:rPr sz="1600" b="0">
-                <a:solidFill>
-                  <a:srgbClr val="969696"/>
-                </a:solidFill>
-                <a:latin typeface="Calibri"/>
-              </a:rPr>
-              <a:t>6,923 players</a:t>
-            </a:r>
-          </a:p>
-        </p:txBody>
-      </p:sp>
-      <p:sp>
-        <p:nvSpPr>
-          <p:cNvPr id="7" name="TextBox 6"/>
-          <p:cNvSpPr txBox="1"/>
-          <p:nvPr/>
-        </p:nvSpPr>
-        <p:spPr>
-          <a:xfrm>
-            <a:off x="5029200" y="1828800"/>
-            <a:ext cx="1828800" cy="914400"/>
-          </a:xfrm>
-          <a:prstGeom prst="rect">
-            <a:avLst/>
-          </a:prstGeom>
-          <a:noFill/>
-        </p:spPr>
-        <p:txBody>
-          <a:bodyPr wrap="square">
-            <a:spAutoFit/>
-          </a:bodyPr>
-          <a:lstStyle/>
-          <a:p>
-            <a:pPr algn="ctr"/>
-            <a:r>
-              <a:rPr sz="3200" b="1">
-                <a:solidFill>
-                  <a:srgbClr val="969696"/>
-                </a:solidFill>
-                <a:latin typeface="Calibri"/>
-              </a:rPr>
-              <a:t>vs</a:t>
-            </a:r>
-          </a:p>
-        </p:txBody>
-      </p:sp>
-      <p:sp>
-        <p:nvSpPr>
-          <p:cNvPr id="8" name="TextBox 7"/>
-          <p:cNvSpPr txBox="1"/>
-          <p:nvPr/>
-        </p:nvSpPr>
-        <p:spPr>
-          <a:xfrm>
-            <a:off x="6858000" y="1371600"/>
-            <a:ext cx="3657600" cy="914400"/>
-          </a:xfrm>
-          <a:prstGeom prst="rect">
-            <a:avLst/>
-          </a:prstGeom>
-          <a:noFill/>
-        </p:spPr>
-        <p:txBody>
-          <a:bodyPr wrap="square">
-            <a:spAutoFit/>
-          </a:bodyPr>
-          <a:lstStyle/>
-          <a:p>
-            <a:pPr algn="ctr"/>
-            <a:r>
-              <a:rPr sz="2400" b="1">
-                <a:solidFill>
-                  <a:srgbClr val="EA4335"/>
-                </a:solidFill>
-                <a:latin typeface="Calibri"/>
-              </a:rPr>
-              <a:t>GROUP B</a:t>
-            </a:r>
-          </a:p>
-        </p:txBody>
-      </p:sp>
-      <p:sp>
-        <p:nvSpPr>
-          <p:cNvPr id="9" name="TextBox 8"/>
-          <p:cNvSpPr txBox="1"/>
-          <p:nvPr/>
-        </p:nvSpPr>
-        <p:spPr>
-          <a:xfrm>
-            <a:off x="6858000" y="1920240"/>
-            <a:ext cx="3657600" cy="914400"/>
-          </a:xfrm>
-          <a:prstGeom prst="rect">
-            <a:avLst/>
-          </a:prstGeom>
-          <a:noFill/>
-        </p:spPr>
-        <p:txBody>
-          <a:bodyPr wrap="square">
-            <a:spAutoFit/>
-          </a:bodyPr>
-          <a:lstStyle/>
-          <a:p>
-            <a:pPr algn="ctr"/>
-            <a:r>
-              <a:rPr sz="2000" b="0">
-                <a:solidFill>
-                  <a:srgbClr val="FFFFFF"/>
-                </a:solidFill>
-                <a:latin typeface="Calibri"/>
-              </a:rPr>
-              <a:t>Original Boost</a:t>
-            </a:r>
-          </a:p>
-        </p:txBody>
-      </p:sp>
-      <p:sp>
-        <p:nvSpPr>
-          <p:cNvPr id="10" name="TextBox 9"/>
-          <p:cNvSpPr txBox="1"/>
-          <p:nvPr/>
-        </p:nvSpPr>
-        <p:spPr>
-          <a:xfrm>
-            <a:off x="6858000" y="2377440"/>
-            <a:ext cx="3657600" cy="914400"/>
-          </a:xfrm>
-          <a:prstGeom prst="rect">
-            <a:avLst/>
-          </a:prstGeom>
-          <a:noFill/>
-        </p:spPr>
-        <p:txBody>
-          <a:bodyPr wrap="square">
-            <a:spAutoFit/>
-          </a:bodyPr>
-          <a:lstStyle/>
-          <a:p>
-            <a:pPr algn="ctr"/>
-            <a:r>
-              <a:rPr sz="1600" b="0">
-                <a:solidFill>
-                  <a:srgbClr val="969696"/>
-                </a:solidFill>
-                <a:latin typeface="Calibri"/>
-              </a:rPr>
-              <a:t>7,017 players</a:t>
-            </a:r>
-          </a:p>
-        </p:txBody>
-      </p:sp>
-      <p:sp>
-        <p:nvSpPr>
-          <p:cNvPr id="11" name="TextBox 10"/>
-          <p:cNvSpPr txBox="1"/>
-          <p:nvPr/>
-        </p:nvSpPr>
-        <p:spPr>
-          <a:xfrm>
-            <a:off x="457200" y="3474720"/>
-            <a:ext cx="10972800" cy="914400"/>
-          </a:xfrm>
-          <a:prstGeom prst="rect">
-            <a:avLst/>
-          </a:prstGeom>
-          <a:noFill/>
-        </p:spPr>
-        <p:txBody>
-          <a:bodyPr wrap="square">
-            <a:spAutoFit/>
-          </a:bodyPr>
-          <a:lstStyle/>
-          <a:p>
-            <a:pPr algn="l"/>
-            <a:r>
-              <a:rPr sz="2000" b="1">
-                <a:solidFill>
-                  <a:srgbClr val="969696"/>
-                </a:solidFill>
-                <a:latin typeface="Calibri"/>
-              </a:rPr>
-              <a:t>Timeline</a:t>
-            </a:r>
-          </a:p>
-        </p:txBody>
-      </p:sp>
-      <p:sp>
-        <p:nvSpPr>
-          <p:cNvPr id="12" name="Rectangle 11"/>
-          <p:cNvSpPr/>
-          <p:nvPr/>
-        </p:nvSpPr>
-        <p:spPr>
-          <a:xfrm>
-            <a:off x="914400" y="4114800"/>
-            <a:ext cx="2743200" cy="731520"/>
-          </a:xfrm>
-          <a:prstGeom prst="rect">
-            <a:avLst/>
-          </a:prstGeom>
-          <a:solidFill>
-            <a:srgbClr val="3C3C41"/>
-          </a:solidFill>
-          <a:ln>
-            <a:noFill/>
-          </a:ln>
-        </p:spPr>
-        <p:style>
-          <a:lnRef idx="1">
-            <a:schemeClr val="accent1"/>
-          </a:lnRef>
-          <a:fillRef idx="3">
-            <a:schemeClr val="accent1"/>
-          </a:fillRef>
-          <a:effectRef idx="2">
-            <a:schemeClr val="accent1"/>
-          </a:effectRef>
-          <a:fontRef idx="minor">
-            <a:schemeClr val="lt1"/>
-          </a:fontRef>
-        </p:style>
-        <p:txBody>
-          <a:bodyPr rtlCol="0" anchor="ctr"/>
-          <a:lstStyle/>
-          <a:p>
-            <a:pPr algn="ctr"/>
-          </a:p>
-        </p:txBody>
-      </p:sp>
-      <p:sp>
-        <p:nvSpPr>
-          <p:cNvPr id="13" name="TextBox 12"/>
-          <p:cNvSpPr txBox="1"/>
-          <p:nvPr/>
-        </p:nvSpPr>
-        <p:spPr>
-          <a:xfrm>
-            <a:off x="914400" y="4114800"/>
-            <a:ext cx="2743200" cy="914400"/>
-          </a:xfrm>
-          <a:prstGeom prst="rect">
-            <a:avLst/>
-          </a:prstGeom>
-          <a:noFill/>
-        </p:spPr>
-        <p:txBody>
-          <a:bodyPr wrap="square">
-            <a:spAutoFit/>
-          </a:bodyPr>
-          <a:lstStyle/>
-          <a:p>
-            <a:pPr algn="ctr"/>
-            <a:r>
-              <a:rPr sz="1400" b="0">
-                <a:solidFill>
-                  <a:srgbClr val="FFFFFF"/>
-                </a:solidFill>
-                <a:latin typeface="Calibri"/>
-              </a:rPr>
-              <a:t>Jan - May</a:t>
-            </a:r>
-          </a:p>
-        </p:txBody>
-      </p:sp>
-      <p:sp>
-        <p:nvSpPr>
-          <p:cNvPr id="14" name="TextBox 13"/>
-          <p:cNvSpPr txBox="1"/>
-          <p:nvPr/>
-        </p:nvSpPr>
-        <p:spPr>
-          <a:xfrm>
-            <a:off x="914400" y="4434840"/>
-            <a:ext cx="2743200" cy="914400"/>
-          </a:xfrm>
-          <a:prstGeom prst="rect">
-            <a:avLst/>
-          </a:prstGeom>
-          <a:noFill/>
-        </p:spPr>
-        <p:txBody>
-          <a:bodyPr wrap="square">
-            <a:spAutoFit/>
-          </a:bodyPr>
-          <a:lstStyle/>
-          <a:p>
-            <a:pPr algn="ctr"/>
-            <a:r>
-              <a:rPr sz="1200" b="0">
-                <a:solidFill>
-                  <a:srgbClr val="969696"/>
-                </a:solidFill>
-                <a:latin typeface="Calibri"/>
-              </a:rPr>
-              <a:t>Baseline</a:t>
-            </a:r>
-          </a:p>
-        </p:txBody>
-      </p:sp>
-      <p:sp>
-        <p:nvSpPr>
-          <p:cNvPr id="15" name="Rectangle 14"/>
-          <p:cNvSpPr/>
-          <p:nvPr/>
-        </p:nvSpPr>
-        <p:spPr>
-          <a:xfrm>
-            <a:off x="3840480" y="4114800"/>
-            <a:ext cx="3200400" cy="731520"/>
+            <a:ext cx="12191695" cy="91440"/>
           </a:xfrm>
           <a:prstGeom prst="rect">
             <a:avLst/>
@@ -4491,19 +5287,20 @@
           <a:lstStyle/>
           <a:p>
             <a:pPr algn="ctr"/>
-          </a:p>
-        </p:txBody>
-      </p:sp>
-      <p:sp>
-        <p:nvSpPr>
-          <p:cNvPr id="16" name="TextBox 15"/>
+            <a:endParaRPr/>
+          </a:p>
+        </p:txBody>
+      </p:sp>
+      <p:sp>
+        <p:nvSpPr>
+          <p:cNvPr id="3" name="TextBox 2"/>
           <p:cNvSpPr txBox="1"/>
           <p:nvPr/>
         </p:nvSpPr>
         <p:spPr>
           <a:xfrm>
-            <a:off x="3840480" y="4114800"/>
-            <a:ext cx="3200400" cy="914400"/>
+            <a:off x="152705" y="239722"/>
+            <a:ext cx="11277295" cy="914400"/>
           </a:xfrm>
           <a:prstGeom prst="rect">
             <a:avLst/>
@@ -4518,71 +5315,38 @@
           <a:p>
             <a:pPr algn="ctr"/>
             <a:r>
-              <a:rPr sz="1400" b="0">
-                <a:solidFill>
-                  <a:srgbClr val="FFFFFF"/>
+              <a:rPr sz="3600" b="1">
+                <a:solidFill>
+                  <a:srgbClr val="212121"/>
                 </a:solidFill>
                 <a:latin typeface="Calibri"/>
               </a:rPr>
-              <a:t>June - Sept</a:t>
-            </a:r>
-          </a:p>
-        </p:txBody>
-      </p:sp>
-      <p:sp>
-        <p:nvSpPr>
-          <p:cNvPr id="17" name="TextBox 16"/>
-          <p:cNvSpPr txBox="1"/>
-          <p:nvPr/>
-        </p:nvSpPr>
-        <p:spPr>
-          <a:xfrm>
-            <a:off x="3840480" y="4434840"/>
-            <a:ext cx="3200400" cy="914400"/>
-          </a:xfrm>
-          <a:prstGeom prst="rect">
-            <a:avLst/>
-          </a:prstGeom>
-          <a:noFill/>
-        </p:spPr>
-        <p:txBody>
-          <a:bodyPr wrap="square">
-            <a:spAutoFit/>
-          </a:bodyPr>
-          <a:lstStyle/>
-          <a:p>
-            <a:pPr algn="ctr"/>
-            <a:r>
-              <a:rPr sz="1200" b="1">
-                <a:solidFill>
-                  <a:srgbClr val="FFFFFF"/>
-                </a:solidFill>
-                <a:latin typeface="Calibri"/>
-              </a:rPr>
-              <a:t>A/B TEST</a:t>
-            </a:r>
-          </a:p>
-        </p:txBody>
-      </p:sp>
-      <p:sp>
-        <p:nvSpPr>
-          <p:cNvPr id="18" name="Rectangle 17"/>
+              <a:t>The Experiment</a:t>
+            </a:r>
+          </a:p>
+        </p:txBody>
+      </p:sp>
+      <p:sp>
+        <p:nvSpPr>
+          <p:cNvPr id="4" name="Rounded Rectangle 3"/>
           <p:cNvSpPr/>
           <p:nvPr/>
         </p:nvSpPr>
         <p:spPr>
           <a:xfrm>
-            <a:off x="7223760" y="4114800"/>
-            <a:ext cx="2743200" cy="731520"/>
-          </a:xfrm>
-          <a:prstGeom prst="rect">
+            <a:off x="914400" y="1102841"/>
+            <a:ext cx="4114800" cy="1828800"/>
+          </a:xfrm>
+          <a:prstGeom prst="roundRect">
             <a:avLst/>
           </a:prstGeom>
           <a:solidFill>
-            <a:srgbClr val="3C3C41"/>
+            <a:srgbClr val="E3F2FD"/>
           </a:solidFill>
-          <a:ln>
-            <a:noFill/>
+          <a:ln w="25400">
+            <a:solidFill>
+              <a:srgbClr val="4285F4"/>
+            </a:solidFill>
           </a:ln>
         </p:spPr>
         <p:style>
@@ -4604,19 +5368,75 @@
           <a:lstStyle/>
           <a:p>
             <a:pPr algn="ctr"/>
-          </a:p>
-        </p:txBody>
-      </p:sp>
-      <p:sp>
-        <p:nvSpPr>
-          <p:cNvPr id="19" name="TextBox 18"/>
+            <a:endParaRPr/>
+          </a:p>
+        </p:txBody>
+      </p:sp>
+      <p:sp>
+        <p:nvSpPr>
+          <p:cNvPr id="5" name="Oval 4"/>
+          <p:cNvSpPr/>
+          <p:nvPr/>
+        </p:nvSpPr>
+        <p:spPr>
+          <a:xfrm>
+            <a:off x="2606040" y="1377161"/>
+            <a:ext cx="731520" cy="731520"/>
+          </a:xfrm>
+          <a:prstGeom prst="ellipse">
+            <a:avLst/>
+          </a:prstGeom>
+          <a:solidFill>
+            <a:srgbClr val="4285F4"/>
+          </a:solidFill>
+          <a:ln>
+            <a:noFill/>
+          </a:ln>
+        </p:spPr>
+        <p:style>
+          <a:lnRef idx="1">
+            <a:schemeClr val="accent1"/>
+          </a:lnRef>
+          <a:fillRef idx="3">
+            <a:schemeClr val="accent1"/>
+          </a:fillRef>
+          <a:effectRef idx="2">
+            <a:schemeClr val="accent1"/>
+          </a:effectRef>
+          <a:fontRef idx="minor">
+            <a:schemeClr val="lt1"/>
+          </a:fontRef>
+        </p:style>
+        <p:txBody>
+          <a:bodyPr rtlCol="0" anchor="ctr"/>
+          <a:lstStyle/>
+          <a:p>
+            <a:pPr algn="ctr">
+              <a:spcBef>
+                <a:spcPts val="0"/>
+              </a:spcBef>
+            </a:pPr>
+            <a:r>
+              <a:rPr sz="2200" b="1">
+                <a:solidFill>
+                  <a:srgbClr val="FFFFFF"/>
+                </a:solidFill>
+              </a:rPr>
+              <a:t>A</a:t>
+            </a:r>
+          </a:p>
+        </p:txBody>
+      </p:sp>
+      <p:sp>
+        <p:nvSpPr>
+          <p:cNvPr id="6" name="TextBox 5"/>
           <p:cNvSpPr txBox="1"/>
           <p:nvPr/>
         </p:nvSpPr>
         <p:spPr>
           <a:xfrm>
-            <a:off x="7223760" y="4114800"/>
-            <a:ext cx="2743200" cy="914400"/>
+            <a:off x="914400" y="2200121"/>
+            <a:ext cx="4114800" cy="914400"/>
           </a:xfrm>
           <a:prstGeom prst="rect">
             <a:avLst/>
@@ -4631,27 +5451,27 @@
           <a:p>
             <a:pPr algn="ctr"/>
             <a:r>
-              <a:rPr sz="1400" b="0">
-                <a:solidFill>
-                  <a:srgbClr val="FFFFFF"/>
+              <a:rPr sz="1800" b="1">
+                <a:solidFill>
+                  <a:srgbClr val="4285F4"/>
                 </a:solidFill>
                 <a:latin typeface="Calibri"/>
               </a:rPr>
-              <a:t>Oct - Dec</a:t>
-            </a:r>
-          </a:p>
-        </p:txBody>
-      </p:sp>
-      <p:sp>
-        <p:nvSpPr>
-          <p:cNvPr id="20" name="TextBox 19"/>
+              <a:t>GROUP A</a:t>
+            </a:r>
+          </a:p>
+        </p:txBody>
+      </p:sp>
+      <p:sp>
+        <p:nvSpPr>
+          <p:cNvPr id="7" name="TextBox 6"/>
           <p:cNvSpPr txBox="1"/>
           <p:nvPr/>
         </p:nvSpPr>
         <p:spPr>
           <a:xfrm>
-            <a:off x="7223760" y="4434840"/>
-            <a:ext cx="2743200" cy="914400"/>
+            <a:off x="914400" y="2520161"/>
+            <a:ext cx="4114800" cy="914400"/>
           </a:xfrm>
           <a:prstGeom prst="rect">
             <a:avLst/>
@@ -4666,14 +5486,549 @@
           <a:p>
             <a:pPr algn="ctr"/>
             <a:r>
-              <a:rPr sz="1200" b="0">
-                <a:solidFill>
-                  <a:srgbClr val="969696"/>
+              <a:rPr sz="1600" b="0">
+                <a:solidFill>
+                  <a:srgbClr val="212121"/>
                 </a:solidFill>
                 <a:latin typeface="Calibri"/>
               </a:rPr>
-              <a:t>Reset</a:t>
-            </a:r>
+              <a:t>Stronger Boost</a:t>
+            </a:r>
+          </a:p>
+        </p:txBody>
+      </p:sp>
+      <p:sp>
+        <p:nvSpPr>
+          <p:cNvPr id="8" name="Oval 7"/>
+          <p:cNvSpPr/>
+          <p:nvPr/>
+        </p:nvSpPr>
+        <p:spPr>
+          <a:xfrm>
+            <a:off x="5577840" y="1828800"/>
+            <a:ext cx="548640" cy="548640"/>
+          </a:xfrm>
+          <a:prstGeom prst="ellipse">
+            <a:avLst/>
+          </a:prstGeom>
+          <a:solidFill>
+            <a:srgbClr val="BDBDBD"/>
+          </a:solidFill>
+          <a:ln>
+            <a:noFill/>
+          </a:ln>
+        </p:spPr>
+        <p:style>
+          <a:lnRef idx="1">
+            <a:schemeClr val="accent1"/>
+          </a:lnRef>
+          <a:fillRef idx="3">
+            <a:schemeClr val="accent1"/>
+          </a:fillRef>
+          <a:effectRef idx="2">
+            <a:schemeClr val="accent1"/>
+          </a:effectRef>
+          <a:fontRef idx="minor">
+            <a:schemeClr val="lt1"/>
+          </a:fontRef>
+        </p:style>
+        <p:txBody>
+          <a:bodyPr rtlCol="0" anchor="ctr"/>
+          <a:lstStyle/>
+          <a:p>
+            <a:pPr algn="ctr">
+              <a:spcBef>
+                <a:spcPts val="0"/>
+              </a:spcBef>
+            </a:pPr>
+            <a:r>
+              <a:rPr sz="1600" b="1">
+                <a:solidFill>
+                  <a:srgbClr val="212121"/>
+                </a:solidFill>
+              </a:rPr>
+              <a:t>vs</a:t>
+            </a:r>
+          </a:p>
+        </p:txBody>
+      </p:sp>
+      <p:sp>
+        <p:nvSpPr>
+          <p:cNvPr id="9" name="Rounded Rectangle 8"/>
+          <p:cNvSpPr/>
+          <p:nvPr/>
+        </p:nvSpPr>
+        <p:spPr>
+          <a:xfrm>
+            <a:off x="6675120" y="1097280"/>
+            <a:ext cx="4114800" cy="1828800"/>
+          </a:xfrm>
+          <a:prstGeom prst="roundRect">
+            <a:avLst/>
+          </a:prstGeom>
+          <a:solidFill>
+            <a:srgbClr val="FFEBEE"/>
+          </a:solidFill>
+          <a:ln w="25400">
+            <a:solidFill>
+              <a:srgbClr val="DB4437"/>
+            </a:solidFill>
+          </a:ln>
+        </p:spPr>
+        <p:style>
+          <a:lnRef idx="1">
+            <a:schemeClr val="accent1"/>
+          </a:lnRef>
+          <a:fillRef idx="3">
+            <a:schemeClr val="accent1"/>
+          </a:fillRef>
+          <a:effectRef idx="2">
+            <a:schemeClr val="accent1"/>
+          </a:effectRef>
+          <a:fontRef idx="minor">
+            <a:schemeClr val="lt1"/>
+          </a:fontRef>
+        </p:style>
+        <p:txBody>
+          <a:bodyPr rtlCol="0" anchor="ctr"/>
+          <a:lstStyle/>
+          <a:p>
+            <a:pPr algn="ctr"/>
+            <a:endParaRPr/>
+          </a:p>
+        </p:txBody>
+      </p:sp>
+      <p:sp>
+        <p:nvSpPr>
+          <p:cNvPr id="10" name="Oval 9"/>
+          <p:cNvSpPr/>
+          <p:nvPr/>
+        </p:nvSpPr>
+        <p:spPr>
+          <a:xfrm>
+            <a:off x="8366760" y="1371600"/>
+            <a:ext cx="731520" cy="731520"/>
+          </a:xfrm>
+          <a:prstGeom prst="ellipse">
+            <a:avLst/>
+          </a:prstGeom>
+          <a:solidFill>
+            <a:srgbClr val="DB4437"/>
+          </a:solidFill>
+          <a:ln>
+            <a:noFill/>
+          </a:ln>
+        </p:spPr>
+        <p:style>
+          <a:lnRef idx="1">
+            <a:schemeClr val="accent1"/>
+          </a:lnRef>
+          <a:fillRef idx="3">
+            <a:schemeClr val="accent1"/>
+          </a:fillRef>
+          <a:effectRef idx="2">
+            <a:schemeClr val="accent1"/>
+          </a:effectRef>
+          <a:fontRef idx="minor">
+            <a:schemeClr val="lt1"/>
+          </a:fontRef>
+        </p:style>
+        <p:txBody>
+          <a:bodyPr rtlCol="0" anchor="ctr"/>
+          <a:lstStyle/>
+          <a:p>
+            <a:pPr algn="ctr">
+              <a:spcBef>
+                <a:spcPts val="0"/>
+              </a:spcBef>
+            </a:pPr>
+            <a:r>
+              <a:rPr sz="2200" b="1">
+                <a:solidFill>
+                  <a:srgbClr val="FFFFFF"/>
+                </a:solidFill>
+              </a:rPr>
+              <a:t>B</a:t>
+            </a:r>
+          </a:p>
+        </p:txBody>
+      </p:sp>
+      <p:sp>
+        <p:nvSpPr>
+          <p:cNvPr id="11" name="TextBox 10"/>
+          <p:cNvSpPr txBox="1"/>
+          <p:nvPr/>
+        </p:nvSpPr>
+        <p:spPr>
+          <a:xfrm>
+            <a:off x="6675120" y="2194560"/>
+            <a:ext cx="4114800" cy="914400"/>
+          </a:xfrm>
+          <a:prstGeom prst="rect">
+            <a:avLst/>
+          </a:prstGeom>
+          <a:noFill/>
+        </p:spPr>
+        <p:txBody>
+          <a:bodyPr wrap="square">
+            <a:spAutoFit/>
+          </a:bodyPr>
+          <a:lstStyle/>
+          <a:p>
+            <a:pPr algn="ctr"/>
+            <a:r>
+              <a:rPr sz="1800" b="1">
+                <a:solidFill>
+                  <a:srgbClr val="DB4437"/>
+                </a:solidFill>
+                <a:latin typeface="Calibri"/>
+              </a:rPr>
+              <a:t>GROUP B</a:t>
+            </a:r>
+          </a:p>
+        </p:txBody>
+      </p:sp>
+      <p:sp>
+        <p:nvSpPr>
+          <p:cNvPr id="12" name="TextBox 11"/>
+          <p:cNvSpPr txBox="1"/>
+          <p:nvPr/>
+        </p:nvSpPr>
+        <p:spPr>
+          <a:xfrm>
+            <a:off x="6675120" y="2514600"/>
+            <a:ext cx="4114800" cy="914400"/>
+          </a:xfrm>
+          <a:prstGeom prst="rect">
+            <a:avLst/>
+          </a:prstGeom>
+          <a:noFill/>
+        </p:spPr>
+        <p:txBody>
+          <a:bodyPr wrap="square">
+            <a:spAutoFit/>
+          </a:bodyPr>
+          <a:lstStyle/>
+          <a:p>
+            <a:pPr algn="ctr"/>
+            <a:r>
+              <a:rPr sz="1600" b="0">
+                <a:solidFill>
+                  <a:srgbClr val="212121"/>
+                </a:solidFill>
+                <a:latin typeface="Calibri"/>
+              </a:rPr>
+              <a:t>Original Boost</a:t>
+            </a:r>
+          </a:p>
+        </p:txBody>
+      </p:sp>
+      <p:sp>
+        <p:nvSpPr>
+          <p:cNvPr id="13" name="TextBox 12"/>
+          <p:cNvSpPr txBox="1"/>
+          <p:nvPr/>
+        </p:nvSpPr>
+        <p:spPr>
+          <a:xfrm>
+            <a:off x="457200" y="3200400"/>
+            <a:ext cx="10972800" cy="914400"/>
+          </a:xfrm>
+          <a:prstGeom prst="rect">
+            <a:avLst/>
+          </a:prstGeom>
+          <a:noFill/>
+        </p:spPr>
+        <p:txBody>
+          <a:bodyPr wrap="square">
+            <a:spAutoFit/>
+          </a:bodyPr>
+          <a:lstStyle/>
+          <a:p>
+            <a:pPr algn="l"/>
+            <a:r>
+              <a:rPr sz="1600" b="1">
+                <a:solidFill>
+                  <a:srgbClr val="757575"/>
+                </a:solidFill>
+                <a:latin typeface="Calibri"/>
+              </a:rPr>
+              <a:t>Timeline</a:t>
+            </a:r>
+          </a:p>
+        </p:txBody>
+      </p:sp>
+      <p:sp>
+        <p:nvSpPr>
+          <p:cNvPr id="14" name="Rounded Rectangle 13"/>
+          <p:cNvSpPr/>
+          <p:nvPr/>
+        </p:nvSpPr>
+        <p:spPr>
+          <a:xfrm>
+            <a:off x="914400" y="3657600"/>
+            <a:ext cx="2926080" cy="822960"/>
+          </a:xfrm>
+          <a:prstGeom prst="roundRect">
+            <a:avLst/>
+          </a:prstGeom>
+          <a:solidFill>
+            <a:srgbClr val="F5F5F5"/>
+          </a:solidFill>
+          <a:ln>
+            <a:noFill/>
+          </a:ln>
+        </p:spPr>
+        <p:style>
+          <a:lnRef idx="1">
+            <a:schemeClr val="accent1"/>
+          </a:lnRef>
+          <a:fillRef idx="3">
+            <a:schemeClr val="accent1"/>
+          </a:fillRef>
+          <a:effectRef idx="2">
+            <a:schemeClr val="accent1"/>
+          </a:effectRef>
+          <a:fontRef idx="minor">
+            <a:schemeClr val="lt1"/>
+          </a:fontRef>
+        </p:style>
+        <p:txBody>
+          <a:bodyPr rtlCol="0" anchor="ctr"/>
+          <a:lstStyle/>
+          <a:p>
+            <a:pPr algn="ctr"/>
+            <a:endParaRPr/>
+          </a:p>
+        </p:txBody>
+      </p:sp>
+      <p:sp>
+        <p:nvSpPr>
+          <p:cNvPr id="15" name="TextBox 14"/>
+          <p:cNvSpPr txBox="1"/>
+          <p:nvPr/>
+        </p:nvSpPr>
+        <p:spPr>
+          <a:xfrm>
+            <a:off x="914400" y="3703320"/>
+            <a:ext cx="2926080" cy="914400"/>
+          </a:xfrm>
+          <a:prstGeom prst="rect">
+            <a:avLst/>
+          </a:prstGeom>
+          <a:noFill/>
+        </p:spPr>
+        <p:txBody>
+          <a:bodyPr wrap="square">
+            <a:spAutoFit/>
+          </a:bodyPr>
+          <a:lstStyle/>
+          <a:p>
+            <a:pPr algn="ctr"/>
+            <a:r>
+              <a:rPr sz="1300" b="1">
+                <a:solidFill>
+                  <a:srgbClr val="212121"/>
+                </a:solidFill>
+                <a:latin typeface="Calibri"/>
+              </a:rPr>
+              <a:t>Jan - May 2020</a:t>
+            </a:r>
+          </a:p>
+        </p:txBody>
+      </p:sp>
+      <p:sp>
+        <p:nvSpPr>
+          <p:cNvPr id="16" name="TextBox 15"/>
+          <p:cNvSpPr txBox="1"/>
+          <p:nvPr/>
+        </p:nvSpPr>
+        <p:spPr>
+          <a:xfrm>
+            <a:off x="914400" y="3977639"/>
+            <a:ext cx="2926080" cy="914400"/>
+          </a:xfrm>
+          <a:prstGeom prst="rect">
+            <a:avLst/>
+          </a:prstGeom>
+          <a:noFill/>
+        </p:spPr>
+        <p:txBody>
+          <a:bodyPr wrap="square">
+            <a:spAutoFit/>
+          </a:bodyPr>
+          <a:lstStyle/>
+          <a:p>
+            <a:pPr algn="ctr"/>
+            <a:r>
+              <a:rPr sz="1100" b="0">
+                <a:solidFill>
+                  <a:srgbClr val="757575"/>
+                </a:solidFill>
+                <a:latin typeface="Calibri"/>
+              </a:rPr>
+              <a:t>Baseline</a:t>
+            </a:r>
+          </a:p>
+        </p:txBody>
+      </p:sp>
+      <p:sp>
+        <p:nvSpPr>
+          <p:cNvPr id="17" name="Rounded Rectangle 16"/>
+          <p:cNvSpPr/>
+          <p:nvPr/>
+        </p:nvSpPr>
+        <p:spPr>
+          <a:xfrm>
+            <a:off x="4023360" y="3657600"/>
+            <a:ext cx="3657600" cy="822960"/>
+          </a:xfrm>
+          <a:prstGeom prst="roundRect">
+            <a:avLst/>
+          </a:prstGeom>
+          <a:solidFill>
+            <a:srgbClr val="E3F2FD"/>
+          </a:solidFill>
+          <a:ln w="25400">
+            <a:solidFill>
+              <a:srgbClr val="4285F4"/>
+            </a:solidFill>
+          </a:ln>
+        </p:spPr>
+        <p:style>
+          <a:lnRef idx="1">
+            <a:schemeClr val="accent1"/>
+          </a:lnRef>
+          <a:fillRef idx="3">
+            <a:schemeClr val="accent1"/>
+          </a:fillRef>
+          <a:effectRef idx="2">
+            <a:schemeClr val="accent1"/>
+          </a:effectRef>
+          <a:fontRef idx="minor">
+            <a:schemeClr val="lt1"/>
+          </a:fontRef>
+        </p:style>
+        <p:txBody>
+          <a:bodyPr rtlCol="0" anchor="ctr"/>
+          <a:lstStyle/>
+          <a:p>
+            <a:pPr algn="ctr"/>
+            <a:endParaRPr/>
+          </a:p>
+        </p:txBody>
+      </p:sp>
+      <p:sp>
+        <p:nvSpPr>
+          <p:cNvPr id="18" name="TextBox 17"/>
+          <p:cNvSpPr txBox="1"/>
+          <p:nvPr/>
+        </p:nvSpPr>
+        <p:spPr>
+          <a:xfrm>
+            <a:off x="4023360" y="3703320"/>
+            <a:ext cx="3657600" cy="914400"/>
+          </a:xfrm>
+          <a:prstGeom prst="rect">
+            <a:avLst/>
+          </a:prstGeom>
+          <a:noFill/>
+        </p:spPr>
+        <p:txBody>
+          <a:bodyPr wrap="square">
+            <a:spAutoFit/>
+          </a:bodyPr>
+          <a:lstStyle/>
+          <a:p>
+            <a:pPr algn="ctr"/>
+            <a:r>
+              <a:rPr sz="1300" b="1">
+                <a:solidFill>
+                  <a:srgbClr val="4285F4"/>
+                </a:solidFill>
+                <a:latin typeface="Calibri"/>
+              </a:rPr>
+              <a:t>June - Sept 2020</a:t>
+            </a:r>
+          </a:p>
+        </p:txBody>
+      </p:sp>
+      <p:sp>
+        <p:nvSpPr>
+          <p:cNvPr id="19" name="TextBox 18"/>
+          <p:cNvSpPr txBox="1"/>
+          <p:nvPr/>
+        </p:nvSpPr>
+        <p:spPr>
+          <a:xfrm>
+            <a:off x="4023360" y="3977639"/>
+            <a:ext cx="3657600" cy="914400"/>
+          </a:xfrm>
+          <a:prstGeom prst="rect">
+            <a:avLst/>
+          </a:prstGeom>
+          <a:noFill/>
+        </p:spPr>
+        <p:txBody>
+          <a:bodyPr wrap="square">
+            <a:spAutoFit/>
+          </a:bodyPr>
+          <a:lstStyle/>
+          <a:p>
+            <a:pPr algn="ctr"/>
+            <a:r>
+              <a:rPr sz="1100" b="1">
+                <a:solidFill>
+                  <a:srgbClr val="4285F4"/>
+                </a:solidFill>
+                <a:latin typeface="Calibri"/>
+              </a:rPr>
+              <a:t>A/B TEST</a:t>
+            </a:r>
+          </a:p>
+        </p:txBody>
+      </p:sp>
+      <p:sp>
+        <p:nvSpPr>
+          <p:cNvPr id="20" name="Rounded Rectangle 19"/>
+          <p:cNvSpPr/>
+          <p:nvPr/>
+        </p:nvSpPr>
+        <p:spPr>
+          <a:xfrm>
+            <a:off x="7863840" y="3657600"/>
+            <a:ext cx="2926080" cy="822960"/>
+          </a:xfrm>
+          <a:prstGeom prst="roundRect">
+            <a:avLst/>
+          </a:prstGeom>
+          <a:solidFill>
+            <a:srgbClr val="F5F5F5"/>
+          </a:solidFill>
+          <a:ln>
+            <a:noFill/>
+          </a:ln>
+        </p:spPr>
+        <p:style>
+          <a:lnRef idx="1">
+            <a:schemeClr val="accent1"/>
+          </a:lnRef>
+          <a:fillRef idx="3">
+            <a:schemeClr val="accent1"/>
+          </a:fillRef>
+          <a:effectRef idx="2">
+            <a:schemeClr val="accent1"/>
+          </a:effectRef>
+          <a:fontRef idx="minor">
+            <a:schemeClr val="lt1"/>
+          </a:fontRef>
+        </p:style>
+        <p:txBody>
+          <a:bodyPr rtlCol="0" anchor="ctr"/>
+          <a:lstStyle/>
+          <a:p>
+            <a:pPr algn="ctr"/>
+            <a:endParaRPr/>
           </a:p>
         </p:txBody>
       </p:sp>
@@ -4685,8 +6040,8 @@
         </p:nvSpPr>
         <p:spPr>
           <a:xfrm>
-            <a:off x="1828800" y="5303520"/>
-            <a:ext cx="2286000" cy="914400"/>
+            <a:off x="7863840" y="3703320"/>
+            <a:ext cx="2926080" cy="914400"/>
           </a:xfrm>
           <a:prstGeom prst="rect">
             <a:avLst/>
@@ -4694,20 +6049,20 @@
           <a:noFill/>
         </p:spPr>
         <p:txBody>
-          <a:bodyPr wrap="none">
+          <a:bodyPr wrap="square">
             <a:spAutoFit/>
           </a:bodyPr>
           <a:lstStyle/>
           <a:p>
             <a:pPr algn="ctr"/>
             <a:r>
-              <a:rPr sz="4800" b="1">
-                <a:solidFill>
-                  <a:srgbClr val="4285F4"/>
+              <a:rPr sz="1300" b="1">
+                <a:solidFill>
+                  <a:srgbClr val="212121"/>
                 </a:solidFill>
                 <a:latin typeface="Calibri"/>
               </a:rPr>
-              <a:t>14K</a:t>
+              <a:t>Oct - Dec 2020</a:t>
             </a:r>
           </a:p>
         </p:txBody>
@@ -4720,8 +6075,8 @@
         </p:nvSpPr>
         <p:spPr>
           <a:xfrm>
-            <a:off x="1828800" y="6035040"/>
-            <a:ext cx="2286000" cy="457200"/>
+            <a:off x="7863840" y="3977639"/>
+            <a:ext cx="2926080" cy="914400"/>
           </a:xfrm>
           <a:prstGeom prst="rect">
             <a:avLst/>
@@ -4729,34 +6084,89 @@
           <a:noFill/>
         </p:spPr>
         <p:txBody>
-          <a:bodyPr wrap="none">
+          <a:bodyPr wrap="square">
             <a:spAutoFit/>
           </a:bodyPr>
           <a:lstStyle/>
           <a:p>
             <a:pPr algn="ctr"/>
             <a:r>
-              <a:rPr sz="1600">
-                <a:solidFill>
-                  <a:srgbClr val="969696"/>
+              <a:rPr sz="1100" b="0">
+                <a:solidFill>
+                  <a:srgbClr val="757575"/>
                 </a:solidFill>
                 <a:latin typeface="Calibri"/>
               </a:rPr>
-              <a:t>Players</a:t>
-            </a:r>
-          </a:p>
-        </p:txBody>
-      </p:sp>
-      <p:sp>
-        <p:nvSpPr>
-          <p:cNvPr id="23" name="TextBox 22"/>
+              <a:t>Reset &amp; Monitor</a:t>
+            </a:r>
+          </a:p>
+        </p:txBody>
+      </p:sp>
+      <p:sp>
+        <p:nvSpPr>
+          <p:cNvPr id="23" name="Oval 22"/>
+          <p:cNvSpPr/>
+          <p:nvPr/>
+        </p:nvSpPr>
+        <p:spPr>
+          <a:xfrm>
+            <a:off x="1554480" y="4772333"/>
+            <a:ext cx="1595258" cy="1245253"/>
+          </a:xfrm>
+          <a:prstGeom prst="ellipse">
+            <a:avLst/>
+          </a:prstGeom>
+          <a:solidFill>
+            <a:srgbClr val="4285F4"/>
+          </a:solidFill>
+          <a:ln>
+            <a:noFill/>
+          </a:ln>
+        </p:spPr>
+        <p:style>
+          <a:lnRef idx="1">
+            <a:schemeClr val="accent1"/>
+          </a:lnRef>
+          <a:fillRef idx="3">
+            <a:schemeClr val="accent1"/>
+          </a:fillRef>
+          <a:effectRef idx="2">
+            <a:schemeClr val="accent1"/>
+          </a:effectRef>
+          <a:fontRef idx="minor">
+            <a:schemeClr val="lt1"/>
+          </a:fontRef>
+        </p:style>
+        <p:txBody>
+          <a:bodyPr rtlCol="0" anchor="ctr"/>
+          <a:lstStyle/>
+          <a:p>
+            <a:pPr algn="ctr">
+              <a:spcBef>
+                <a:spcPts val="0"/>
+              </a:spcBef>
+            </a:pPr>
+            <a:r>
+              <a:rPr sz="3300" b="1" dirty="0">
+                <a:solidFill>
+                  <a:srgbClr val="FFFFFF"/>
+                </a:solidFill>
+              </a:rPr>
+              <a:t>14K</a:t>
+            </a:r>
+          </a:p>
+        </p:txBody>
+      </p:sp>
+      <p:sp>
+        <p:nvSpPr>
+          <p:cNvPr id="24" name="TextBox 23"/>
           <p:cNvSpPr txBox="1"/>
           <p:nvPr/>
         </p:nvSpPr>
         <p:spPr>
           <a:xfrm>
-            <a:off x="5029200" y="5303520"/>
-            <a:ext cx="2286000" cy="914400"/>
+            <a:off x="1554480" y="6161078"/>
+            <a:ext cx="1645920" cy="914400"/>
           </a:xfrm>
           <a:prstGeom prst="rect">
             <a:avLst/>
@@ -4764,19 +6174,74 @@
           <a:noFill/>
         </p:spPr>
         <p:txBody>
-          <a:bodyPr wrap="none">
+          <a:bodyPr wrap="square">
             <a:spAutoFit/>
           </a:bodyPr>
           <a:lstStyle/>
           <a:p>
             <a:pPr algn="ctr"/>
             <a:r>
-              <a:rPr sz="4800" b="1">
-                <a:solidFill>
-                  <a:srgbClr val="4285F4"/>
+              <a:rPr sz="1200" b="0" dirty="0">
+                <a:solidFill>
+                  <a:srgbClr val="757575"/>
                 </a:solidFill>
                 <a:latin typeface="Calibri"/>
               </a:rPr>
+              <a:t>Players</a:t>
+            </a:r>
+          </a:p>
+        </p:txBody>
+      </p:sp>
+      <p:sp>
+        <p:nvSpPr>
+          <p:cNvPr id="25" name="Oval 24"/>
+          <p:cNvSpPr/>
+          <p:nvPr/>
+        </p:nvSpPr>
+        <p:spPr>
+          <a:xfrm>
+            <a:off x="5042793" y="4789787"/>
+            <a:ext cx="1632327" cy="1245253"/>
+          </a:xfrm>
+          <a:prstGeom prst="ellipse">
+            <a:avLst/>
+          </a:prstGeom>
+          <a:solidFill>
+            <a:srgbClr val="0F9D58"/>
+          </a:solidFill>
+          <a:ln>
+            <a:noFill/>
+          </a:ln>
+        </p:spPr>
+        <p:style>
+          <a:lnRef idx="1">
+            <a:schemeClr val="accent1"/>
+          </a:lnRef>
+          <a:fillRef idx="3">
+            <a:schemeClr val="accent1"/>
+          </a:fillRef>
+          <a:effectRef idx="2">
+            <a:schemeClr val="accent1"/>
+          </a:effectRef>
+          <a:fontRef idx="minor">
+            <a:schemeClr val="lt1"/>
+          </a:fontRef>
+        </p:style>
+        <p:txBody>
+          <a:bodyPr rtlCol="0" anchor="ctr"/>
+          <a:lstStyle/>
+          <a:p>
+            <a:pPr algn="ctr">
+              <a:spcBef>
+                <a:spcPts val="0"/>
+              </a:spcBef>
+            </a:pPr>
+            <a:r>
+              <a:rPr sz="3300" b="1">
+                <a:solidFill>
+                  <a:srgbClr val="FFFFFF"/>
+                </a:solidFill>
+              </a:rPr>
               <a:t>1.5M</a:t>
             </a:r>
           </a:p>
@@ -4784,14 +6249,14 @@
       </p:sp>
       <p:sp>
         <p:nvSpPr>
-          <p:cNvPr id="24" name="TextBox 23"/>
+          <p:cNvPr id="26" name="TextBox 25"/>
           <p:cNvSpPr txBox="1"/>
           <p:nvPr/>
         </p:nvSpPr>
         <p:spPr>
           <a:xfrm>
-            <a:off x="5029200" y="6035040"/>
-            <a:ext cx="2286000" cy="457200"/>
+            <a:off x="5029200" y="6141307"/>
+            <a:ext cx="1645920" cy="914400"/>
           </a:xfrm>
           <a:prstGeom prst="rect">
             <a:avLst/>
@@ -4799,16 +6264,16 @@
           <a:noFill/>
         </p:spPr>
         <p:txBody>
-          <a:bodyPr wrap="none">
+          <a:bodyPr wrap="square">
             <a:spAutoFit/>
           </a:bodyPr>
           <a:lstStyle/>
           <a:p>
             <a:pPr algn="ctr"/>
             <a:r>
-              <a:rPr sz="1600">
-                <a:solidFill>
-                  <a:srgbClr val="969696"/>
+              <a:rPr sz="1200" b="0" dirty="0">
+                <a:solidFill>
+                  <a:srgbClr val="757575"/>
                 </a:solidFill>
                 <a:latin typeface="Calibri"/>
               </a:rPr>
@@ -4819,14 +6284,69 @@
       </p:sp>
       <p:sp>
         <p:nvSpPr>
-          <p:cNvPr id="25" name="TextBox 24"/>
+          <p:cNvPr id="27" name="Oval 26"/>
+          <p:cNvSpPr/>
+          <p:nvPr/>
+        </p:nvSpPr>
+        <p:spPr>
+          <a:xfrm>
+            <a:off x="8412480" y="4789786"/>
+            <a:ext cx="1737359" cy="1227799"/>
+          </a:xfrm>
+          <a:prstGeom prst="ellipse">
+            <a:avLst/>
+          </a:prstGeom>
+          <a:solidFill>
+            <a:srgbClr val="F4B400"/>
+          </a:solidFill>
+          <a:ln>
+            <a:noFill/>
+          </a:ln>
+        </p:spPr>
+        <p:style>
+          <a:lnRef idx="1">
+            <a:schemeClr val="accent1"/>
+          </a:lnRef>
+          <a:fillRef idx="3">
+            <a:schemeClr val="accent1"/>
+          </a:fillRef>
+          <a:effectRef idx="2">
+            <a:schemeClr val="accent1"/>
+          </a:effectRef>
+          <a:fontRef idx="minor">
+            <a:schemeClr val="lt1"/>
+          </a:fontRef>
+        </p:style>
+        <p:txBody>
+          <a:bodyPr rtlCol="0" anchor="ctr"/>
+          <a:lstStyle/>
+          <a:p>
+            <a:pPr algn="ctr">
+              <a:spcBef>
+                <a:spcPts val="0"/>
+              </a:spcBef>
+            </a:pPr>
+            <a:r>
+              <a:rPr sz="3300" b="1" dirty="0">
+                <a:solidFill>
+                  <a:srgbClr val="FFFFFF"/>
+                </a:solidFill>
+              </a:rPr>
+              <a:t>4 Mo</a:t>
+            </a:r>
+          </a:p>
+        </p:txBody>
+      </p:sp>
+      <p:sp>
+        <p:nvSpPr>
+          <p:cNvPr id="28" name="TextBox 27"/>
           <p:cNvSpPr txBox="1"/>
           <p:nvPr/>
         </p:nvSpPr>
         <p:spPr>
           <a:xfrm>
-            <a:off x="8229600" y="5303520"/>
-            <a:ext cx="2286000" cy="914400"/>
+            <a:off x="8503920" y="6133893"/>
+            <a:ext cx="1645920" cy="914400"/>
           </a:xfrm>
           <a:prstGeom prst="rect">
             <a:avLst/>
@@ -4834,51 +6354,16 @@
           <a:noFill/>
         </p:spPr>
         <p:txBody>
-          <a:bodyPr wrap="none">
+          <a:bodyPr wrap="square">
             <a:spAutoFit/>
           </a:bodyPr>
           <a:lstStyle/>
           <a:p>
             <a:pPr algn="ctr"/>
             <a:r>
-              <a:rPr sz="4800" b="1">
-                <a:solidFill>
-                  <a:srgbClr val="4285F4"/>
-                </a:solidFill>
-                <a:latin typeface="Calibri"/>
-              </a:rPr>
-              <a:t>4 mo</a:t>
-            </a:r>
-          </a:p>
-        </p:txBody>
-      </p:sp>
-      <p:sp>
-        <p:nvSpPr>
-          <p:cNvPr id="26" name="TextBox 25"/>
-          <p:cNvSpPr txBox="1"/>
-          <p:nvPr/>
-        </p:nvSpPr>
-        <p:spPr>
-          <a:xfrm>
-            <a:off x="8229600" y="6035040"/>
-            <a:ext cx="2286000" cy="457200"/>
-          </a:xfrm>
-          <a:prstGeom prst="rect">
-            <a:avLst/>
-          </a:prstGeom>
-          <a:noFill/>
-        </p:spPr>
-        <p:txBody>
-          <a:bodyPr wrap="none">
-            <a:spAutoFit/>
-          </a:bodyPr>
-          <a:lstStyle/>
-          <a:p>
-            <a:pPr algn="ctr"/>
-            <a:r>
-              <a:rPr sz="1600">
-                <a:solidFill>
-                  <a:srgbClr val="969696"/>
+              <a:rPr sz="1200" b="0" dirty="0">
+                <a:solidFill>
+                  <a:srgbClr val="757575"/>
                 </a:solidFill>
                 <a:latin typeface="Calibri"/>
               </a:rPr>
@@ -4896,7 +6381,7 @@
 </file>
 
 <file path=ppt/slides/slide4.xml><?xml version="1.0" encoding="utf-8"?>
-<p:sld xmlns:a="http://schemas.openxmlformats.org/drawingml/2006/main" xmlns:p="http://schemas.openxmlformats.org/presentationml/2006/main" xmlns:r="http://schemas.openxmlformats.org/officeDocument/2006/relationships">
+<p:sld xmlns:a="http://schemas.openxmlformats.org/drawingml/2006/main" xmlns:r="http://schemas.openxmlformats.org/officeDocument/2006/relationships" xmlns:p="http://schemas.openxmlformats.org/presentationml/2006/main">
   <p:cSld>
     <p:spTree>
       <p:nvGrpSpPr>
@@ -4904,7 +6389,14 @@
         <p:cNvGrpSpPr/>
         <p:nvPr/>
       </p:nvGrpSpPr>
-      <p:grpSpPr/>
+      <p:grpSpPr>
+        <a:xfrm>
+          <a:off x="0" y="0"/>
+          <a:ext cx="0" cy="0"/>
+          <a:chOff x="0" y="0"/>
+          <a:chExt cx="0" cy="0"/>
+        </a:xfrm>
+      </p:grpSpPr>
       <p:sp>
         <p:nvSpPr>
           <p:cNvPr id="2" name="Rectangle 1"/>
@@ -4914,13 +6406,13 @@
         <p:spPr>
           <a:xfrm>
             <a:off x="0" y="0"/>
-            <a:ext cx="12191695" cy="6858000"/>
+            <a:ext cx="12191695" cy="91440"/>
           </a:xfrm>
           <a:prstGeom prst="rect">
             <a:avLst/>
           </a:prstGeom>
           <a:solidFill>
-            <a:srgbClr val="1E1E23"/>
+            <a:srgbClr val="0F9D58"/>
           </a:solidFill>
           <a:ln>
             <a:noFill/>
@@ -4945,6 +6437,7 @@
           <a:lstStyle/>
           <a:p>
             <a:pPr algn="ctr"/>
+            <a:endParaRPr/>
           </a:p>
         </p:txBody>
       </p:sp>
@@ -4956,8 +6449,8 @@
         </p:nvSpPr>
         <p:spPr>
           <a:xfrm>
-            <a:off x="457200" y="274320"/>
-            <a:ext cx="11277295" cy="914400"/>
+            <a:off x="709677" y="499794"/>
+            <a:ext cx="3484606" cy="646331"/>
           </a:xfrm>
           <a:prstGeom prst="rect">
             <a:avLst/>
@@ -4970,11 +6463,10 @@
           </a:bodyPr>
           <a:lstStyle/>
           <a:p>
-            <a:pPr algn="ctr"/>
-            <a:r>
-              <a:rPr sz="4000" b="1">
-                <a:solidFill>
-                  <a:srgbClr val="FFFFFF"/>
+            <a:r>
+              <a:rPr sz="3600" b="1" dirty="0">
+                <a:solidFill>
+                  <a:srgbClr val="212121"/>
                 </a:solidFill>
                 <a:latin typeface="Calibri"/>
               </a:rPr>
@@ -4991,8 +6483,8 @@
         </p:nvSpPr>
         <p:spPr>
           <a:xfrm>
-            <a:off x="457200" y="1188720"/>
-            <a:ext cx="11277295" cy="914400"/>
+            <a:off x="2038865" y="1554479"/>
+            <a:ext cx="4572000" cy="914400"/>
           </a:xfrm>
           <a:prstGeom prst="rect">
             <a:avLst/>
@@ -5007,9 +6499,9 @@
           <a:p>
             <a:pPr algn="ctr"/>
             <a:r>
-              <a:rPr sz="9600" b="1">
-                <a:solidFill>
-                  <a:srgbClr val="34A853"/>
+              <a:rPr sz="7200" b="1" dirty="0">
+                <a:solidFill>
+                  <a:srgbClr val="0F9D58"/>
                 </a:solidFill>
                 <a:latin typeface="Calibri"/>
               </a:rPr>
@@ -5026,8 +6518,8 @@
         </p:nvSpPr>
         <p:spPr>
           <a:xfrm>
-            <a:off x="457200" y="2743200"/>
-            <a:ext cx="10972800" cy="914400"/>
+            <a:off x="2038865" y="2743199"/>
+            <a:ext cx="4572000" cy="914400"/>
           </a:xfrm>
           <a:prstGeom prst="rect">
             <a:avLst/>
@@ -5042,9 +6534,9 @@
           <a:p>
             <a:pPr algn="ctr"/>
             <a:r>
-              <a:rPr sz="2800" b="0">
-                <a:solidFill>
-                  <a:srgbClr val="FFFFFF"/>
+              <a:rPr sz="2200" b="0" dirty="0">
+                <a:solidFill>
+                  <a:srgbClr val="212121"/>
                 </a:solidFill>
                 <a:latin typeface="Calibri"/>
               </a:rPr>
@@ -5055,14 +6547,60 @@
       </p:sp>
       <p:sp>
         <p:nvSpPr>
-          <p:cNvPr id="6" name="TextBox 5"/>
+          <p:cNvPr id="6" name="Rounded Rectangle 5"/>
+          <p:cNvSpPr/>
+          <p:nvPr/>
+        </p:nvSpPr>
+        <p:spPr>
+          <a:xfrm>
+            <a:off x="2313185" y="3474719"/>
+            <a:ext cx="1828800" cy="914400"/>
+          </a:xfrm>
+          <a:prstGeom prst="roundRect">
+            <a:avLst/>
+          </a:prstGeom>
+          <a:solidFill>
+            <a:srgbClr val="E3F2FD"/>
+          </a:solidFill>
+          <a:ln w="25400">
+            <a:solidFill>
+              <a:srgbClr val="4285F4"/>
+            </a:solidFill>
+          </a:ln>
+        </p:spPr>
+        <p:style>
+          <a:lnRef idx="1">
+            <a:schemeClr val="accent1"/>
+          </a:lnRef>
+          <a:fillRef idx="3">
+            <a:schemeClr val="accent1"/>
+          </a:fillRef>
+          <a:effectRef idx="2">
+            <a:schemeClr val="accent1"/>
+          </a:effectRef>
+          <a:fontRef idx="minor">
+            <a:schemeClr val="lt1"/>
+          </a:fontRef>
+        </p:style>
+        <p:txBody>
+          <a:bodyPr rtlCol="0" anchor="ctr"/>
+          <a:lstStyle/>
+          <a:p>
+            <a:pPr algn="ctr"/>
+            <a:endParaRPr/>
+          </a:p>
+        </p:txBody>
+      </p:sp>
+      <p:sp>
+        <p:nvSpPr>
+          <p:cNvPr id="7" name="TextBox 6"/>
           <p:cNvSpPr txBox="1"/>
           <p:nvPr/>
         </p:nvSpPr>
         <p:spPr>
           <a:xfrm>
-            <a:off x="2743200" y="3657600"/>
-            <a:ext cx="2743200" cy="914400"/>
+            <a:off x="2313185" y="3566159"/>
+            <a:ext cx="1828800" cy="914400"/>
           </a:xfrm>
           <a:prstGeom prst="rect">
             <a:avLst/>
@@ -5077,27 +6615,27 @@
           <a:p>
             <a:pPr algn="ctr"/>
             <a:r>
-              <a:rPr sz="2400" b="1">
+              <a:rPr sz="1200" b="0">
                 <a:solidFill>
                   <a:srgbClr val="4285F4"/>
                 </a:solidFill>
                 <a:latin typeface="Calibri"/>
               </a:rPr>
-              <a:t>Group A: 25.1%</a:t>
-            </a:r>
-          </a:p>
-        </p:txBody>
-      </p:sp>
-      <p:sp>
-        <p:nvSpPr>
-          <p:cNvPr id="7" name="TextBox 6"/>
+              <a:t>Group A</a:t>
+            </a:r>
+          </a:p>
+        </p:txBody>
+      </p:sp>
+      <p:sp>
+        <p:nvSpPr>
+          <p:cNvPr id="8" name="TextBox 7"/>
           <p:cNvSpPr txBox="1"/>
           <p:nvPr/>
         </p:nvSpPr>
         <p:spPr>
           <a:xfrm>
-            <a:off x="6400800" y="3657600"/>
-            <a:ext cx="2743200" cy="914400"/>
+            <a:off x="2313185" y="3840479"/>
+            <a:ext cx="1828800" cy="914400"/>
           </a:xfrm>
           <a:prstGeom prst="rect">
             <a:avLst/>
@@ -5114,25 +6652,71 @@
             <a:r>
               <a:rPr sz="2400" b="1">
                 <a:solidFill>
-                  <a:srgbClr val="EA4335"/>
+                  <a:srgbClr val="4285F4"/>
                 </a:solidFill>
                 <a:latin typeface="Calibri"/>
               </a:rPr>
-              <a:t>Group B: 22.5%</a:t>
-            </a:r>
-          </a:p>
-        </p:txBody>
-      </p:sp>
-      <p:sp>
-        <p:nvSpPr>
-          <p:cNvPr id="8" name="TextBox 7"/>
+              <a:t>25.1%</a:t>
+            </a:r>
+          </a:p>
+        </p:txBody>
+      </p:sp>
+      <p:sp>
+        <p:nvSpPr>
+          <p:cNvPr id="9" name="Rounded Rectangle 8"/>
+          <p:cNvSpPr/>
+          <p:nvPr/>
+        </p:nvSpPr>
+        <p:spPr>
+          <a:xfrm>
+            <a:off x="4324865" y="3474719"/>
+            <a:ext cx="1828800" cy="914400"/>
+          </a:xfrm>
+          <a:prstGeom prst="roundRect">
+            <a:avLst/>
+          </a:prstGeom>
+          <a:solidFill>
+            <a:srgbClr val="FFEBEE"/>
+          </a:solidFill>
+          <a:ln w="25400">
+            <a:solidFill>
+              <a:srgbClr val="DB4437"/>
+            </a:solidFill>
+          </a:ln>
+        </p:spPr>
+        <p:style>
+          <a:lnRef idx="1">
+            <a:schemeClr val="accent1"/>
+          </a:lnRef>
+          <a:fillRef idx="3">
+            <a:schemeClr val="accent1"/>
+          </a:fillRef>
+          <a:effectRef idx="2">
+            <a:schemeClr val="accent1"/>
+          </a:effectRef>
+          <a:fontRef idx="minor">
+            <a:schemeClr val="lt1"/>
+          </a:fontRef>
+        </p:style>
+        <p:txBody>
+          <a:bodyPr rtlCol="0" anchor="ctr"/>
+          <a:lstStyle/>
+          <a:p>
+            <a:pPr algn="ctr"/>
+            <a:endParaRPr/>
+          </a:p>
+        </p:txBody>
+      </p:sp>
+      <p:sp>
+        <p:nvSpPr>
+          <p:cNvPr id="10" name="TextBox 9"/>
           <p:cNvSpPr txBox="1"/>
           <p:nvPr/>
         </p:nvSpPr>
         <p:spPr>
           <a:xfrm>
-            <a:off x="457200" y="4572000"/>
-            <a:ext cx="10972800" cy="914400"/>
+            <a:off x="4324865" y="3566159"/>
+            <a:ext cx="1828800" cy="914400"/>
           </a:xfrm>
           <a:prstGeom prst="rect">
             <a:avLst/>
@@ -5147,35 +6731,151 @@
           <a:p>
             <a:pPr algn="ctr"/>
             <a:r>
-              <a:rPr sz="1800" b="0">
-                <a:solidFill>
-                  <a:srgbClr val="34A853"/>
+              <a:rPr sz="1200" b="0">
+                <a:solidFill>
+                  <a:srgbClr val="DB4437"/>
                 </a:solidFill>
                 <a:latin typeface="Calibri"/>
               </a:rPr>
-              <a:t>p &lt; 0.001  •  Statistically Significant</a:t>
+              <a:t>Group B</a:t>
+            </a:r>
+          </a:p>
+        </p:txBody>
+      </p:sp>
+      <p:sp>
+        <p:nvSpPr>
+          <p:cNvPr id="11" name="TextBox 10"/>
+          <p:cNvSpPr txBox="1"/>
+          <p:nvPr/>
+        </p:nvSpPr>
+        <p:spPr>
+          <a:xfrm>
+            <a:off x="4324865" y="3840479"/>
+            <a:ext cx="1828800" cy="914400"/>
+          </a:xfrm>
+          <a:prstGeom prst="rect">
+            <a:avLst/>
+          </a:prstGeom>
+          <a:noFill/>
+        </p:spPr>
+        <p:txBody>
+          <a:bodyPr wrap="square">
+            <a:spAutoFit/>
+          </a:bodyPr>
+          <a:lstStyle/>
+          <a:p>
+            <a:pPr algn="ctr"/>
+            <a:r>
+              <a:rPr sz="2400" b="1">
+                <a:solidFill>
+                  <a:srgbClr val="DB4437"/>
+                </a:solidFill>
+                <a:latin typeface="Calibri"/>
+              </a:rPr>
+              <a:t>22.5%</a:t>
+            </a:r>
+          </a:p>
+        </p:txBody>
+      </p:sp>
+      <p:sp>
+        <p:nvSpPr>
+          <p:cNvPr id="12" name="Rounded Rectangle 11"/>
+          <p:cNvSpPr/>
+          <p:nvPr/>
+        </p:nvSpPr>
+        <p:spPr>
+          <a:xfrm>
+            <a:off x="2313185" y="4663439"/>
+            <a:ext cx="3840480" cy="548640"/>
+          </a:xfrm>
+          <a:prstGeom prst="roundRect">
+            <a:avLst/>
+          </a:prstGeom>
+          <a:solidFill>
+            <a:srgbClr val="E8F5E9"/>
+          </a:solidFill>
+          <a:ln w="25400">
+            <a:solidFill>
+              <a:srgbClr val="0F9D58"/>
+            </a:solidFill>
+          </a:ln>
+        </p:spPr>
+        <p:style>
+          <a:lnRef idx="1">
+            <a:schemeClr val="accent1"/>
+          </a:lnRef>
+          <a:fillRef idx="3">
+            <a:schemeClr val="accent1"/>
+          </a:fillRef>
+          <a:effectRef idx="2">
+            <a:schemeClr val="accent1"/>
+          </a:effectRef>
+          <a:fontRef idx="minor">
+            <a:schemeClr val="lt1"/>
+          </a:fontRef>
+        </p:style>
+        <p:txBody>
+          <a:bodyPr rtlCol="0" anchor="ctr"/>
+          <a:lstStyle/>
+          <a:p>
+            <a:pPr algn="ctr"/>
+            <a:endParaRPr/>
+          </a:p>
+        </p:txBody>
+      </p:sp>
+      <p:sp>
+        <p:nvSpPr>
+          <p:cNvPr id="13" name="TextBox 12"/>
+          <p:cNvSpPr txBox="1"/>
+          <p:nvPr/>
+        </p:nvSpPr>
+        <p:spPr>
+          <a:xfrm>
+            <a:off x="2313185" y="4754879"/>
+            <a:ext cx="3840480" cy="914400"/>
+          </a:xfrm>
+          <a:prstGeom prst="rect">
+            <a:avLst/>
+          </a:prstGeom>
+          <a:noFill/>
+        </p:spPr>
+        <p:txBody>
+          <a:bodyPr wrap="square">
+            <a:spAutoFit/>
+          </a:bodyPr>
+          <a:lstStyle/>
+          <a:p>
+            <a:pPr algn="ctr"/>
+            <a:r>
+              <a:rPr sz="1400" b="1">
+                <a:solidFill>
+                  <a:srgbClr val="0F9D58"/>
+                </a:solidFill>
+                <a:latin typeface="Calibri"/>
+              </a:rPr>
+              <a:t>p &lt; 0.001 — Statistically Significant</a:t>
             </a:r>
           </a:p>
         </p:txBody>
       </p:sp>
       <p:pic>
         <p:nvPicPr>
-          <p:cNvPr id="9" name="Picture 8" descr="Success Rate by Group.png"/>
+          <p:cNvPr id="14" name="Picture 13" descr="Success Rate by Group.png"/>
           <p:cNvPicPr>
             <a:picLocks noChangeAspect="1"/>
           </p:cNvPicPr>
           <p:nvPr/>
         </p:nvPicPr>
         <p:blipFill>
-          <a:blip r:embed="rId2"/>
+          <a:blip r:embed="rId3"/>
           <a:stretch>
             <a:fillRect/>
           </a:stretch>
         </p:blipFill>
         <p:spPr>
           <a:xfrm>
-            <a:off x="7772400" y="1371600"/>
-            <a:ext cx="3931920" cy="14130338"/>
+            <a:off x="7861794" y="499794"/>
+            <a:ext cx="1641773" cy="5900120"/>
           </a:xfrm>
           <a:prstGeom prst="rect">
             <a:avLst/>
@@ -5191,7 +6891,7 @@
 </file>
 
 <file path=ppt/slides/slide5.xml><?xml version="1.0" encoding="utf-8"?>
-<p:sld xmlns:a="http://schemas.openxmlformats.org/drawingml/2006/main" xmlns:p="http://schemas.openxmlformats.org/presentationml/2006/main" xmlns:r="http://schemas.openxmlformats.org/officeDocument/2006/relationships">
+<p:sld xmlns:a="http://schemas.openxmlformats.org/drawingml/2006/main" xmlns:r="http://schemas.openxmlformats.org/officeDocument/2006/relationships" xmlns:p="http://schemas.openxmlformats.org/presentationml/2006/main">
   <p:cSld>
     <p:spTree>
       <p:nvGrpSpPr>
@@ -5199,7 +6899,14 @@
         <p:cNvGrpSpPr/>
         <p:nvPr/>
       </p:nvGrpSpPr>
-      <p:grpSpPr/>
+      <p:grpSpPr>
+        <a:xfrm>
+          <a:off x="0" y="0"/>
+          <a:ext cx="0" cy="0"/>
+          <a:chOff x="0" y="0"/>
+          <a:chExt cx="0" cy="0"/>
+        </a:xfrm>
+      </p:grpSpPr>
       <p:sp>
         <p:nvSpPr>
           <p:cNvPr id="2" name="Rectangle 1"/>
@@ -5209,13 +6916,13 @@
         <p:spPr>
           <a:xfrm>
             <a:off x="0" y="0"/>
-            <a:ext cx="12191695" cy="6858000"/>
+            <a:ext cx="12191695" cy="91440"/>
           </a:xfrm>
           <a:prstGeom prst="rect">
             <a:avLst/>
           </a:prstGeom>
           <a:solidFill>
-            <a:srgbClr val="1E1E23"/>
+            <a:srgbClr val="4285F4"/>
           </a:solidFill>
           <a:ln>
             <a:noFill/>
@@ -5240,6 +6947,7 @@
           <a:lstStyle/>
           <a:p>
             <a:pPr algn="ctr"/>
+            <a:endParaRPr/>
           </a:p>
         </p:txBody>
       </p:sp>
@@ -5267,9 +6975,9 @@
           <a:p>
             <a:pPr algn="ctr"/>
             <a:r>
-              <a:rPr sz="4000" b="1">
-                <a:solidFill>
-                  <a:srgbClr val="FFFFFF"/>
+              <a:rPr sz="3600" b="1">
+                <a:solidFill>
+                  <a:srgbClr val="212121"/>
                 </a:solidFill>
                 <a:latin typeface="Calibri"/>
               </a:rPr>
@@ -5294,8 +7002,8 @@
         </p:blipFill>
         <p:spPr>
           <a:xfrm>
-            <a:off x="731520" y="1188720"/>
-            <a:ext cx="7315200" cy="3635989"/>
+            <a:off x="457199" y="914400"/>
+            <a:ext cx="8830414" cy="4389120"/>
           </a:xfrm>
           <a:prstGeom prst="rect">
             <a:avLst/>
@@ -5304,14 +7012,58 @@
       </p:pic>
       <p:sp>
         <p:nvSpPr>
-          <p:cNvPr id="5" name="TextBox 4"/>
+          <p:cNvPr id="5" name="Rounded Rectangle 4"/>
+          <p:cNvSpPr/>
+          <p:nvPr/>
+        </p:nvSpPr>
+        <p:spPr>
+          <a:xfrm>
+            <a:off x="8961120" y="1097280"/>
+            <a:ext cx="2743200" cy="3657600"/>
+          </a:xfrm>
+          <a:prstGeom prst="roundRect">
+            <a:avLst/>
+          </a:prstGeom>
+          <a:solidFill>
+            <a:srgbClr val="F5F5F5"/>
+          </a:solidFill>
+          <a:ln>
+            <a:noFill/>
+          </a:ln>
+        </p:spPr>
+        <p:style>
+          <a:lnRef idx="1">
+            <a:schemeClr val="accent1"/>
+          </a:lnRef>
+          <a:fillRef idx="3">
+            <a:schemeClr val="accent1"/>
+          </a:fillRef>
+          <a:effectRef idx="2">
+            <a:schemeClr val="accent1"/>
+          </a:effectRef>
+          <a:fontRef idx="minor">
+            <a:schemeClr val="lt1"/>
+          </a:fontRef>
+        </p:style>
+        <p:txBody>
+          <a:bodyPr rtlCol="0" anchor="ctr"/>
+          <a:lstStyle/>
+          <a:p>
+            <a:pPr algn="ctr"/>
+            <a:endParaRPr/>
+          </a:p>
+        </p:txBody>
+      </p:sp>
+      <p:sp>
+        <p:nvSpPr>
+          <p:cNvPr id="6" name="TextBox 5"/>
           <p:cNvSpPr txBox="1"/>
           <p:nvPr/>
         </p:nvSpPr>
         <p:spPr>
           <a:xfrm>
-            <a:off x="8412480" y="1371600"/>
-            <a:ext cx="3200400" cy="914400"/>
+            <a:off x="8961120" y="1280160"/>
+            <a:ext cx="2743200" cy="914400"/>
           </a:xfrm>
           <a:prstGeom prst="rect">
             <a:avLst/>
@@ -5324,11 +7076,11 @@
           </a:bodyPr>
           <a:lstStyle/>
           <a:p>
-            <a:pPr algn="l"/>
-            <a:r>
-              <a:rPr sz="1800" b="1">
-                <a:solidFill>
-                  <a:srgbClr val="969696"/>
+            <a:pPr algn="ctr"/>
+            <a:r>
+              <a:rPr sz="1400" b="1">
+                <a:solidFill>
+                  <a:srgbClr val="212121"/>
                 </a:solidFill>
                 <a:latin typeface="Calibri"/>
               </a:rPr>
@@ -5339,14 +7091,58 @@
       </p:sp>
       <p:sp>
         <p:nvSpPr>
-          <p:cNvPr id="6" name="TextBox 5"/>
+          <p:cNvPr id="7" name="Oval 6"/>
+          <p:cNvSpPr/>
+          <p:nvPr/>
+        </p:nvSpPr>
+        <p:spPr>
+          <a:xfrm>
+            <a:off x="9235440" y="1828800"/>
+            <a:ext cx="457200" cy="457200"/>
+          </a:xfrm>
+          <a:prstGeom prst="ellipse">
+            <a:avLst/>
+          </a:prstGeom>
+          <a:solidFill>
+            <a:schemeClr val="bg1"/>
+          </a:solidFill>
+          <a:ln>
+            <a:noFill/>
+          </a:ln>
+        </p:spPr>
+        <p:style>
+          <a:lnRef idx="1">
+            <a:schemeClr val="accent1"/>
+          </a:lnRef>
+          <a:fillRef idx="3">
+            <a:schemeClr val="accent1"/>
+          </a:fillRef>
+          <a:effectRef idx="2">
+            <a:schemeClr val="accent1"/>
+          </a:effectRef>
+          <a:fontRef idx="minor">
+            <a:schemeClr val="lt1"/>
+          </a:fontRef>
+        </p:style>
+        <p:txBody>
+          <a:bodyPr rtlCol="0" anchor="ctr"/>
+          <a:lstStyle/>
+          <a:p>
+            <a:pPr algn="ctr"/>
+            <a:endParaRPr/>
+          </a:p>
+        </p:txBody>
+      </p:sp>
+      <p:sp>
+        <p:nvSpPr>
+          <p:cNvPr id="8" name="TextBox 7"/>
           <p:cNvSpPr txBox="1"/>
           <p:nvPr/>
         </p:nvSpPr>
         <p:spPr>
           <a:xfrm>
-            <a:off x="8412480" y="2011680"/>
-            <a:ext cx="1097280" cy="914400"/>
+            <a:off x="9784080" y="1828800"/>
+            <a:ext cx="1645920" cy="914400"/>
           </a:xfrm>
           <a:prstGeom prst="rect">
             <a:avLst/>
@@ -5361,27 +7157,27 @@
           <a:p>
             <a:pPr algn="l"/>
             <a:r>
-              <a:rPr sz="1400" b="0">
-                <a:solidFill>
-                  <a:srgbClr val="969696"/>
+              <a:rPr sz="1200" b="1" dirty="0">
+                <a:solidFill>
+                  <a:srgbClr val="757575"/>
                 </a:solidFill>
                 <a:latin typeface="Calibri"/>
               </a:rPr>
-              <a:t>Before:</a:t>
-            </a:r>
-          </a:p>
-        </p:txBody>
-      </p:sp>
-      <p:sp>
-        <p:nvSpPr>
-          <p:cNvPr id="7" name="TextBox 6"/>
+              <a:t>Before</a:t>
+            </a:r>
+          </a:p>
+        </p:txBody>
+      </p:sp>
+      <p:sp>
+        <p:nvSpPr>
+          <p:cNvPr id="9" name="TextBox 8"/>
           <p:cNvSpPr txBox="1"/>
           <p:nvPr/>
         </p:nvSpPr>
         <p:spPr>
           <a:xfrm>
-            <a:off x="9326880" y="2011680"/>
-            <a:ext cx="2286000" cy="914400"/>
+            <a:off x="9784080" y="2103120"/>
+            <a:ext cx="1645920" cy="914400"/>
           </a:xfrm>
           <a:prstGeom prst="rect">
             <a:avLst/>
@@ -5396,9 +7192,9 @@
           <a:p>
             <a:pPr algn="l"/>
             <a:r>
-              <a:rPr sz="1400" b="1">
-                <a:solidFill>
-                  <a:srgbClr val="969696"/>
+              <a:rPr sz="1100" b="0" dirty="0">
+                <a:solidFill>
+                  <a:srgbClr val="757575"/>
                 </a:solidFill>
                 <a:latin typeface="Calibri"/>
               </a:rPr>
@@ -5409,14 +7205,58 @@
       </p:sp>
       <p:sp>
         <p:nvSpPr>
-          <p:cNvPr id="8" name="TextBox 7"/>
+          <p:cNvPr id="10" name="Oval 9"/>
+          <p:cNvSpPr/>
+          <p:nvPr/>
+        </p:nvSpPr>
+        <p:spPr>
+          <a:xfrm>
+            <a:off x="9235440" y="2651760"/>
+            <a:ext cx="457200" cy="457200"/>
+          </a:xfrm>
+          <a:prstGeom prst="ellipse">
+            <a:avLst/>
+          </a:prstGeom>
+          <a:solidFill>
+            <a:srgbClr val="FBF4E7"/>
+          </a:solidFill>
+          <a:ln>
+            <a:noFill/>
+          </a:ln>
+        </p:spPr>
+        <p:style>
+          <a:lnRef idx="1">
+            <a:schemeClr val="accent1"/>
+          </a:lnRef>
+          <a:fillRef idx="3">
+            <a:schemeClr val="accent1"/>
+          </a:fillRef>
+          <a:effectRef idx="2">
+            <a:schemeClr val="accent1"/>
+          </a:effectRef>
+          <a:fontRef idx="minor">
+            <a:schemeClr val="lt1"/>
+          </a:fontRef>
+        </p:style>
+        <p:txBody>
+          <a:bodyPr rtlCol="0" anchor="ctr"/>
+          <a:lstStyle/>
+          <a:p>
+            <a:pPr algn="ctr"/>
+            <a:endParaRPr/>
+          </a:p>
+        </p:txBody>
+      </p:sp>
+      <p:sp>
+        <p:nvSpPr>
+          <p:cNvPr id="11" name="TextBox 10"/>
           <p:cNvSpPr txBox="1"/>
           <p:nvPr/>
         </p:nvSpPr>
         <p:spPr>
           <a:xfrm>
-            <a:off x="8412480" y="2468880"/>
-            <a:ext cx="1097280" cy="914400"/>
+            <a:off x="9784080" y="2651760"/>
+            <a:ext cx="1645920" cy="914400"/>
           </a:xfrm>
           <a:prstGeom prst="rect">
             <a:avLst/>
@@ -5431,27 +7271,27 @@
           <a:p>
             <a:pPr algn="l"/>
             <a:r>
-              <a:rPr sz="1400" b="0">
-                <a:solidFill>
-                  <a:srgbClr val="969696"/>
+              <a:rPr sz="1200" b="1" dirty="0">
+                <a:solidFill>
+                  <a:srgbClr val="757575"/>
                 </a:solidFill>
                 <a:latin typeface="Calibri"/>
               </a:rPr>
-              <a:t>During:</a:t>
-            </a:r>
-          </a:p>
-        </p:txBody>
-      </p:sp>
-      <p:sp>
-        <p:nvSpPr>
-          <p:cNvPr id="9" name="TextBox 8"/>
+              <a:t>During</a:t>
+            </a:r>
+          </a:p>
+        </p:txBody>
+      </p:sp>
+      <p:sp>
+        <p:nvSpPr>
+          <p:cNvPr id="12" name="TextBox 11"/>
           <p:cNvSpPr txBox="1"/>
           <p:nvPr/>
         </p:nvSpPr>
         <p:spPr>
           <a:xfrm>
-            <a:off x="9326880" y="2468880"/>
-            <a:ext cx="2286000" cy="914400"/>
+            <a:off x="9784080" y="2926080"/>
+            <a:ext cx="1645920" cy="261610"/>
           </a:xfrm>
           <a:prstGeom prst="rect">
             <a:avLst/>
@@ -5466,9 +7306,11 @@
           <a:p>
             <a:pPr algn="l"/>
             <a:r>
-              <a:rPr sz="1400" b="1">
-                <a:solidFill>
-                  <a:srgbClr val="4285F4"/>
+              <a:rPr sz="1100" b="0" dirty="0">
+                <a:solidFill>
+                  <a:schemeClr val="accent3">
+                    <a:lumMod val="75000"/>
+                  </a:schemeClr>
                 </a:solidFill>
                 <a:latin typeface="Calibri"/>
               </a:rPr>
@@ -5479,14 +7321,58 @@
       </p:sp>
       <p:sp>
         <p:nvSpPr>
-          <p:cNvPr id="10" name="TextBox 9"/>
+          <p:cNvPr id="13" name="Oval 12"/>
+          <p:cNvSpPr/>
+          <p:nvPr/>
+        </p:nvSpPr>
+        <p:spPr>
+          <a:xfrm>
+            <a:off x="9235440" y="3474720"/>
+            <a:ext cx="457200" cy="457200"/>
+          </a:xfrm>
+          <a:prstGeom prst="ellipse">
+            <a:avLst/>
+          </a:prstGeom>
+          <a:solidFill>
+            <a:schemeClr val="bg1"/>
+          </a:solidFill>
+          <a:ln>
+            <a:noFill/>
+          </a:ln>
+        </p:spPr>
+        <p:style>
+          <a:lnRef idx="1">
+            <a:schemeClr val="accent1"/>
+          </a:lnRef>
+          <a:fillRef idx="3">
+            <a:schemeClr val="accent1"/>
+          </a:fillRef>
+          <a:effectRef idx="2">
+            <a:schemeClr val="accent1"/>
+          </a:effectRef>
+          <a:fontRef idx="minor">
+            <a:schemeClr val="lt1"/>
+          </a:fontRef>
+        </p:style>
+        <p:txBody>
+          <a:bodyPr rtlCol="0" anchor="ctr"/>
+          <a:lstStyle/>
+          <a:p>
+            <a:pPr algn="ctr"/>
+            <a:endParaRPr/>
+          </a:p>
+        </p:txBody>
+      </p:sp>
+      <p:sp>
+        <p:nvSpPr>
+          <p:cNvPr id="14" name="TextBox 13"/>
           <p:cNvSpPr txBox="1"/>
           <p:nvPr/>
         </p:nvSpPr>
         <p:spPr>
           <a:xfrm>
-            <a:off x="8412480" y="2926080"/>
-            <a:ext cx="1097280" cy="914400"/>
+            <a:off x="9784080" y="3474720"/>
+            <a:ext cx="1645920" cy="914400"/>
           </a:xfrm>
           <a:prstGeom prst="rect">
             <a:avLst/>
@@ -5501,27 +7387,27 @@
           <a:p>
             <a:pPr algn="l"/>
             <a:r>
-              <a:rPr sz="1400" b="0">
-                <a:solidFill>
-                  <a:srgbClr val="969696"/>
+              <a:rPr sz="1200" b="1">
+                <a:solidFill>
+                  <a:srgbClr val="757575"/>
                 </a:solidFill>
                 <a:latin typeface="Calibri"/>
               </a:rPr>
-              <a:t>After:</a:t>
-            </a:r>
-          </a:p>
-        </p:txBody>
-      </p:sp>
-      <p:sp>
-        <p:nvSpPr>
-          <p:cNvPr id="11" name="TextBox 10"/>
+              <a:t>After</a:t>
+            </a:r>
+          </a:p>
+        </p:txBody>
+      </p:sp>
+      <p:sp>
+        <p:nvSpPr>
+          <p:cNvPr id="15" name="TextBox 14"/>
           <p:cNvSpPr txBox="1"/>
           <p:nvPr/>
         </p:nvSpPr>
         <p:spPr>
           <a:xfrm>
-            <a:off x="9326880" y="2926080"/>
-            <a:ext cx="2286000" cy="914400"/>
+            <a:off x="9784080" y="3749040"/>
+            <a:ext cx="1645920" cy="261610"/>
           </a:xfrm>
           <a:prstGeom prst="rect">
             <a:avLst/>
@@ -5536,9 +7422,11 @@
           <a:p>
             <a:pPr algn="l"/>
             <a:r>
-              <a:rPr sz="1400" b="1">
-                <a:solidFill>
-                  <a:srgbClr val="34A853"/>
+              <a:rPr sz="1100" b="0" dirty="0">
+                <a:solidFill>
+                  <a:schemeClr val="accent1">
+                    <a:lumMod val="75000"/>
+                  </a:schemeClr>
                 </a:solidFill>
                 <a:latin typeface="Calibri"/>
               </a:rPr>
@@ -5549,14 +7437,60 @@
       </p:sp>
       <p:sp>
         <p:nvSpPr>
-          <p:cNvPr id="12" name="TextBox 11"/>
+          <p:cNvPr id="16" name="Rounded Rectangle 15"/>
+          <p:cNvSpPr/>
+          <p:nvPr/>
+        </p:nvSpPr>
+        <p:spPr>
+          <a:xfrm>
+            <a:off x="1844040" y="5486400"/>
+            <a:ext cx="8503920" cy="731520"/>
+          </a:xfrm>
+          <a:prstGeom prst="roundRect">
+            <a:avLst/>
+          </a:prstGeom>
+          <a:solidFill>
+            <a:srgbClr val="E8F5E9"/>
+          </a:solidFill>
+          <a:ln w="25400">
+            <a:solidFill>
+              <a:srgbClr val="0F9D58"/>
+            </a:solidFill>
+          </a:ln>
+        </p:spPr>
+        <p:style>
+          <a:lnRef idx="1">
+            <a:schemeClr val="accent1"/>
+          </a:lnRef>
+          <a:fillRef idx="3">
+            <a:schemeClr val="accent1"/>
+          </a:fillRef>
+          <a:effectRef idx="2">
+            <a:schemeClr val="accent1"/>
+          </a:effectRef>
+          <a:fontRef idx="minor">
+            <a:schemeClr val="lt1"/>
+          </a:fontRef>
+        </p:style>
+        <p:txBody>
+          <a:bodyPr rtlCol="0" anchor="ctr"/>
+          <a:lstStyle/>
+          <a:p>
+            <a:pPr algn="ctr"/>
+            <a:endParaRPr/>
+          </a:p>
+        </p:txBody>
+      </p:sp>
+      <p:sp>
+        <p:nvSpPr>
+          <p:cNvPr id="17" name="TextBox 16"/>
           <p:cNvSpPr txBox="1"/>
           <p:nvPr/>
         </p:nvSpPr>
         <p:spPr>
           <a:xfrm>
-            <a:off x="457200" y="5943600"/>
-            <a:ext cx="10972800" cy="914400"/>
+            <a:off x="1844040" y="5623560"/>
+            <a:ext cx="8503920" cy="914400"/>
           </a:xfrm>
           <a:prstGeom prst="rect">
             <a:avLst/>
@@ -5571,13 +7505,13 @@
           <a:p>
             <a:pPr algn="ctr"/>
             <a:r>
-              <a:rPr sz="2000" b="0">
-                <a:solidFill>
-                  <a:srgbClr val="34A853"/>
+              <a:rPr sz="1800" b="1">
+                <a:solidFill>
+                  <a:srgbClr val="0F9D58"/>
                 </a:solidFill>
                 <a:latin typeface="Calibri"/>
               </a:rPr>
-              <a:t>The effect persisted even after the boost was reset</a:t>
+              <a:t>The effect persisted even after the boost was reset!</a:t>
             </a:r>
           </a:p>
         </p:txBody>
@@ -5591,7 +7525,7 @@
 </file>
 
 <file path=ppt/slides/slide6.xml><?xml version="1.0" encoding="utf-8"?>
-<p:sld xmlns:a="http://schemas.openxmlformats.org/drawingml/2006/main" xmlns:p="http://schemas.openxmlformats.org/presentationml/2006/main" xmlns:r="http://schemas.openxmlformats.org/officeDocument/2006/relationships">
+<p:sld xmlns:a="http://schemas.openxmlformats.org/drawingml/2006/main" xmlns:r="http://schemas.openxmlformats.org/officeDocument/2006/relationships" xmlns:p="http://schemas.openxmlformats.org/presentationml/2006/main">
   <p:cSld>
     <p:spTree>
       <p:nvGrpSpPr>
@@ -5599,7 +7533,14 @@
         <p:cNvGrpSpPr/>
         <p:nvPr/>
       </p:nvGrpSpPr>
-      <p:grpSpPr/>
+      <p:grpSpPr>
+        <a:xfrm>
+          <a:off x="0" y="0"/>
+          <a:ext cx="0" cy="0"/>
+          <a:chOff x="0" y="0"/>
+          <a:chExt cx="0" cy="0"/>
+        </a:xfrm>
+      </p:grpSpPr>
       <p:sp>
         <p:nvSpPr>
           <p:cNvPr id="2" name="Rectangle 1"/>
@@ -5609,13 +7550,13 @@
         <p:spPr>
           <a:xfrm>
             <a:off x="0" y="0"/>
-            <a:ext cx="12191695" cy="6858000"/>
+            <a:ext cx="12191695" cy="91440"/>
           </a:xfrm>
           <a:prstGeom prst="rect">
             <a:avLst/>
           </a:prstGeom>
           <a:solidFill>
-            <a:srgbClr val="1E1E23"/>
+            <a:srgbClr val="F4B400"/>
           </a:solidFill>
           <a:ln>
             <a:noFill/>
@@ -5640,6 +7581,7 @@
           <a:lstStyle/>
           <a:p>
             <a:pPr algn="ctr"/>
+            <a:endParaRPr/>
           </a:p>
         </p:txBody>
       </p:sp>
@@ -5651,7 +7593,7 @@
         </p:nvSpPr>
         <p:spPr>
           <a:xfrm>
-            <a:off x="457200" y="274320"/>
+            <a:off x="-3484605" y="468148"/>
             <a:ext cx="11277295" cy="914400"/>
           </a:xfrm>
           <a:prstGeom prst="rect">
@@ -5667,9 +7609,9 @@
           <a:p>
             <a:pPr algn="ctr"/>
             <a:r>
-              <a:rPr sz="4000" b="1">
-                <a:solidFill>
-                  <a:srgbClr val="FFFFFF"/>
+              <a:rPr sz="3600" b="1" dirty="0">
+                <a:solidFill>
+                  <a:srgbClr val="212121"/>
                 </a:solidFill>
                 <a:latin typeface="Calibri"/>
               </a:rPr>
@@ -5686,8 +7628,8 @@
         </p:nvSpPr>
         <p:spPr>
           <a:xfrm>
-            <a:off x="457200" y="1188720"/>
-            <a:ext cx="11277295" cy="914400"/>
+            <a:off x="1995922" y="1382548"/>
+            <a:ext cx="4572000" cy="914400"/>
           </a:xfrm>
           <a:prstGeom prst="rect">
             <a:avLst/>
@@ -5702,7 +7644,7 @@
           <a:p>
             <a:pPr algn="ctr"/>
             <a:r>
-              <a:rPr sz="9600" b="1">
+              <a:rPr sz="7200" b="1">
                 <a:solidFill>
                   <a:srgbClr val="4285F4"/>
                 </a:solidFill>
@@ -5721,8 +7663,8 @@
         </p:nvSpPr>
         <p:spPr>
           <a:xfrm>
-            <a:off x="457200" y="2743200"/>
-            <a:ext cx="10972800" cy="914400"/>
+            <a:off x="1995922" y="2571268"/>
+            <a:ext cx="4572000" cy="914400"/>
           </a:xfrm>
           <a:prstGeom prst="rect">
             <a:avLst/>
@@ -5737,9 +7679,9 @@
           <a:p>
             <a:pPr algn="ctr"/>
             <a:r>
-              <a:rPr sz="2800" b="0">
-                <a:solidFill>
-                  <a:srgbClr val="FFFFFF"/>
+              <a:rPr sz="2200" b="0">
+                <a:solidFill>
+                  <a:srgbClr val="212121"/>
                 </a:solidFill>
                 <a:latin typeface="Calibri"/>
               </a:rPr>
@@ -5750,14 +7692,60 @@
       </p:sp>
       <p:sp>
         <p:nvSpPr>
-          <p:cNvPr id="6" name="TextBox 5"/>
+          <p:cNvPr id="6" name="Rounded Rectangle 5"/>
+          <p:cNvSpPr/>
+          <p:nvPr/>
+        </p:nvSpPr>
+        <p:spPr>
+          <a:xfrm>
+            <a:off x="2270242" y="3302788"/>
+            <a:ext cx="1828800" cy="914400"/>
+          </a:xfrm>
+          <a:prstGeom prst="roundRect">
+            <a:avLst/>
+          </a:prstGeom>
+          <a:solidFill>
+            <a:srgbClr val="E3F2FD"/>
+          </a:solidFill>
+          <a:ln w="25400">
+            <a:solidFill>
+              <a:srgbClr val="4285F4"/>
+            </a:solidFill>
+          </a:ln>
+        </p:spPr>
+        <p:style>
+          <a:lnRef idx="1">
+            <a:schemeClr val="accent1"/>
+          </a:lnRef>
+          <a:fillRef idx="3">
+            <a:schemeClr val="accent1"/>
+          </a:fillRef>
+          <a:effectRef idx="2">
+            <a:schemeClr val="accent1"/>
+          </a:effectRef>
+          <a:fontRef idx="minor">
+            <a:schemeClr val="lt1"/>
+          </a:fontRef>
+        </p:style>
+        <p:txBody>
+          <a:bodyPr rtlCol="0" anchor="ctr"/>
+          <a:lstStyle/>
+          <a:p>
+            <a:pPr algn="ctr"/>
+            <a:endParaRPr/>
+          </a:p>
+        </p:txBody>
+      </p:sp>
+      <p:sp>
+        <p:nvSpPr>
+          <p:cNvPr id="7" name="TextBox 6"/>
           <p:cNvSpPr txBox="1"/>
           <p:nvPr/>
         </p:nvSpPr>
         <p:spPr>
           <a:xfrm>
-            <a:off x="2743200" y="3657600"/>
-            <a:ext cx="2743200" cy="914400"/>
+            <a:off x="2270242" y="3394228"/>
+            <a:ext cx="1828800" cy="914400"/>
           </a:xfrm>
           <a:prstGeom prst="rect">
             <a:avLst/>
@@ -5772,27 +7760,27 @@
           <a:p>
             <a:pPr algn="ctr"/>
             <a:r>
-              <a:rPr sz="2400" b="1">
+              <a:rPr sz="1200" b="0">
                 <a:solidFill>
                   <a:srgbClr val="4285F4"/>
                 </a:solidFill>
                 <a:latin typeface="Calibri"/>
               </a:rPr>
-              <a:t>Group A: 15.6%</a:t>
-            </a:r>
-          </a:p>
-        </p:txBody>
-      </p:sp>
-      <p:sp>
-        <p:nvSpPr>
-          <p:cNvPr id="7" name="TextBox 6"/>
+              <a:t>Group A</a:t>
+            </a:r>
+          </a:p>
+        </p:txBody>
+      </p:sp>
+      <p:sp>
+        <p:nvSpPr>
+          <p:cNvPr id="8" name="TextBox 7"/>
           <p:cNvSpPr txBox="1"/>
           <p:nvPr/>
         </p:nvSpPr>
         <p:spPr>
           <a:xfrm>
-            <a:off x="6400800" y="3657600"/>
-            <a:ext cx="2743200" cy="914400"/>
+            <a:off x="2270242" y="3668548"/>
+            <a:ext cx="1828800" cy="914400"/>
           </a:xfrm>
           <a:prstGeom prst="rect">
             <a:avLst/>
@@ -5809,25 +7797,71 @@
             <a:r>
               <a:rPr sz="2400" b="1">
                 <a:solidFill>
-                  <a:srgbClr val="EA4335"/>
+                  <a:srgbClr val="4285F4"/>
                 </a:solidFill>
                 <a:latin typeface="Calibri"/>
               </a:rPr>
-              <a:t>Group B: 10.3%</a:t>
-            </a:r>
-          </a:p>
-        </p:txBody>
-      </p:sp>
-      <p:sp>
-        <p:nvSpPr>
-          <p:cNvPr id="8" name="TextBox 7"/>
+              <a:t>15.6%</a:t>
+            </a:r>
+          </a:p>
+        </p:txBody>
+      </p:sp>
+      <p:sp>
+        <p:nvSpPr>
+          <p:cNvPr id="9" name="Rounded Rectangle 8"/>
+          <p:cNvSpPr/>
+          <p:nvPr/>
+        </p:nvSpPr>
+        <p:spPr>
+          <a:xfrm>
+            <a:off x="4281922" y="3302788"/>
+            <a:ext cx="1828800" cy="914400"/>
+          </a:xfrm>
+          <a:prstGeom prst="roundRect">
+            <a:avLst/>
+          </a:prstGeom>
+          <a:solidFill>
+            <a:srgbClr val="FFEBEE"/>
+          </a:solidFill>
+          <a:ln w="25400">
+            <a:solidFill>
+              <a:srgbClr val="DB4437"/>
+            </a:solidFill>
+          </a:ln>
+        </p:spPr>
+        <p:style>
+          <a:lnRef idx="1">
+            <a:schemeClr val="accent1"/>
+          </a:lnRef>
+          <a:fillRef idx="3">
+            <a:schemeClr val="accent1"/>
+          </a:fillRef>
+          <a:effectRef idx="2">
+            <a:schemeClr val="accent1"/>
+          </a:effectRef>
+          <a:fontRef idx="minor">
+            <a:schemeClr val="lt1"/>
+          </a:fontRef>
+        </p:style>
+        <p:txBody>
+          <a:bodyPr rtlCol="0" anchor="ctr"/>
+          <a:lstStyle/>
+          <a:p>
+            <a:pPr algn="ctr"/>
+            <a:endParaRPr/>
+          </a:p>
+        </p:txBody>
+      </p:sp>
+      <p:sp>
+        <p:nvSpPr>
+          <p:cNvPr id="10" name="TextBox 9"/>
           <p:cNvSpPr txBox="1"/>
           <p:nvPr/>
         </p:nvSpPr>
         <p:spPr>
           <a:xfrm>
-            <a:off x="457200" y="4754880"/>
-            <a:ext cx="10972800" cy="914400"/>
+            <a:off x="4281922" y="3394228"/>
+            <a:ext cx="1828800" cy="914400"/>
           </a:xfrm>
           <a:prstGeom prst="rect">
             <a:avLst/>
@@ -5842,20 +7876,169 @@
           <a:p>
             <a:pPr algn="ctr"/>
             <a:r>
-              <a:rPr sz="1800" b="0">
-                <a:solidFill>
-                  <a:srgbClr val="969696"/>
+              <a:rPr sz="1200" b="0">
+                <a:solidFill>
+                  <a:srgbClr val="DB4437"/>
                 </a:solidFill>
                 <a:latin typeface="Calibri"/>
               </a:rPr>
-              <a:t>Players recognize the value and actively use the feature more</a:t>
+              <a:t>Group B</a:t>
+            </a:r>
+          </a:p>
+        </p:txBody>
+      </p:sp>
+      <p:sp>
+        <p:nvSpPr>
+          <p:cNvPr id="11" name="TextBox 10"/>
+          <p:cNvSpPr txBox="1"/>
+          <p:nvPr/>
+        </p:nvSpPr>
+        <p:spPr>
+          <a:xfrm>
+            <a:off x="4281922" y="3668548"/>
+            <a:ext cx="1828800" cy="914400"/>
+          </a:xfrm>
+          <a:prstGeom prst="rect">
+            <a:avLst/>
+          </a:prstGeom>
+          <a:noFill/>
+        </p:spPr>
+        <p:txBody>
+          <a:bodyPr wrap="square">
+            <a:spAutoFit/>
+          </a:bodyPr>
+          <a:lstStyle/>
+          <a:p>
+            <a:pPr algn="ctr"/>
+            <a:r>
+              <a:rPr sz="2400" b="1">
+                <a:solidFill>
+                  <a:srgbClr val="DB4437"/>
+                </a:solidFill>
+                <a:latin typeface="Calibri"/>
+              </a:rPr>
+              <a:t>10.3%</a:t>
+            </a:r>
+          </a:p>
+        </p:txBody>
+      </p:sp>
+      <p:sp>
+        <p:nvSpPr>
+          <p:cNvPr id="12" name="Rounded Rectangle 11"/>
+          <p:cNvSpPr/>
+          <p:nvPr/>
+        </p:nvSpPr>
+        <p:spPr>
+          <a:xfrm>
+            <a:off x="2270242" y="4491508"/>
+            <a:ext cx="3840480" cy="731520"/>
+          </a:xfrm>
+          <a:prstGeom prst="roundRect">
+            <a:avLst/>
+          </a:prstGeom>
+          <a:solidFill>
+            <a:srgbClr val="F5F5F5"/>
+          </a:solidFill>
+          <a:ln>
+            <a:noFill/>
+          </a:ln>
+        </p:spPr>
+        <p:style>
+          <a:lnRef idx="1">
+            <a:schemeClr val="accent1"/>
+          </a:lnRef>
+          <a:fillRef idx="3">
+            <a:schemeClr val="accent1"/>
+          </a:fillRef>
+          <a:effectRef idx="2">
+            <a:schemeClr val="accent1"/>
+          </a:effectRef>
+          <a:fontRef idx="minor">
+            <a:schemeClr val="lt1"/>
+          </a:fontRef>
+        </p:style>
+        <p:txBody>
+          <a:bodyPr rtlCol="0" anchor="ctr"/>
+          <a:lstStyle/>
+          <a:p>
+            <a:pPr algn="ctr"/>
+            <a:endParaRPr/>
+          </a:p>
+        </p:txBody>
+      </p:sp>
+      <p:sp>
+        <p:nvSpPr>
+          <p:cNvPr id="13" name="TextBox 12"/>
+          <p:cNvSpPr txBox="1"/>
+          <p:nvPr/>
+        </p:nvSpPr>
+        <p:spPr>
+          <a:xfrm>
+            <a:off x="2270242" y="4582948"/>
+            <a:ext cx="3840480" cy="914400"/>
+          </a:xfrm>
+          <a:prstGeom prst="rect">
+            <a:avLst/>
+          </a:prstGeom>
+          <a:noFill/>
+        </p:spPr>
+        <p:txBody>
+          <a:bodyPr wrap="square">
+            <a:spAutoFit/>
+          </a:bodyPr>
+          <a:lstStyle/>
+          <a:p>
+            <a:pPr algn="ctr"/>
+            <a:r>
+              <a:rPr sz="1300" b="0">
+                <a:solidFill>
+                  <a:srgbClr val="212121"/>
+                </a:solidFill>
+                <a:latin typeface="Calibri"/>
+              </a:rPr>
+              <a:t>Players recognize value and</a:t>
+            </a:r>
+          </a:p>
+        </p:txBody>
+      </p:sp>
+      <p:sp>
+        <p:nvSpPr>
+          <p:cNvPr id="14" name="TextBox 13"/>
+          <p:cNvSpPr txBox="1"/>
+          <p:nvPr/>
+        </p:nvSpPr>
+        <p:spPr>
+          <a:xfrm>
+            <a:off x="2270242" y="4857268"/>
+            <a:ext cx="3840480" cy="914400"/>
+          </a:xfrm>
+          <a:prstGeom prst="rect">
+            <a:avLst/>
+          </a:prstGeom>
+          <a:noFill/>
+        </p:spPr>
+        <p:txBody>
+          <a:bodyPr wrap="square">
+            <a:spAutoFit/>
+          </a:bodyPr>
+          <a:lstStyle/>
+          <a:p>
+            <a:pPr algn="ctr"/>
+            <a:r>
+              <a:rPr sz="1300" b="0">
+                <a:solidFill>
+                  <a:srgbClr val="212121"/>
+                </a:solidFill>
+                <a:latin typeface="Calibri"/>
+              </a:rPr>
+              <a:t>actively use the feature more</a:t>
             </a:r>
           </a:p>
         </p:txBody>
       </p:sp>
       <p:pic>
         <p:nvPicPr>
-          <p:cNvPr id="9" name="Picture 8" descr="Boost Usage Rate.png"/>
+          <p:cNvPr id="15" name="Picture 14" descr="Boost Usage Rate.png"/>
           <p:cNvPicPr>
             <a:picLocks noChangeAspect="1"/>
           </p:cNvPicPr>
@@ -5869,8 +8052,8 @@
         </p:blipFill>
         <p:spPr>
           <a:xfrm>
-            <a:off x="7772400" y="1371600"/>
-            <a:ext cx="3931920" cy="13640114"/>
+            <a:off x="7792690" y="468148"/>
+            <a:ext cx="1741691" cy="6042057"/>
           </a:xfrm>
           <a:prstGeom prst="rect">
             <a:avLst/>
@@ -5886,7 +8069,7 @@
 </file>
 
 <file path=ppt/slides/slide7.xml><?xml version="1.0" encoding="utf-8"?>
-<p:sld xmlns:a="http://schemas.openxmlformats.org/drawingml/2006/main" xmlns:p="http://schemas.openxmlformats.org/presentationml/2006/main" xmlns:r="http://schemas.openxmlformats.org/officeDocument/2006/relationships">
+<p:sld xmlns:a="http://schemas.openxmlformats.org/drawingml/2006/main" xmlns:r="http://schemas.openxmlformats.org/officeDocument/2006/relationships" xmlns:p="http://schemas.openxmlformats.org/presentationml/2006/main">
   <p:cSld>
     <p:spTree>
       <p:nvGrpSpPr>
@@ -5894,7 +8077,14 @@
         <p:cNvGrpSpPr/>
         <p:nvPr/>
       </p:nvGrpSpPr>
-      <p:grpSpPr/>
+      <p:grpSpPr>
+        <a:xfrm>
+          <a:off x="0" y="0"/>
+          <a:ext cx="0" cy="0"/>
+          <a:chOff x="0" y="0"/>
+          <a:chExt cx="0" cy="0"/>
+        </a:xfrm>
+      </p:grpSpPr>
       <p:sp>
         <p:nvSpPr>
           <p:cNvPr id="2" name="Rectangle 1"/>
@@ -5904,13 +8094,13 @@
         <p:spPr>
           <a:xfrm>
             <a:off x="0" y="0"/>
-            <a:ext cx="12191695" cy="6858000"/>
+            <a:ext cx="12191695" cy="91440"/>
           </a:xfrm>
           <a:prstGeom prst="rect">
             <a:avLst/>
           </a:prstGeom>
           <a:solidFill>
-            <a:srgbClr val="1E1E23"/>
+            <a:srgbClr val="0F9D58"/>
           </a:solidFill>
           <a:ln>
             <a:noFill/>
@@ -5935,6 +8125,7 @@
           <a:lstStyle/>
           <a:p>
             <a:pPr algn="ctr"/>
+            <a:endParaRPr/>
           </a:p>
         </p:txBody>
       </p:sp>
@@ -5962,9 +8153,9 @@
           <a:p>
             <a:pPr algn="ctr"/>
             <a:r>
-              <a:rPr sz="4000" b="1">
-                <a:solidFill>
-                  <a:srgbClr val="FFFFFF"/>
+              <a:rPr sz="3600" b="1">
+                <a:solidFill>
+                  <a:srgbClr val="212121"/>
                 </a:solidFill>
                 <a:latin typeface="Calibri"/>
               </a:rPr>
@@ -5973,62 +8164,49 @@
           </a:p>
         </p:txBody>
       </p:sp>
-      <p:sp>
-        <p:nvSpPr>
-          <p:cNvPr id="4" name="TextBox 3"/>
-          <p:cNvSpPr txBox="1"/>
-          <p:nvPr/>
-        </p:nvSpPr>
-        <p:spPr>
-          <a:xfrm>
-            <a:off x="1371600" y="1280160"/>
-            <a:ext cx="2743200" cy="914400"/>
-          </a:xfrm>
-          <a:prstGeom prst="rect">
-            <a:avLst/>
-          </a:prstGeom>
-          <a:noFill/>
-        </p:spPr>
-        <p:txBody>
-          <a:bodyPr wrap="square">
-            <a:spAutoFit/>
-          </a:bodyPr>
-          <a:lstStyle/>
-          <a:p>
-            <a:pPr algn="ctr"/>
-            <a:r>
-              <a:rPr sz="1600" b="1">
-                <a:solidFill>
-                  <a:srgbClr val="505055"/>
-                </a:solidFill>
-                <a:latin typeface="Calibri"/>
-              </a:rPr>
-              <a:t>PRE-TEST</a:t>
-            </a:r>
-          </a:p>
-        </p:txBody>
-      </p:sp>
-      <p:sp>
-        <p:nvSpPr>
-          <p:cNvPr id="5" name="Rectangle 4"/>
+      <p:pic>
+        <p:nvPicPr>
+          <p:cNvPr id="4" name="Picture 3" descr="Success Rate by Test Period.png"/>
+          <p:cNvPicPr>
+            <a:picLocks noChangeAspect="1"/>
+          </p:cNvPicPr>
+          <p:nvPr/>
+        </p:nvPicPr>
+        <p:blipFill>
+          <a:blip r:embed="rId2"/>
+          <a:stretch>
+            <a:fillRect/>
+          </a:stretch>
+        </p:blipFill>
+        <p:spPr>
+          <a:xfrm>
+            <a:off x="883097" y="836844"/>
+            <a:ext cx="5003932" cy="5746836"/>
+          </a:xfrm>
+          <a:prstGeom prst="rect">
+            <a:avLst/>
+          </a:prstGeom>
+        </p:spPr>
+      </p:pic>
+      <p:sp>
+        <p:nvSpPr>
+          <p:cNvPr id="5" name="Rounded Rectangle 4"/>
           <p:cNvSpPr/>
           <p:nvPr/>
         </p:nvSpPr>
         <p:spPr>
           <a:xfrm>
-            <a:off x="1371600" y="1737360"/>
-            <a:ext cx="2743200" cy="3200400"/>
-          </a:xfrm>
-          <a:prstGeom prst="rect">
+            <a:off x="8229600" y="1097280"/>
+            <a:ext cx="3474720" cy="1188720"/>
+          </a:xfrm>
+          <a:prstGeom prst="roundRect">
             <a:avLst/>
           </a:prstGeom>
           <a:solidFill>
-            <a:srgbClr val="2D2D32"/>
+            <a:srgbClr val="F5F5F5"/>
           </a:solidFill>
-          <a:ln w="25400">
-            <a:solidFill>
-              <a:srgbClr val="505055"/>
-            </a:solidFill>
+          <a:ln>
+            <a:noFill/>
           </a:ln>
         </p:spPr>
         <p:style>
@@ -6050,6 +8228,7 @@
           <a:lstStyle/>
           <a:p>
             <a:pPr algn="ctr"/>
+            <a:endParaRPr/>
           </a:p>
         </p:txBody>
       </p:sp>
@@ -6061,8 +8240,8 @@
         </p:nvSpPr>
         <p:spPr>
           <a:xfrm>
-            <a:off x="1371600" y="2103120"/>
-            <a:ext cx="2743200" cy="914400"/>
+            <a:off x="8229600" y="1188720"/>
+            <a:ext cx="3474720" cy="914400"/>
           </a:xfrm>
           <a:prstGeom prst="rect">
             <a:avLst/>
@@ -6077,13 +8256,13 @@
           <a:p>
             <a:pPr algn="ctr"/>
             <a:r>
-              <a:rPr sz="2400" b="1">
-                <a:solidFill>
-                  <a:srgbClr val="4285F4"/>
+              <a:rPr sz="1200" b="1">
+                <a:solidFill>
+                  <a:srgbClr val="757575"/>
                 </a:solidFill>
                 <a:latin typeface="Calibri"/>
               </a:rPr>
-              <a:t>A: 29.1%</a:t>
+              <a:t>PRE-TEST</a:t>
             </a:r>
           </a:p>
         </p:txBody>
@@ -6096,8 +8275,8 @@
         </p:nvSpPr>
         <p:spPr>
           <a:xfrm>
-            <a:off x="1371600" y="2743200"/>
-            <a:ext cx="2743200" cy="914400"/>
+            <a:off x="8229600" y="1554480"/>
+            <a:ext cx="3474720" cy="914400"/>
           </a:xfrm>
           <a:prstGeom prst="rect">
             <a:avLst/>
@@ -6112,13 +8291,13 @@
           <a:p>
             <a:pPr algn="ctr"/>
             <a:r>
-              <a:rPr sz="2400" b="1">
-                <a:solidFill>
-                  <a:srgbClr val="EA4335"/>
+              <a:rPr sz="1400" b="0">
+                <a:solidFill>
+                  <a:srgbClr val="212121"/>
                 </a:solidFill>
                 <a:latin typeface="Calibri"/>
               </a:rPr>
-              <a:t>B: 30.1%</a:t>
+              <a:t>A: 29.1%  vs  B: 30.1%</a:t>
             </a:r>
           </a:p>
         </p:txBody>
@@ -6131,8 +8310,8 @@
         </p:nvSpPr>
         <p:spPr>
           <a:xfrm>
-            <a:off x="1371600" y="3657600"/>
-            <a:ext cx="2743200" cy="914400"/>
+            <a:off x="8229600" y="1874519"/>
+            <a:ext cx="3474720" cy="914400"/>
           </a:xfrm>
           <a:prstGeom prst="rect">
             <a:avLst/>
@@ -6147,68 +8326,33 @@
           <a:p>
             <a:pPr algn="ctr"/>
             <a:r>
-              <a:rPr sz="3200" b="1">
-                <a:solidFill>
-                  <a:srgbClr val="505055"/>
+              <a:rPr sz="1100" b="0">
+                <a:solidFill>
+                  <a:srgbClr val="757575"/>
                 </a:solidFill>
                 <a:latin typeface="Calibri"/>
               </a:rPr>
-              <a:t>-1.0 pp</a:t>
-            </a:r>
-          </a:p>
-        </p:txBody>
-      </p:sp>
-      <p:sp>
-        <p:nvSpPr>
-          <p:cNvPr id="9" name="TextBox 8"/>
-          <p:cNvSpPr txBox="1"/>
-          <p:nvPr/>
-        </p:nvSpPr>
-        <p:spPr>
-          <a:xfrm>
-            <a:off x="4846320" y="1280160"/>
-            <a:ext cx="2743200" cy="914400"/>
-          </a:xfrm>
-          <a:prstGeom prst="rect">
-            <a:avLst/>
-          </a:prstGeom>
-          <a:noFill/>
-        </p:spPr>
-        <p:txBody>
-          <a:bodyPr wrap="square">
-            <a:spAutoFit/>
-          </a:bodyPr>
-          <a:lstStyle/>
-          <a:p>
-            <a:pPr algn="ctr"/>
-            <a:r>
-              <a:rPr sz="1600" b="1">
-                <a:solidFill>
-                  <a:srgbClr val="4285F4"/>
-                </a:solidFill>
-                <a:latin typeface="Calibri"/>
-              </a:rPr>
-              <a:t>DURING TEST</a:t>
-            </a:r>
-          </a:p>
-        </p:txBody>
-      </p:sp>
-      <p:sp>
-        <p:nvSpPr>
-          <p:cNvPr id="10" name="Rectangle 9"/>
+              <a:t>-1.0 pp (similar baseline)</a:t>
+            </a:r>
+          </a:p>
+        </p:txBody>
+      </p:sp>
+      <p:sp>
+        <p:nvSpPr>
+          <p:cNvPr id="9" name="Rounded Rectangle 8"/>
           <p:cNvSpPr/>
           <p:nvPr/>
         </p:nvSpPr>
         <p:spPr>
           <a:xfrm>
-            <a:off x="4846320" y="1737360"/>
-            <a:ext cx="2743200" cy="3200400"/>
-          </a:xfrm>
-          <a:prstGeom prst="rect">
+            <a:off x="8229600" y="2468880"/>
+            <a:ext cx="3474720" cy="1188720"/>
+          </a:xfrm>
+          <a:prstGeom prst="roundRect">
             <a:avLst/>
           </a:prstGeom>
           <a:solidFill>
-            <a:srgbClr val="2D2D32"/>
+            <a:srgbClr val="E3F2FD"/>
           </a:solidFill>
           <a:ln w="25400">
             <a:solidFill>
@@ -6235,19 +8379,20 @@
           <a:lstStyle/>
           <a:p>
             <a:pPr algn="ctr"/>
-          </a:p>
-        </p:txBody>
-      </p:sp>
-      <p:sp>
-        <p:nvSpPr>
-          <p:cNvPr id="11" name="TextBox 10"/>
+            <a:endParaRPr/>
+          </a:p>
+        </p:txBody>
+      </p:sp>
+      <p:sp>
+        <p:nvSpPr>
+          <p:cNvPr id="10" name="TextBox 9"/>
           <p:cNvSpPr txBox="1"/>
           <p:nvPr/>
         </p:nvSpPr>
         <p:spPr>
           <a:xfrm>
-            <a:off x="4846320" y="2103120"/>
-            <a:ext cx="2743200" cy="914400"/>
+            <a:off x="8229600" y="2560320"/>
+            <a:ext cx="3474720" cy="914400"/>
           </a:xfrm>
           <a:prstGeom prst="rect">
             <a:avLst/>
@@ -6262,27 +8407,27 @@
           <a:p>
             <a:pPr algn="ctr"/>
             <a:r>
-              <a:rPr sz="2400" b="1">
+              <a:rPr sz="1200" b="1">
                 <a:solidFill>
                   <a:srgbClr val="4285F4"/>
                 </a:solidFill>
                 <a:latin typeface="Calibri"/>
               </a:rPr>
-              <a:t>A: 25.1%</a:t>
-            </a:r>
-          </a:p>
-        </p:txBody>
-      </p:sp>
-      <p:sp>
-        <p:nvSpPr>
-          <p:cNvPr id="12" name="TextBox 11"/>
+              <a:t>DURING TEST</a:t>
+            </a:r>
+          </a:p>
+        </p:txBody>
+      </p:sp>
+      <p:sp>
+        <p:nvSpPr>
+          <p:cNvPr id="11" name="TextBox 10"/>
           <p:cNvSpPr txBox="1"/>
           <p:nvPr/>
         </p:nvSpPr>
         <p:spPr>
           <a:xfrm>
-            <a:off x="4846320" y="2743200"/>
-            <a:ext cx="2743200" cy="914400"/>
+            <a:off x="8229600" y="2926080"/>
+            <a:ext cx="3474720" cy="914400"/>
           </a:xfrm>
           <a:prstGeom prst="rect">
             <a:avLst/>
@@ -6297,27 +8442,27 @@
           <a:p>
             <a:pPr algn="ctr"/>
             <a:r>
-              <a:rPr sz="2400" b="1">
-                <a:solidFill>
-                  <a:srgbClr val="EA4335"/>
+              <a:rPr sz="1400" b="0">
+                <a:solidFill>
+                  <a:srgbClr val="212121"/>
                 </a:solidFill>
                 <a:latin typeface="Calibri"/>
               </a:rPr>
-              <a:t>B: 22.5%</a:t>
-            </a:r>
-          </a:p>
-        </p:txBody>
-      </p:sp>
-      <p:sp>
-        <p:nvSpPr>
-          <p:cNvPr id="13" name="TextBox 12"/>
+              <a:t>A: 25.1%  vs  B: 22.5%</a:t>
+            </a:r>
+          </a:p>
+        </p:txBody>
+      </p:sp>
+      <p:sp>
+        <p:nvSpPr>
+          <p:cNvPr id="12" name="TextBox 11"/>
           <p:cNvSpPr txBox="1"/>
           <p:nvPr/>
         </p:nvSpPr>
         <p:spPr>
           <a:xfrm>
-            <a:off x="4846320" y="3657600"/>
-            <a:ext cx="2743200" cy="914400"/>
+            <a:off x="8229600" y="3246120"/>
+            <a:ext cx="3474720" cy="914400"/>
           </a:xfrm>
           <a:prstGeom prst="rect">
             <a:avLst/>
@@ -6332,72 +8477,37 @@
           <a:p>
             <a:pPr algn="ctr"/>
             <a:r>
-              <a:rPr sz="3200" b="1">
+              <a:rPr sz="1100" b="1">
                 <a:solidFill>
                   <a:srgbClr val="4285F4"/>
                 </a:solidFill>
                 <a:latin typeface="Calibri"/>
               </a:rPr>
-              <a:t>+2.6 pp</a:t>
-            </a:r>
-          </a:p>
-        </p:txBody>
-      </p:sp>
-      <p:sp>
-        <p:nvSpPr>
-          <p:cNvPr id="14" name="TextBox 13"/>
-          <p:cNvSpPr txBox="1"/>
-          <p:nvPr/>
-        </p:nvSpPr>
-        <p:spPr>
-          <a:xfrm>
-            <a:off x="8321040" y="1280160"/>
-            <a:ext cx="2743200" cy="914400"/>
-          </a:xfrm>
-          <a:prstGeom prst="rect">
-            <a:avLst/>
-          </a:prstGeom>
-          <a:noFill/>
-        </p:spPr>
-        <p:txBody>
-          <a:bodyPr wrap="square">
-            <a:spAutoFit/>
-          </a:bodyPr>
-          <a:lstStyle/>
-          <a:p>
-            <a:pPr algn="ctr"/>
-            <a:r>
-              <a:rPr sz="1600" b="1">
-                <a:solidFill>
-                  <a:srgbClr val="34A853"/>
-                </a:solidFill>
-                <a:latin typeface="Calibri"/>
-              </a:rPr>
-              <a:t>POST-TEST</a:t>
-            </a:r>
-          </a:p>
-        </p:txBody>
-      </p:sp>
-      <p:sp>
-        <p:nvSpPr>
-          <p:cNvPr id="15" name="Rectangle 14"/>
+              <a:t>+2.6 pp improvement</a:t>
+            </a:r>
+          </a:p>
+        </p:txBody>
+      </p:sp>
+      <p:sp>
+        <p:nvSpPr>
+          <p:cNvPr id="13" name="Rounded Rectangle 12"/>
           <p:cNvSpPr/>
           <p:nvPr/>
         </p:nvSpPr>
         <p:spPr>
           <a:xfrm>
-            <a:off x="8321040" y="1737360"/>
-            <a:ext cx="2743200" cy="3200400"/>
-          </a:xfrm>
-          <a:prstGeom prst="rect">
+            <a:off x="8229600" y="3840480"/>
+            <a:ext cx="3474720" cy="1188720"/>
+          </a:xfrm>
+          <a:prstGeom prst="roundRect">
             <a:avLst/>
           </a:prstGeom>
           <a:solidFill>
-            <a:srgbClr val="2D2D32"/>
+            <a:srgbClr val="E8F5E9"/>
           </a:solidFill>
           <a:ln w="25400">
             <a:solidFill>
-              <a:srgbClr val="34A853"/>
+              <a:srgbClr val="0F9D58"/>
             </a:solidFill>
           </a:ln>
         </p:spPr>
@@ -6420,19 +8530,20 @@
           <a:lstStyle/>
           <a:p>
             <a:pPr algn="ctr"/>
-          </a:p>
-        </p:txBody>
-      </p:sp>
-      <p:sp>
-        <p:nvSpPr>
-          <p:cNvPr id="16" name="TextBox 15"/>
+            <a:endParaRPr/>
+          </a:p>
+        </p:txBody>
+      </p:sp>
+      <p:sp>
+        <p:nvSpPr>
+          <p:cNvPr id="14" name="TextBox 13"/>
           <p:cNvSpPr txBox="1"/>
           <p:nvPr/>
         </p:nvSpPr>
         <p:spPr>
           <a:xfrm>
-            <a:off x="8321040" y="2103120"/>
-            <a:ext cx="2743200" cy="914400"/>
+            <a:off x="8229600" y="3931920"/>
+            <a:ext cx="3474720" cy="914400"/>
           </a:xfrm>
           <a:prstGeom prst="rect">
             <a:avLst/>
@@ -6447,27 +8558,27 @@
           <a:p>
             <a:pPr algn="ctr"/>
             <a:r>
-              <a:rPr sz="2400" b="1">
-                <a:solidFill>
-                  <a:srgbClr val="4285F4"/>
+              <a:rPr sz="1200" b="1">
+                <a:solidFill>
+                  <a:srgbClr val="0F9D58"/>
                 </a:solidFill>
                 <a:latin typeface="Calibri"/>
               </a:rPr>
-              <a:t>A: 22.3%</a:t>
-            </a:r>
-          </a:p>
-        </p:txBody>
-      </p:sp>
-      <p:sp>
-        <p:nvSpPr>
-          <p:cNvPr id="17" name="TextBox 16"/>
+              <a:t>POST-TEST</a:t>
+            </a:r>
+          </a:p>
+        </p:txBody>
+      </p:sp>
+      <p:sp>
+        <p:nvSpPr>
+          <p:cNvPr id="15" name="TextBox 14"/>
           <p:cNvSpPr txBox="1"/>
           <p:nvPr/>
         </p:nvSpPr>
         <p:spPr>
           <a:xfrm>
-            <a:off x="8321040" y="2743200"/>
-            <a:ext cx="2743200" cy="914400"/>
+            <a:off x="8229600" y="4297680"/>
+            <a:ext cx="3474720" cy="914400"/>
           </a:xfrm>
           <a:prstGeom prst="rect">
             <a:avLst/>
@@ -6482,27 +8593,27 @@
           <a:p>
             <a:pPr algn="ctr"/>
             <a:r>
-              <a:rPr sz="2400" b="1">
-                <a:solidFill>
-                  <a:srgbClr val="EA4335"/>
+              <a:rPr sz="1400" b="0">
+                <a:solidFill>
+                  <a:srgbClr val="212121"/>
                 </a:solidFill>
                 <a:latin typeface="Calibri"/>
               </a:rPr>
-              <a:t>B: 19.7%</a:t>
-            </a:r>
-          </a:p>
-        </p:txBody>
-      </p:sp>
-      <p:sp>
-        <p:nvSpPr>
-          <p:cNvPr id="18" name="TextBox 17"/>
+              <a:t>A: 22.3%  vs  B: 19.7%</a:t>
+            </a:r>
+          </a:p>
+        </p:txBody>
+      </p:sp>
+      <p:sp>
+        <p:nvSpPr>
+          <p:cNvPr id="16" name="TextBox 15"/>
           <p:cNvSpPr txBox="1"/>
           <p:nvPr/>
         </p:nvSpPr>
         <p:spPr>
           <a:xfrm>
-            <a:off x="8321040" y="3657600"/>
-            <a:ext cx="2743200" cy="914400"/>
+            <a:off x="8229600" y="4617720"/>
+            <a:ext cx="3474720" cy="914400"/>
           </a:xfrm>
           <a:prstGeom prst="rect">
             <a:avLst/>
@@ -6517,27 +8628,73 @@
           <a:p>
             <a:pPr algn="ctr"/>
             <a:r>
-              <a:rPr sz="3200" b="1">
-                <a:solidFill>
-                  <a:srgbClr val="34A853"/>
+              <a:rPr sz="1100" b="1">
+                <a:solidFill>
+                  <a:srgbClr val="0F9D58"/>
                 </a:solidFill>
                 <a:latin typeface="Calibri"/>
               </a:rPr>
-              <a:t>+2.6 pp</a:t>
-            </a:r>
-          </a:p>
-        </p:txBody>
-      </p:sp>
-      <p:sp>
-        <p:nvSpPr>
-          <p:cNvPr id="19" name="TextBox 18"/>
+              <a:t>+2.6 pp (effect persists!)</a:t>
+            </a:r>
+          </a:p>
+        </p:txBody>
+      </p:sp>
+      <p:sp>
+        <p:nvSpPr>
+          <p:cNvPr id="17" name="Rounded Rectangle 16"/>
+          <p:cNvSpPr/>
+          <p:nvPr/>
+        </p:nvSpPr>
+        <p:spPr>
+          <a:xfrm>
+            <a:off x="5399903" y="5445680"/>
+            <a:ext cx="6334592" cy="630079"/>
+          </a:xfrm>
+          <a:prstGeom prst="roundRect">
+            <a:avLst/>
+          </a:prstGeom>
+          <a:solidFill>
+            <a:srgbClr val="FFF3E0"/>
+          </a:solidFill>
+          <a:ln w="25400">
+            <a:solidFill>
+              <a:srgbClr val="F4B400"/>
+            </a:solidFill>
+          </a:ln>
+        </p:spPr>
+        <p:style>
+          <a:lnRef idx="1">
+            <a:schemeClr val="accent1"/>
+          </a:lnRef>
+          <a:fillRef idx="3">
+            <a:schemeClr val="accent1"/>
+          </a:fillRef>
+          <a:effectRef idx="2">
+            <a:schemeClr val="accent1"/>
+          </a:effectRef>
+          <a:fontRef idx="minor">
+            <a:schemeClr val="lt1"/>
+          </a:fontRef>
+        </p:style>
+        <p:txBody>
+          <a:bodyPr rtlCol="0" anchor="ctr"/>
+          <a:lstStyle/>
+          <a:p>
+            <a:pPr algn="ctr"/>
+            <a:endParaRPr/>
+          </a:p>
+        </p:txBody>
+      </p:sp>
+      <p:sp>
+        <p:nvSpPr>
+          <p:cNvPr id="18" name="TextBox 17"/>
           <p:cNvSpPr txBox="1"/>
           <p:nvPr/>
         </p:nvSpPr>
         <p:spPr>
           <a:xfrm>
-            <a:off x="457200" y="5486400"/>
-            <a:ext cx="10972800" cy="914400"/>
+            <a:off x="4263081" y="5582840"/>
+            <a:ext cx="8503920" cy="914400"/>
           </a:xfrm>
           <a:prstGeom prst="rect">
             <a:avLst/>
@@ -6552,13 +8709,13 @@
           <a:p>
             <a:pPr algn="ctr"/>
             <a:r>
-              <a:rPr sz="2000" b="1">
-                <a:solidFill>
-                  <a:srgbClr val="34A853"/>
+              <a:rPr sz="1600" b="1" dirty="0">
+                <a:solidFill>
+                  <a:srgbClr val="212121"/>
                 </a:solidFill>
                 <a:latin typeface="Calibri"/>
               </a:rPr>
-              <a:t>Effect persists = Learned behavior / Habit formation</a:t>
+              <a:t>Key Insight: Effect persists = Learned behavior / Habit formation</a:t>
             </a:r>
           </a:p>
         </p:txBody>
@@ -6572,7 +8729,7 @@
 </file>
 
 <file path=ppt/slides/slide8.xml><?xml version="1.0" encoding="utf-8"?>
-<p:sld xmlns:a="http://schemas.openxmlformats.org/drawingml/2006/main" xmlns:p="http://schemas.openxmlformats.org/presentationml/2006/main" xmlns:r="http://schemas.openxmlformats.org/officeDocument/2006/relationships">
+<p:sld xmlns:a="http://schemas.openxmlformats.org/drawingml/2006/main" xmlns:r="http://schemas.openxmlformats.org/officeDocument/2006/relationships" xmlns:p="http://schemas.openxmlformats.org/presentationml/2006/main">
   <p:cSld>
     <p:spTree>
       <p:nvGrpSpPr>
@@ -6580,7 +8737,14 @@
         <p:cNvGrpSpPr/>
         <p:nvPr/>
       </p:nvGrpSpPr>
-      <p:grpSpPr/>
+      <p:grpSpPr>
+        <a:xfrm>
+          <a:off x="0" y="0"/>
+          <a:ext cx="0" cy="0"/>
+          <a:chOff x="0" y="0"/>
+          <a:chExt cx="0" cy="0"/>
+        </a:xfrm>
+      </p:grpSpPr>
       <p:sp>
         <p:nvSpPr>
           <p:cNvPr id="2" name="Rectangle 1"/>
@@ -6590,13 +8754,13 @@
         <p:spPr>
           <a:xfrm>
             <a:off x="0" y="0"/>
-            <a:ext cx="12191695" cy="6858000"/>
+            <a:ext cx="12191695" cy="91440"/>
           </a:xfrm>
           <a:prstGeom prst="rect">
             <a:avLst/>
           </a:prstGeom>
           <a:solidFill>
-            <a:srgbClr val="1E1E23"/>
+            <a:srgbClr val="757575"/>
           </a:solidFill>
           <a:ln>
             <a:noFill/>
@@ -6621,6 +8785,7 @@
           <a:lstStyle/>
           <a:p>
             <a:pPr algn="ctr"/>
+            <a:endParaRPr/>
           </a:p>
         </p:txBody>
       </p:sp>
@@ -6648,9 +8813,9 @@
           <a:p>
             <a:pPr algn="ctr"/>
             <a:r>
-              <a:rPr sz="4000" b="1">
-                <a:solidFill>
-                  <a:srgbClr val="FFFFFF"/>
+              <a:rPr sz="3600" b="1">
+                <a:solidFill>
+                  <a:srgbClr val="212121"/>
                 </a:solidFill>
                 <a:latin typeface="Calibri"/>
               </a:rPr>
@@ -6661,373 +8826,25 @@
       </p:sp>
       <p:sp>
         <p:nvSpPr>
-          <p:cNvPr id="4" name="TextBox 3"/>
-          <p:cNvSpPr txBox="1"/>
-          <p:nvPr/>
-        </p:nvSpPr>
-        <p:spPr>
-          <a:xfrm>
-            <a:off x="1371600" y="1188720"/>
-            <a:ext cx="4572000" cy="914400"/>
-          </a:xfrm>
-          <a:prstGeom prst="rect">
-            <a:avLst/>
-          </a:prstGeom>
-          <a:noFill/>
-        </p:spPr>
-        <p:txBody>
-          <a:bodyPr wrap="square">
-            <a:spAutoFit/>
-          </a:bodyPr>
-          <a:lstStyle/>
-          <a:p>
-            <a:pPr algn="l"/>
-            <a:r>
-              <a:rPr sz="2800" b="1">
-                <a:solidFill>
-                  <a:srgbClr val="34A853"/>
-                </a:solidFill>
-                <a:latin typeface="Calibri"/>
-              </a:rPr>
-              <a:t>FOR</a:t>
-            </a:r>
-          </a:p>
-        </p:txBody>
-      </p:sp>
-      <p:sp>
-        <p:nvSpPr>
-          <p:cNvPr id="5" name="TextBox 4"/>
-          <p:cNvSpPr txBox="1"/>
-          <p:nvPr/>
-        </p:nvSpPr>
-        <p:spPr>
-          <a:xfrm>
-            <a:off x="1371600" y="1828800"/>
-            <a:ext cx="4572000" cy="914400"/>
-          </a:xfrm>
-          <a:prstGeom prst="rect">
-            <a:avLst/>
-          </a:prstGeom>
-          <a:noFill/>
-        </p:spPr>
-        <p:txBody>
-          <a:bodyPr wrap="square">
-            <a:spAutoFit/>
-          </a:bodyPr>
-          <a:lstStyle/>
-          <a:p>
-            <a:pPr algn="l"/>
-            <a:r>
-              <a:rPr sz="2000" b="0">
-                <a:solidFill>
-                  <a:srgbClr val="FFFFFF"/>
-                </a:solidFill>
-                <a:latin typeface="Calibri"/>
-              </a:rPr>
-              <a:t>✓  +2.6% success rate</a:t>
-            </a:r>
-          </a:p>
-        </p:txBody>
-      </p:sp>
-      <p:sp>
-        <p:nvSpPr>
-          <p:cNvPr id="6" name="TextBox 5"/>
-          <p:cNvSpPr txBox="1"/>
-          <p:nvPr/>
-        </p:nvSpPr>
-        <p:spPr>
-          <a:xfrm>
-            <a:off x="1371600" y="2377440"/>
-            <a:ext cx="4572000" cy="914400"/>
-          </a:xfrm>
-          <a:prstGeom prst="rect">
-            <a:avLst/>
-          </a:prstGeom>
-          <a:noFill/>
-        </p:spPr>
-        <p:txBody>
-          <a:bodyPr wrap="square">
-            <a:spAutoFit/>
-          </a:bodyPr>
-          <a:lstStyle/>
-          <a:p>
-            <a:pPr algn="l"/>
-            <a:r>
-              <a:rPr sz="2000" b="0">
-                <a:solidFill>
-                  <a:srgbClr val="FFFFFF"/>
-                </a:solidFill>
-                <a:latin typeface="Calibri"/>
-              </a:rPr>
-              <a:t>✓  Statistically proven</a:t>
-            </a:r>
-          </a:p>
-        </p:txBody>
-      </p:sp>
-      <p:sp>
-        <p:nvSpPr>
-          <p:cNvPr id="7" name="TextBox 6"/>
-          <p:cNvSpPr txBox="1"/>
-          <p:nvPr/>
-        </p:nvSpPr>
-        <p:spPr>
-          <a:xfrm>
-            <a:off x="1371600" y="2926080"/>
-            <a:ext cx="4572000" cy="914400"/>
-          </a:xfrm>
-          <a:prstGeom prst="rect">
-            <a:avLst/>
-          </a:prstGeom>
-          <a:noFill/>
-        </p:spPr>
-        <p:txBody>
-          <a:bodyPr wrap="square">
-            <a:spAutoFit/>
-          </a:bodyPr>
-          <a:lstStyle/>
-          <a:p>
-            <a:pPr algn="l"/>
-            <a:r>
-              <a:rPr sz="2000" b="0">
-                <a:solidFill>
-                  <a:srgbClr val="FFFFFF"/>
-                </a:solidFill>
-                <a:latin typeface="Calibri"/>
-              </a:rPr>
-              <a:t>✓  Higher engagement</a:t>
-            </a:r>
-          </a:p>
-        </p:txBody>
-      </p:sp>
-      <p:sp>
-        <p:nvSpPr>
-          <p:cNvPr id="8" name="TextBox 7"/>
-          <p:cNvSpPr txBox="1"/>
-          <p:nvPr/>
-        </p:nvSpPr>
-        <p:spPr>
-          <a:xfrm>
-            <a:off x="1371600" y="3474720"/>
-            <a:ext cx="4572000" cy="914400"/>
-          </a:xfrm>
-          <a:prstGeom prst="rect">
-            <a:avLst/>
-          </a:prstGeom>
-          <a:noFill/>
-        </p:spPr>
-        <p:txBody>
-          <a:bodyPr wrap="square">
-            <a:spAutoFit/>
-          </a:bodyPr>
-          <a:lstStyle/>
-          <a:p>
-            <a:pPr algn="l"/>
-            <a:r>
-              <a:rPr sz="2000" b="0">
-                <a:solidFill>
-                  <a:srgbClr val="FFFFFF"/>
-                </a:solidFill>
-                <a:latin typeface="Calibri"/>
-              </a:rPr>
-              <a:t>✓  Lasting positive effect</a:t>
-            </a:r>
-          </a:p>
-        </p:txBody>
-      </p:sp>
-      <p:sp>
-        <p:nvSpPr>
-          <p:cNvPr id="9" name="TextBox 8"/>
-          <p:cNvSpPr txBox="1"/>
-          <p:nvPr/>
-        </p:nvSpPr>
-        <p:spPr>
-          <a:xfrm>
-            <a:off x="6858000" y="1188720"/>
-            <a:ext cx="4572000" cy="914400"/>
-          </a:xfrm>
-          <a:prstGeom prst="rect">
-            <a:avLst/>
-          </a:prstGeom>
-          <a:noFill/>
-        </p:spPr>
-        <p:txBody>
-          <a:bodyPr wrap="square">
-            <a:spAutoFit/>
-          </a:bodyPr>
-          <a:lstStyle/>
-          <a:p>
-            <a:pPr algn="l"/>
-            <a:r>
-              <a:rPr sz="2800" b="1">
-                <a:solidFill>
-                  <a:srgbClr val="EA4335"/>
-                </a:solidFill>
-                <a:latin typeface="Calibri"/>
-              </a:rPr>
-              <a:t>AGAINST</a:t>
-            </a:r>
-          </a:p>
-        </p:txBody>
-      </p:sp>
-      <p:sp>
-        <p:nvSpPr>
-          <p:cNvPr id="10" name="TextBox 9"/>
-          <p:cNvSpPr txBox="1"/>
-          <p:nvPr/>
-        </p:nvSpPr>
-        <p:spPr>
-          <a:xfrm>
-            <a:off x="6858000" y="1828800"/>
-            <a:ext cx="4572000" cy="914400"/>
-          </a:xfrm>
-          <a:prstGeom prst="rect">
-            <a:avLst/>
-          </a:prstGeom>
-          <a:noFill/>
-        </p:spPr>
-        <p:txBody>
-          <a:bodyPr wrap="square">
-            <a:spAutoFit/>
-          </a:bodyPr>
-          <a:lstStyle/>
-          <a:p>
-            <a:pPr algn="l"/>
-            <a:r>
-              <a:rPr sz="2000" b="0">
-                <a:solidFill>
-                  <a:srgbClr val="FFFFFF"/>
-                </a:solidFill>
-                <a:latin typeface="Calibri"/>
-              </a:rPr>
-              <a:t>✗  May reduce challenge</a:t>
-            </a:r>
-          </a:p>
-        </p:txBody>
-      </p:sp>
-      <p:sp>
-        <p:nvSpPr>
-          <p:cNvPr id="11" name="TextBox 10"/>
-          <p:cNvSpPr txBox="1"/>
-          <p:nvPr/>
-        </p:nvSpPr>
-        <p:spPr>
-          <a:xfrm>
-            <a:off x="6858000" y="2377440"/>
-            <a:ext cx="4572000" cy="914400"/>
-          </a:xfrm>
-          <a:prstGeom prst="rect">
-            <a:avLst/>
-          </a:prstGeom>
-          <a:noFill/>
-        </p:spPr>
-        <p:txBody>
-          <a:bodyPr wrap="square">
-            <a:spAutoFit/>
-          </a:bodyPr>
-          <a:lstStyle/>
-          <a:p>
-            <a:pPr algn="l"/>
-            <a:r>
-              <a:rPr sz="2000" b="0">
-                <a:solidFill>
-                  <a:srgbClr val="FFFFFF"/>
-                </a:solidFill>
-                <a:latin typeface="Calibri"/>
-              </a:rPr>
-              <a:t>✗  Boost dependency risk</a:t>
-            </a:r>
-          </a:p>
-        </p:txBody>
-      </p:sp>
-      <p:sp>
-        <p:nvSpPr>
-          <p:cNvPr id="12" name="TextBox 11"/>
-          <p:cNvSpPr txBox="1"/>
-          <p:nvPr/>
-        </p:nvSpPr>
-        <p:spPr>
-          <a:xfrm>
-            <a:off x="6858000" y="2926080"/>
-            <a:ext cx="4572000" cy="914400"/>
-          </a:xfrm>
-          <a:prstGeom prst="rect">
-            <a:avLst/>
-          </a:prstGeom>
-          <a:noFill/>
-        </p:spPr>
-        <p:txBody>
-          <a:bodyPr wrap="square">
-            <a:spAutoFit/>
-          </a:bodyPr>
-          <a:lstStyle/>
-          <a:p>
-            <a:pPr algn="l"/>
-            <a:r>
-              <a:rPr sz="2000" b="0">
-                <a:solidFill>
-                  <a:srgbClr val="FFFFFF"/>
-                </a:solidFill>
-                <a:latin typeface="Calibri"/>
-              </a:rPr>
-              <a:t>✗  Unknown monetization</a:t>
-            </a:r>
-          </a:p>
-        </p:txBody>
-      </p:sp>
-      <p:sp>
-        <p:nvSpPr>
-          <p:cNvPr id="13" name="TextBox 12"/>
-          <p:cNvSpPr txBox="1"/>
-          <p:nvPr/>
-        </p:nvSpPr>
-        <p:spPr>
-          <a:xfrm>
-            <a:off x="6858000" y="3474720"/>
-            <a:ext cx="4572000" cy="914400"/>
-          </a:xfrm>
-          <a:prstGeom prst="rect">
-            <a:avLst/>
-          </a:prstGeom>
-          <a:noFill/>
-        </p:spPr>
-        <p:txBody>
-          <a:bodyPr wrap="square">
-            <a:spAutoFit/>
-          </a:bodyPr>
-          <a:lstStyle/>
-          <a:p>
-            <a:pPr algn="l"/>
-            <a:r>
-              <a:rPr sz="2000" b="0">
-                <a:solidFill>
-                  <a:srgbClr val="FFFFFF"/>
-                </a:solidFill>
-                <a:latin typeface="Calibri"/>
-              </a:rPr>
-              <a:t>✗  Imperfect baseline</a:t>
-            </a:r>
-          </a:p>
-        </p:txBody>
-      </p:sp>
-      <p:sp>
-        <p:nvSpPr>
-          <p:cNvPr id="14" name="Rectangle 13"/>
+          <p:cNvPr id="4" name="Rounded Rectangle 3"/>
           <p:cNvSpPr/>
           <p:nvPr/>
         </p:nvSpPr>
         <p:spPr>
           <a:xfrm>
-            <a:off x="5943600" y="1188720"/>
-            <a:ext cx="25400" cy="3200400"/>
-          </a:xfrm>
-          <a:prstGeom prst="rect">
+            <a:off x="731520" y="1097280"/>
+            <a:ext cx="5029200" cy="4114800"/>
+          </a:xfrm>
+          <a:prstGeom prst="roundRect">
             <a:avLst/>
           </a:prstGeom>
           <a:solidFill>
-            <a:srgbClr val="505055"/>
+            <a:srgbClr val="E8F5E9"/>
           </a:solidFill>
-          <a:ln>
-            <a:noFill/>
+          <a:ln w="25400">
+            <a:solidFill>
+              <a:srgbClr val="0F9D58"/>
+            </a:solidFill>
           </a:ln>
         </p:spPr>
         <p:style>
@@ -7049,19 +8866,75 @@
           <a:lstStyle/>
           <a:p>
             <a:pPr algn="ctr"/>
-          </a:p>
-        </p:txBody>
-      </p:sp>
-      <p:sp>
-        <p:nvSpPr>
-          <p:cNvPr id="15" name="TextBox 14"/>
+            <a:endParaRPr/>
+          </a:p>
+        </p:txBody>
+      </p:sp>
+      <p:sp>
+        <p:nvSpPr>
+          <p:cNvPr id="5" name="Oval 4"/>
+          <p:cNvSpPr/>
+          <p:nvPr/>
+        </p:nvSpPr>
+        <p:spPr>
+          <a:xfrm>
+            <a:off x="2834640" y="1280160"/>
+            <a:ext cx="640080" cy="640080"/>
+          </a:xfrm>
+          <a:prstGeom prst="ellipse">
+            <a:avLst/>
+          </a:prstGeom>
+          <a:solidFill>
+            <a:srgbClr val="0F9D58"/>
+          </a:solidFill>
+          <a:ln>
+            <a:noFill/>
+          </a:ln>
+        </p:spPr>
+        <p:style>
+          <a:lnRef idx="1">
+            <a:schemeClr val="accent1"/>
+          </a:lnRef>
+          <a:fillRef idx="3">
+            <a:schemeClr val="accent1"/>
+          </a:fillRef>
+          <a:effectRef idx="2">
+            <a:schemeClr val="accent1"/>
+          </a:effectRef>
+          <a:fontRef idx="minor">
+            <a:schemeClr val="lt1"/>
+          </a:fontRef>
+        </p:style>
+        <p:txBody>
+          <a:bodyPr rtlCol="0" anchor="ctr"/>
+          <a:lstStyle/>
+          <a:p>
+            <a:pPr algn="ctr">
+              <a:spcBef>
+                <a:spcPts val="0"/>
+              </a:spcBef>
+            </a:pPr>
+            <a:r>
+              <a:rPr sz="1900" b="1">
+                <a:solidFill>
+                  <a:srgbClr val="FFFFFF"/>
+                </a:solidFill>
+              </a:rPr>
+              <a:t>✓</a:t>
+            </a:r>
+          </a:p>
+        </p:txBody>
+      </p:sp>
+      <p:sp>
+        <p:nvSpPr>
+          <p:cNvPr id="6" name="TextBox 5"/>
           <p:cNvSpPr txBox="1"/>
           <p:nvPr/>
         </p:nvSpPr>
         <p:spPr>
           <a:xfrm>
-            <a:off x="457200" y="5029200"/>
-            <a:ext cx="10972800" cy="914400"/>
+            <a:off x="731520" y="2011680"/>
+            <a:ext cx="5029200" cy="914400"/>
           </a:xfrm>
           <a:prstGeom prst="rect">
             <a:avLst/>
@@ -7076,13 +8949,508 @@
           <a:p>
             <a:pPr algn="ctr"/>
             <a:r>
-              <a:rPr sz="1800" b="0">
-                <a:solidFill>
-                  <a:srgbClr val="969696"/>
+              <a:rPr sz="2000" b="1">
+                <a:solidFill>
+                  <a:srgbClr val="0F9D58"/>
                 </a:solidFill>
                 <a:latin typeface="Calibri"/>
               </a:rPr>
-              <a:t>Benefits outweigh risks with proper monitoring</a:t>
+              <a:t>FOR ROLLOUT</a:t>
+            </a:r>
+          </a:p>
+        </p:txBody>
+      </p:sp>
+      <p:sp>
+        <p:nvSpPr>
+          <p:cNvPr id="7" name="TextBox 6"/>
+          <p:cNvSpPr txBox="1"/>
+          <p:nvPr/>
+        </p:nvSpPr>
+        <p:spPr>
+          <a:xfrm>
+            <a:off x="1188720" y="2560320"/>
+            <a:ext cx="4114800" cy="914400"/>
+          </a:xfrm>
+          <a:prstGeom prst="rect">
+            <a:avLst/>
+          </a:prstGeom>
+          <a:noFill/>
+        </p:spPr>
+        <p:txBody>
+          <a:bodyPr wrap="square">
+            <a:spAutoFit/>
+          </a:bodyPr>
+          <a:lstStyle/>
+          <a:p>
+            <a:pPr algn="l"/>
+            <a:r>
+              <a:rPr sz="1600" b="0">
+                <a:solidFill>
+                  <a:srgbClr val="212121"/>
+                </a:solidFill>
+                <a:latin typeface="Calibri"/>
+              </a:rPr>
+              <a:t>→  +2.6% success rate</a:t>
+            </a:r>
+          </a:p>
+        </p:txBody>
+      </p:sp>
+      <p:sp>
+        <p:nvSpPr>
+          <p:cNvPr id="8" name="TextBox 7"/>
+          <p:cNvSpPr txBox="1"/>
+          <p:nvPr/>
+        </p:nvSpPr>
+        <p:spPr>
+          <a:xfrm>
+            <a:off x="1188720" y="3017520"/>
+            <a:ext cx="4114800" cy="914400"/>
+          </a:xfrm>
+          <a:prstGeom prst="rect">
+            <a:avLst/>
+          </a:prstGeom>
+          <a:noFill/>
+        </p:spPr>
+        <p:txBody>
+          <a:bodyPr wrap="square">
+            <a:spAutoFit/>
+          </a:bodyPr>
+          <a:lstStyle/>
+          <a:p>
+            <a:pPr algn="l"/>
+            <a:r>
+              <a:rPr sz="1600" b="0">
+                <a:solidFill>
+                  <a:srgbClr val="212121"/>
+                </a:solidFill>
+                <a:latin typeface="Calibri"/>
+              </a:rPr>
+              <a:t>→  Statistically proven (p &lt; 0.001)</a:t>
+            </a:r>
+          </a:p>
+        </p:txBody>
+      </p:sp>
+      <p:sp>
+        <p:nvSpPr>
+          <p:cNvPr id="9" name="TextBox 8"/>
+          <p:cNvSpPr txBox="1"/>
+          <p:nvPr/>
+        </p:nvSpPr>
+        <p:spPr>
+          <a:xfrm>
+            <a:off x="1188720" y="3474720"/>
+            <a:ext cx="4114800" cy="914400"/>
+          </a:xfrm>
+          <a:prstGeom prst="rect">
+            <a:avLst/>
+          </a:prstGeom>
+          <a:noFill/>
+        </p:spPr>
+        <p:txBody>
+          <a:bodyPr wrap="square">
+            <a:spAutoFit/>
+          </a:bodyPr>
+          <a:lstStyle/>
+          <a:p>
+            <a:pPr algn="l"/>
+            <a:r>
+              <a:rPr sz="1600" b="0">
+                <a:solidFill>
+                  <a:srgbClr val="212121"/>
+                </a:solidFill>
+                <a:latin typeface="Calibri"/>
+              </a:rPr>
+              <a:t>→  51% higher engagement</a:t>
+            </a:r>
+          </a:p>
+        </p:txBody>
+      </p:sp>
+      <p:sp>
+        <p:nvSpPr>
+          <p:cNvPr id="10" name="TextBox 9"/>
+          <p:cNvSpPr txBox="1"/>
+          <p:nvPr/>
+        </p:nvSpPr>
+        <p:spPr>
+          <a:xfrm>
+            <a:off x="1188720" y="3931920"/>
+            <a:ext cx="4114800" cy="914400"/>
+          </a:xfrm>
+          <a:prstGeom prst="rect">
+            <a:avLst/>
+          </a:prstGeom>
+          <a:noFill/>
+        </p:spPr>
+        <p:txBody>
+          <a:bodyPr wrap="square">
+            <a:spAutoFit/>
+          </a:bodyPr>
+          <a:lstStyle/>
+          <a:p>
+            <a:pPr algn="l"/>
+            <a:r>
+              <a:rPr sz="1600" b="0">
+                <a:solidFill>
+                  <a:srgbClr val="212121"/>
+                </a:solidFill>
+                <a:latin typeface="Calibri"/>
+              </a:rPr>
+              <a:t>→  Lasting positive effect</a:t>
+            </a:r>
+          </a:p>
+        </p:txBody>
+      </p:sp>
+      <p:sp>
+        <p:nvSpPr>
+          <p:cNvPr id="11" name="Rounded Rectangle 10"/>
+          <p:cNvSpPr/>
+          <p:nvPr/>
+        </p:nvSpPr>
+        <p:spPr>
+          <a:xfrm>
+            <a:off x="6400800" y="1097280"/>
+            <a:ext cx="5029200" cy="4114800"/>
+          </a:xfrm>
+          <a:prstGeom prst="roundRect">
+            <a:avLst/>
+          </a:prstGeom>
+          <a:solidFill>
+            <a:srgbClr val="FFEBEE"/>
+          </a:solidFill>
+          <a:ln w="25400">
+            <a:solidFill>
+              <a:srgbClr val="DB4437"/>
+            </a:solidFill>
+          </a:ln>
+        </p:spPr>
+        <p:style>
+          <a:lnRef idx="1">
+            <a:schemeClr val="accent1"/>
+          </a:lnRef>
+          <a:fillRef idx="3">
+            <a:schemeClr val="accent1"/>
+          </a:fillRef>
+          <a:effectRef idx="2">
+            <a:schemeClr val="accent1"/>
+          </a:effectRef>
+          <a:fontRef idx="minor">
+            <a:schemeClr val="lt1"/>
+          </a:fontRef>
+        </p:style>
+        <p:txBody>
+          <a:bodyPr rtlCol="0" anchor="ctr"/>
+          <a:lstStyle/>
+          <a:p>
+            <a:pPr algn="ctr"/>
+            <a:endParaRPr/>
+          </a:p>
+        </p:txBody>
+      </p:sp>
+      <p:sp>
+        <p:nvSpPr>
+          <p:cNvPr id="12" name="Oval 11"/>
+          <p:cNvSpPr/>
+          <p:nvPr/>
+        </p:nvSpPr>
+        <p:spPr>
+          <a:xfrm>
+            <a:off x="8503920" y="1280160"/>
+            <a:ext cx="640080" cy="640080"/>
+          </a:xfrm>
+          <a:prstGeom prst="ellipse">
+            <a:avLst/>
+          </a:prstGeom>
+          <a:solidFill>
+            <a:srgbClr val="DB4437"/>
+          </a:solidFill>
+          <a:ln>
+            <a:noFill/>
+          </a:ln>
+        </p:spPr>
+        <p:style>
+          <a:lnRef idx="1">
+            <a:schemeClr val="accent1"/>
+          </a:lnRef>
+          <a:fillRef idx="3">
+            <a:schemeClr val="accent1"/>
+          </a:fillRef>
+          <a:effectRef idx="2">
+            <a:schemeClr val="accent1"/>
+          </a:effectRef>
+          <a:fontRef idx="minor">
+            <a:schemeClr val="lt1"/>
+          </a:fontRef>
+        </p:style>
+        <p:txBody>
+          <a:bodyPr rtlCol="0" anchor="ctr"/>
+          <a:lstStyle/>
+          <a:p>
+            <a:pPr algn="ctr">
+              <a:spcBef>
+                <a:spcPts val="0"/>
+              </a:spcBef>
+            </a:pPr>
+            <a:r>
+              <a:rPr sz="1900" b="1">
+                <a:solidFill>
+                  <a:srgbClr val="FFFFFF"/>
+                </a:solidFill>
+              </a:rPr>
+              <a:t>✗</a:t>
+            </a:r>
+          </a:p>
+        </p:txBody>
+      </p:sp>
+      <p:sp>
+        <p:nvSpPr>
+          <p:cNvPr id="13" name="TextBox 12"/>
+          <p:cNvSpPr txBox="1"/>
+          <p:nvPr/>
+        </p:nvSpPr>
+        <p:spPr>
+          <a:xfrm>
+            <a:off x="6400800" y="2011680"/>
+            <a:ext cx="5029200" cy="914400"/>
+          </a:xfrm>
+          <a:prstGeom prst="rect">
+            <a:avLst/>
+          </a:prstGeom>
+          <a:noFill/>
+        </p:spPr>
+        <p:txBody>
+          <a:bodyPr wrap="square">
+            <a:spAutoFit/>
+          </a:bodyPr>
+          <a:lstStyle/>
+          <a:p>
+            <a:pPr algn="ctr"/>
+            <a:r>
+              <a:rPr sz="2000" b="1">
+                <a:solidFill>
+                  <a:srgbClr val="DB4437"/>
+                </a:solidFill>
+                <a:latin typeface="Calibri"/>
+              </a:rPr>
+              <a:t>AGAINST ROLLOUT</a:t>
+            </a:r>
+          </a:p>
+        </p:txBody>
+      </p:sp>
+      <p:sp>
+        <p:nvSpPr>
+          <p:cNvPr id="14" name="TextBox 13"/>
+          <p:cNvSpPr txBox="1"/>
+          <p:nvPr/>
+        </p:nvSpPr>
+        <p:spPr>
+          <a:xfrm>
+            <a:off x="6858000" y="2560320"/>
+            <a:ext cx="4114800" cy="914400"/>
+          </a:xfrm>
+          <a:prstGeom prst="rect">
+            <a:avLst/>
+          </a:prstGeom>
+          <a:noFill/>
+        </p:spPr>
+        <p:txBody>
+          <a:bodyPr wrap="square">
+            <a:spAutoFit/>
+          </a:bodyPr>
+          <a:lstStyle/>
+          <a:p>
+            <a:pPr algn="l"/>
+            <a:r>
+              <a:rPr sz="1600" b="0">
+                <a:solidFill>
+                  <a:srgbClr val="212121"/>
+                </a:solidFill>
+                <a:latin typeface="Calibri"/>
+              </a:rPr>
+              <a:t>→  May reduce game challenge</a:t>
+            </a:r>
+          </a:p>
+        </p:txBody>
+      </p:sp>
+      <p:sp>
+        <p:nvSpPr>
+          <p:cNvPr id="15" name="TextBox 14"/>
+          <p:cNvSpPr txBox="1"/>
+          <p:nvPr/>
+        </p:nvSpPr>
+        <p:spPr>
+          <a:xfrm>
+            <a:off x="6858000" y="3017520"/>
+            <a:ext cx="4114800" cy="914400"/>
+          </a:xfrm>
+          <a:prstGeom prst="rect">
+            <a:avLst/>
+          </a:prstGeom>
+          <a:noFill/>
+        </p:spPr>
+        <p:txBody>
+          <a:bodyPr wrap="square">
+            <a:spAutoFit/>
+          </a:bodyPr>
+          <a:lstStyle/>
+          <a:p>
+            <a:pPr algn="l"/>
+            <a:r>
+              <a:rPr sz="1600" b="0">
+                <a:solidFill>
+                  <a:srgbClr val="212121"/>
+                </a:solidFill>
+                <a:latin typeface="Calibri"/>
+              </a:rPr>
+              <a:t>→  Boost dependency risk</a:t>
+            </a:r>
+          </a:p>
+        </p:txBody>
+      </p:sp>
+      <p:sp>
+        <p:nvSpPr>
+          <p:cNvPr id="16" name="TextBox 15"/>
+          <p:cNvSpPr txBox="1"/>
+          <p:nvPr/>
+        </p:nvSpPr>
+        <p:spPr>
+          <a:xfrm>
+            <a:off x="6858000" y="3474720"/>
+            <a:ext cx="4114800" cy="914400"/>
+          </a:xfrm>
+          <a:prstGeom prst="rect">
+            <a:avLst/>
+          </a:prstGeom>
+          <a:noFill/>
+        </p:spPr>
+        <p:txBody>
+          <a:bodyPr wrap="square">
+            <a:spAutoFit/>
+          </a:bodyPr>
+          <a:lstStyle/>
+          <a:p>
+            <a:pPr algn="l"/>
+            <a:r>
+              <a:rPr sz="1600" b="0">
+                <a:solidFill>
+                  <a:srgbClr val="212121"/>
+                </a:solidFill>
+                <a:latin typeface="Calibri"/>
+              </a:rPr>
+              <a:t>→  Unknown monetization impact</a:t>
+            </a:r>
+          </a:p>
+        </p:txBody>
+      </p:sp>
+      <p:sp>
+        <p:nvSpPr>
+          <p:cNvPr id="17" name="TextBox 16"/>
+          <p:cNvSpPr txBox="1"/>
+          <p:nvPr/>
+        </p:nvSpPr>
+        <p:spPr>
+          <a:xfrm>
+            <a:off x="6858000" y="3931920"/>
+            <a:ext cx="4114800" cy="914400"/>
+          </a:xfrm>
+          <a:prstGeom prst="rect">
+            <a:avLst/>
+          </a:prstGeom>
+          <a:noFill/>
+        </p:spPr>
+        <p:txBody>
+          <a:bodyPr wrap="square">
+            <a:spAutoFit/>
+          </a:bodyPr>
+          <a:lstStyle/>
+          <a:p>
+            <a:pPr algn="l"/>
+            <a:r>
+              <a:rPr sz="1600" b="0">
+                <a:solidFill>
+                  <a:srgbClr val="212121"/>
+                </a:solidFill>
+                <a:latin typeface="Calibri"/>
+              </a:rPr>
+              <a:t>→  Small baseline difference</a:t>
+            </a:r>
+          </a:p>
+        </p:txBody>
+      </p:sp>
+      <p:sp>
+        <p:nvSpPr>
+          <p:cNvPr id="18" name="Rounded Rectangle 17"/>
+          <p:cNvSpPr/>
+          <p:nvPr/>
+        </p:nvSpPr>
+        <p:spPr>
+          <a:xfrm>
+            <a:off x="1828800" y="5486400"/>
+            <a:ext cx="8503920" cy="640080"/>
+          </a:xfrm>
+          <a:prstGeom prst="roundRect">
+            <a:avLst/>
+          </a:prstGeom>
+          <a:solidFill>
+            <a:srgbClr val="F5F5F5"/>
+          </a:solidFill>
+          <a:ln>
+            <a:noFill/>
+          </a:ln>
+        </p:spPr>
+        <p:style>
+          <a:lnRef idx="1">
+            <a:schemeClr val="accent1"/>
+          </a:lnRef>
+          <a:fillRef idx="3">
+            <a:schemeClr val="accent1"/>
+          </a:fillRef>
+          <a:effectRef idx="2">
+            <a:schemeClr val="accent1"/>
+          </a:effectRef>
+          <a:fontRef idx="minor">
+            <a:schemeClr val="lt1"/>
+          </a:fontRef>
+        </p:style>
+        <p:txBody>
+          <a:bodyPr rtlCol="0" anchor="ctr"/>
+          <a:lstStyle/>
+          <a:p>
+            <a:pPr algn="ctr"/>
+            <a:endParaRPr/>
+          </a:p>
+        </p:txBody>
+      </p:sp>
+      <p:sp>
+        <p:nvSpPr>
+          <p:cNvPr id="19" name="TextBox 18"/>
+          <p:cNvSpPr txBox="1"/>
+          <p:nvPr/>
+        </p:nvSpPr>
+        <p:spPr>
+          <a:xfrm>
+            <a:off x="1828800" y="5596128"/>
+            <a:ext cx="8503920" cy="914400"/>
+          </a:xfrm>
+          <a:prstGeom prst="rect">
+            <a:avLst/>
+          </a:prstGeom>
+          <a:noFill/>
+        </p:spPr>
+        <p:txBody>
+          <a:bodyPr wrap="square">
+            <a:spAutoFit/>
+          </a:bodyPr>
+          <a:lstStyle/>
+          <a:p>
+            <a:pPr algn="ctr"/>
+            <a:r>
+              <a:rPr sz="1600" b="0">
+                <a:solidFill>
+                  <a:srgbClr val="212121"/>
+                </a:solidFill>
+                <a:latin typeface="Calibri"/>
+              </a:rPr>
+              <a:t>Benefits significantly outweigh risks with proper monitoring</a:t>
             </a:r>
           </a:p>
         </p:txBody>
@@ -7096,7 +9464,7 @@
 </file>
 
 <file path=ppt/slides/slide9.xml><?xml version="1.0" encoding="utf-8"?>
-<p:sld xmlns:a="http://schemas.openxmlformats.org/drawingml/2006/main" xmlns:p="http://schemas.openxmlformats.org/presentationml/2006/main" xmlns:r="http://schemas.openxmlformats.org/officeDocument/2006/relationships">
+<p:sld xmlns:a="http://schemas.openxmlformats.org/drawingml/2006/main" xmlns:r="http://schemas.openxmlformats.org/officeDocument/2006/relationships" xmlns:p="http://schemas.openxmlformats.org/presentationml/2006/main">
   <p:cSld>
     <p:spTree>
       <p:nvGrpSpPr>
@@ -7104,7 +9472,14 @@
         <p:cNvGrpSpPr/>
         <p:nvPr/>
       </p:nvGrpSpPr>
-      <p:grpSpPr/>
+      <p:grpSpPr>
+        <a:xfrm>
+          <a:off x="0" y="0"/>
+          <a:ext cx="0" cy="0"/>
+          <a:chOff x="0" y="0"/>
+          <a:chExt cx="0" cy="0"/>
+        </a:xfrm>
+      </p:grpSpPr>
       <p:sp>
         <p:nvSpPr>
           <p:cNvPr id="2" name="Rectangle 1"/>
@@ -7114,13 +9489,13 @@
         <p:spPr>
           <a:xfrm>
             <a:off x="0" y="0"/>
-            <a:ext cx="12191695" cy="6858000"/>
+            <a:ext cx="12191695" cy="91440"/>
           </a:xfrm>
           <a:prstGeom prst="rect">
             <a:avLst/>
           </a:prstGeom>
           <a:solidFill>
-            <a:srgbClr val="1E1E23"/>
+            <a:srgbClr val="0F9D58"/>
           </a:solidFill>
           <a:ln>
             <a:noFill/>
@@ -7145,6 +9520,7 @@
           <a:lstStyle/>
           <a:p>
             <a:pPr algn="ctr"/>
+            <a:endParaRPr/>
           </a:p>
         </p:txBody>
       </p:sp>
@@ -7157,7 +9533,7 @@
         <p:spPr>
           <a:xfrm>
             <a:off x="457200" y="457200"/>
-            <a:ext cx="11277295" cy="914400"/>
+            <a:ext cx="10972800" cy="914400"/>
           </a:xfrm>
           <a:prstGeom prst="rect">
             <a:avLst/>
@@ -7172,9 +9548,9 @@
           <a:p>
             <a:pPr algn="ctr"/>
             <a:r>
-              <a:rPr sz="3200" b="1">
-                <a:solidFill>
-                  <a:srgbClr val="969696"/>
+              <a:rPr sz="2400" b="0">
+                <a:solidFill>
+                  <a:srgbClr val="757575"/>
                 </a:solidFill>
                 <a:latin typeface="Calibri"/>
               </a:rPr>
@@ -7185,14 +9561,60 @@
       </p:sp>
       <p:sp>
         <p:nvSpPr>
-          <p:cNvPr id="4" name="TextBox 3"/>
+          <p:cNvPr id="4" name="Rounded Rectangle 3"/>
+          <p:cNvSpPr/>
+          <p:nvPr/>
+        </p:nvSpPr>
+        <p:spPr>
+          <a:xfrm>
+            <a:off x="1828800" y="1188720"/>
+            <a:ext cx="8503920" cy="1371600"/>
+          </a:xfrm>
+          <a:prstGeom prst="roundRect">
+            <a:avLst/>
+          </a:prstGeom>
+          <a:solidFill>
+            <a:srgbClr val="E8F5E9"/>
+          </a:solidFill>
+          <a:ln w="25400">
+            <a:solidFill>
+              <a:srgbClr val="0F9D58"/>
+            </a:solidFill>
+          </a:ln>
+        </p:spPr>
+        <p:style>
+          <a:lnRef idx="1">
+            <a:schemeClr val="accent1"/>
+          </a:lnRef>
+          <a:fillRef idx="3">
+            <a:schemeClr val="accent1"/>
+          </a:fillRef>
+          <a:effectRef idx="2">
+            <a:schemeClr val="accent1"/>
+          </a:effectRef>
+          <a:fontRef idx="minor">
+            <a:schemeClr val="lt1"/>
+          </a:fontRef>
+        </p:style>
+        <p:txBody>
+          <a:bodyPr rtlCol="0" anchor="ctr"/>
+          <a:lstStyle/>
+          <a:p>
+            <a:pPr algn="ctr"/>
+            <a:endParaRPr/>
+          </a:p>
+        </p:txBody>
+      </p:sp>
+      <p:sp>
+        <p:nvSpPr>
+          <p:cNvPr id="5" name="TextBox 4"/>
           <p:cNvSpPr txBox="1"/>
           <p:nvPr/>
         </p:nvSpPr>
         <p:spPr>
           <a:xfrm>
-            <a:off x="457200" y="1371600"/>
-            <a:ext cx="11277295" cy="914400"/>
+            <a:off x="1828800" y="1463040"/>
+            <a:ext cx="8503920" cy="914400"/>
           </a:xfrm>
           <a:prstGeom prst="rect">
             <a:avLst/>
@@ -7207,9 +9629,9 @@
           <a:p>
             <a:pPr algn="ctr"/>
             <a:r>
-              <a:rPr sz="7200" b="1">
-                <a:solidFill>
-                  <a:srgbClr val="34A853"/>
+              <a:rPr sz="4800" b="1">
+                <a:solidFill>
+                  <a:srgbClr val="0F9D58"/>
                 </a:solidFill>
                 <a:latin typeface="Calibri"/>
               </a:rPr>
@@ -7220,14 +9642,69 @@
       </p:sp>
       <p:sp>
         <p:nvSpPr>
-          <p:cNvPr id="5" name="TextBox 4"/>
+          <p:cNvPr id="6" name="Oval 5"/>
+          <p:cNvSpPr/>
+          <p:nvPr/>
+        </p:nvSpPr>
+        <p:spPr>
+          <a:xfrm>
+            <a:off x="2377440" y="2926080"/>
+            <a:ext cx="731520" cy="731520"/>
+          </a:xfrm>
+          <a:prstGeom prst="ellipse">
+            <a:avLst/>
+          </a:prstGeom>
+          <a:solidFill>
+            <a:srgbClr val="0F9D58"/>
+          </a:solidFill>
+          <a:ln>
+            <a:noFill/>
+          </a:ln>
+        </p:spPr>
+        <p:style>
+          <a:lnRef idx="1">
+            <a:schemeClr val="accent1"/>
+          </a:lnRef>
+          <a:fillRef idx="3">
+            <a:schemeClr val="accent1"/>
+          </a:fillRef>
+          <a:effectRef idx="2">
+            <a:schemeClr val="accent1"/>
+          </a:effectRef>
+          <a:fontRef idx="minor">
+            <a:schemeClr val="lt1"/>
+          </a:fontRef>
+        </p:style>
+        <p:txBody>
+          <a:bodyPr rtlCol="0" anchor="ctr"/>
+          <a:lstStyle/>
+          <a:p>
+            <a:pPr algn="ctr">
+              <a:spcBef>
+                <a:spcPts val="0"/>
+              </a:spcBef>
+            </a:pPr>
+            <a:r>
+              <a:rPr sz="2200" b="1">
+                <a:solidFill>
+                  <a:srgbClr val="FFFFFF"/>
+                </a:solidFill>
+              </a:rPr>
+              <a:t>✓</a:t>
+            </a:r>
+          </a:p>
+        </p:txBody>
+      </p:sp>
+      <p:sp>
+        <p:nvSpPr>
+          <p:cNvPr id="7" name="TextBox 6"/>
           <p:cNvSpPr txBox="1"/>
           <p:nvPr/>
         </p:nvSpPr>
         <p:spPr>
           <a:xfrm>
-            <a:off x="2286000" y="3200400"/>
-            <a:ext cx="7315200" cy="914400"/>
+            <a:off x="1371600" y="3840480"/>
+            <a:ext cx="2743200" cy="914400"/>
           </a:xfrm>
           <a:prstGeom prst="rect">
             <a:avLst/>
@@ -7240,29 +9717,30 @@
           </a:bodyPr>
           <a:lstStyle/>
           <a:p>
-            <a:pPr algn="l"/>
-            <a:r>
-              <a:rPr sz="2200" b="0">
-                <a:solidFill>
-                  <a:srgbClr val="FFFFFF"/>
+            <a:pPr algn="ctr"/>
+            <a:r>
+              <a:rPr sz="1600" b="1">
+                <a:solidFill>
+                  <a:srgbClr val="212121"/>
                 </a:solidFill>
                 <a:latin typeface="Calibri"/>
               </a:rPr>
-              <a:t>→  Proven improvement in player success</a:t>
-            </a:r>
-          </a:p>
-        </p:txBody>
-      </p:sp>
-      <p:sp>
-        <p:nvSpPr>
-          <p:cNvPr id="6" name="TextBox 5"/>
+              <a:t>Proven
+Improvement</a:t>
+            </a:r>
+          </a:p>
+        </p:txBody>
+      </p:sp>
+      <p:sp>
+        <p:nvSpPr>
+          <p:cNvPr id="8" name="TextBox 7"/>
           <p:cNvSpPr txBox="1"/>
           <p:nvPr/>
         </p:nvSpPr>
         <p:spPr>
           <a:xfrm>
-            <a:off x="2286000" y="3749040"/>
-            <a:ext cx="7315200" cy="914400"/>
+            <a:off x="1371600" y="4480560"/>
+            <a:ext cx="2743200" cy="914400"/>
           </a:xfrm>
           <a:prstGeom prst="rect">
             <a:avLst/>
@@ -7275,29 +9753,84 @@
           </a:bodyPr>
           <a:lstStyle/>
           <a:p>
-            <a:pPr algn="l"/>
-            <a:r>
-              <a:rPr sz="2200" b="0">
+            <a:pPr algn="ctr"/>
+            <a:r>
+              <a:rPr sz="1400" b="0">
+                <a:solidFill>
+                  <a:srgbClr val="757575"/>
+                </a:solidFill>
+                <a:latin typeface="Calibri"/>
+              </a:rPr>
+              <a:t>+2.6% success</a:t>
+            </a:r>
+          </a:p>
+        </p:txBody>
+      </p:sp>
+      <p:sp>
+        <p:nvSpPr>
+          <p:cNvPr id="9" name="Oval 8"/>
+          <p:cNvSpPr/>
+          <p:nvPr/>
+        </p:nvSpPr>
+        <p:spPr>
+          <a:xfrm>
+            <a:off x="5852160" y="2926080"/>
+            <a:ext cx="731520" cy="731520"/>
+          </a:xfrm>
+          <a:prstGeom prst="ellipse">
+            <a:avLst/>
+          </a:prstGeom>
+          <a:solidFill>
+            <a:srgbClr val="0F9D58"/>
+          </a:solidFill>
+          <a:ln>
+            <a:noFill/>
+          </a:ln>
+        </p:spPr>
+        <p:style>
+          <a:lnRef idx="1">
+            <a:schemeClr val="accent1"/>
+          </a:lnRef>
+          <a:fillRef idx="3">
+            <a:schemeClr val="accent1"/>
+          </a:fillRef>
+          <a:effectRef idx="2">
+            <a:schemeClr val="accent1"/>
+          </a:effectRef>
+          <a:fontRef idx="minor">
+            <a:schemeClr val="lt1"/>
+          </a:fontRef>
+        </p:style>
+        <p:txBody>
+          <a:bodyPr rtlCol="0" anchor="ctr"/>
+          <a:lstStyle/>
+          <a:p>
+            <a:pPr algn="ctr">
+              <a:spcBef>
+                <a:spcPts val="0"/>
+              </a:spcBef>
+            </a:pPr>
+            <a:r>
+              <a:rPr sz="2200" b="1">
                 <a:solidFill>
                   <a:srgbClr val="FFFFFF"/>
                 </a:solidFill>
-                <a:latin typeface="Calibri"/>
-              </a:rPr>
-              <a:t>→  Higher engagement with boost feature</a:t>
-            </a:r>
-          </a:p>
-        </p:txBody>
-      </p:sp>
-      <p:sp>
-        <p:nvSpPr>
-          <p:cNvPr id="7" name="TextBox 6"/>
+              </a:rPr>
+              <a:t>✓</a:t>
+            </a:r>
+          </a:p>
+        </p:txBody>
+      </p:sp>
+      <p:sp>
+        <p:nvSpPr>
+          <p:cNvPr id="10" name="TextBox 9"/>
           <p:cNvSpPr txBox="1"/>
           <p:nvPr/>
         </p:nvSpPr>
         <p:spPr>
           <a:xfrm>
-            <a:off x="2286000" y="4297680"/>
-            <a:ext cx="7315200" cy="914400"/>
+            <a:off x="4846320" y="3840480"/>
+            <a:ext cx="2743200" cy="914400"/>
           </a:xfrm>
           <a:prstGeom prst="rect">
             <a:avLst/>
@@ -7310,29 +9843,30 @@
           </a:bodyPr>
           <a:lstStyle/>
           <a:p>
-            <a:pPr algn="l"/>
-            <a:r>
-              <a:rPr sz="2200" b="0">
-                <a:solidFill>
-                  <a:srgbClr val="FFFFFF"/>
+            <a:pPr algn="ctr"/>
+            <a:r>
+              <a:rPr sz="1600" b="1">
+                <a:solidFill>
+                  <a:srgbClr val="212121"/>
                 </a:solidFill>
                 <a:latin typeface="Calibri"/>
               </a:rPr>
-              <a:t>→  Lasting positive behavioral effects</a:t>
-            </a:r>
-          </a:p>
-        </p:txBody>
-      </p:sp>
-      <p:sp>
-        <p:nvSpPr>
-          <p:cNvPr id="8" name="TextBox 7"/>
+              <a:t>Higher
+Engagement</a:t>
+            </a:r>
+          </a:p>
+        </p:txBody>
+      </p:sp>
+      <p:sp>
+        <p:nvSpPr>
+          <p:cNvPr id="11" name="TextBox 10"/>
           <p:cNvSpPr txBox="1"/>
           <p:nvPr/>
         </p:nvSpPr>
         <p:spPr>
           <a:xfrm>
-            <a:off x="2286000" y="5029200"/>
-            <a:ext cx="7315200" cy="914400"/>
+            <a:off x="4846320" y="4480560"/>
+            <a:ext cx="2743200" cy="914400"/>
           </a:xfrm>
           <a:prstGeom prst="rect">
             <a:avLst/>
@@ -7345,29 +9879,84 @@
           </a:bodyPr>
           <a:lstStyle/>
           <a:p>
-            <a:pPr algn="l"/>
-            <a:r>
-              <a:rPr sz="1800" b="1">
-                <a:solidFill>
-                  <a:srgbClr val="969696"/>
+            <a:pPr algn="ctr"/>
+            <a:r>
+              <a:rPr sz="1400" b="0">
+                <a:solidFill>
+                  <a:srgbClr val="757575"/>
                 </a:solidFill>
                 <a:latin typeface="Calibri"/>
               </a:rPr>
-              <a:t>With Monitoring:</a:t>
-            </a:r>
-          </a:p>
-        </p:txBody>
-      </p:sp>
-      <p:sp>
-        <p:nvSpPr>
-          <p:cNvPr id="9" name="TextBox 8"/>
+              <a:t>+51% boost use</a:t>
+            </a:r>
+          </a:p>
+        </p:txBody>
+      </p:sp>
+      <p:sp>
+        <p:nvSpPr>
+          <p:cNvPr id="12" name="Oval 11"/>
+          <p:cNvSpPr/>
+          <p:nvPr/>
+        </p:nvSpPr>
+        <p:spPr>
+          <a:xfrm>
+            <a:off x="9326880" y="2926080"/>
+            <a:ext cx="731520" cy="731520"/>
+          </a:xfrm>
+          <a:prstGeom prst="ellipse">
+            <a:avLst/>
+          </a:prstGeom>
+          <a:solidFill>
+            <a:srgbClr val="0F9D58"/>
+          </a:solidFill>
+          <a:ln>
+            <a:noFill/>
+          </a:ln>
+        </p:spPr>
+        <p:style>
+          <a:lnRef idx="1">
+            <a:schemeClr val="accent1"/>
+          </a:lnRef>
+          <a:fillRef idx="3">
+            <a:schemeClr val="accent1"/>
+          </a:fillRef>
+          <a:effectRef idx="2">
+            <a:schemeClr val="accent1"/>
+          </a:effectRef>
+          <a:fontRef idx="minor">
+            <a:schemeClr val="lt1"/>
+          </a:fontRef>
+        </p:style>
+        <p:txBody>
+          <a:bodyPr rtlCol="0" anchor="ctr"/>
+          <a:lstStyle/>
+          <a:p>
+            <a:pPr algn="ctr">
+              <a:spcBef>
+                <a:spcPts val="0"/>
+              </a:spcBef>
+            </a:pPr>
+            <a:r>
+              <a:rPr sz="2200" b="1">
+                <a:solidFill>
+                  <a:srgbClr val="FFFFFF"/>
+                </a:solidFill>
+              </a:rPr>
+              <a:t>✓</a:t>
+            </a:r>
+          </a:p>
+        </p:txBody>
+      </p:sp>
+      <p:sp>
+        <p:nvSpPr>
+          <p:cNvPr id="13" name="TextBox 12"/>
           <p:cNvSpPr txBox="1"/>
           <p:nvPr/>
         </p:nvSpPr>
         <p:spPr>
           <a:xfrm>
-            <a:off x="2286000" y="5486400"/>
-            <a:ext cx="7315200" cy="914400"/>
+            <a:off x="8321040" y="3840480"/>
+            <a:ext cx="2743200" cy="914400"/>
           </a:xfrm>
           <a:prstGeom prst="rect">
             <a:avLst/>
@@ -7380,11 +9969,161 @@
           </a:bodyPr>
           <a:lstStyle/>
           <a:p>
-            <a:pPr algn="l"/>
+            <a:pPr algn="ctr"/>
+            <a:r>
+              <a:rPr sz="1600" b="1">
+                <a:solidFill>
+                  <a:srgbClr val="212121"/>
+                </a:solidFill>
+                <a:latin typeface="Calibri"/>
+              </a:rPr>
+              <a:t>Lasting
+Effect</a:t>
+            </a:r>
+          </a:p>
+        </p:txBody>
+      </p:sp>
+      <p:sp>
+        <p:nvSpPr>
+          <p:cNvPr id="14" name="TextBox 13"/>
+          <p:cNvSpPr txBox="1"/>
+          <p:nvPr/>
+        </p:nvSpPr>
+        <p:spPr>
+          <a:xfrm>
+            <a:off x="8321040" y="4480560"/>
+            <a:ext cx="2743200" cy="914400"/>
+          </a:xfrm>
+          <a:prstGeom prst="rect">
+            <a:avLst/>
+          </a:prstGeom>
+          <a:noFill/>
+        </p:spPr>
+        <p:txBody>
+          <a:bodyPr wrap="square">
+            <a:spAutoFit/>
+          </a:bodyPr>
+          <a:lstStyle/>
+          <a:p>
+            <a:pPr algn="ctr"/>
+            <a:r>
+              <a:rPr sz="1400" b="0">
+                <a:solidFill>
+                  <a:srgbClr val="757575"/>
+                </a:solidFill>
+                <a:latin typeface="Calibri"/>
+              </a:rPr>
+              <a:t>Persists after reset</a:t>
+            </a:r>
+          </a:p>
+        </p:txBody>
+      </p:sp>
+      <p:sp>
+        <p:nvSpPr>
+          <p:cNvPr id="15" name="Rounded Rectangle 14"/>
+          <p:cNvSpPr/>
+          <p:nvPr/>
+        </p:nvSpPr>
+        <p:spPr>
+          <a:xfrm>
+            <a:off x="1371600" y="5029200"/>
+            <a:ext cx="9418320" cy="1097280"/>
+          </a:xfrm>
+          <a:prstGeom prst="roundRect">
+            <a:avLst/>
+          </a:prstGeom>
+          <a:solidFill>
+            <a:srgbClr val="F5F5F5"/>
+          </a:solidFill>
+          <a:ln>
+            <a:noFill/>
+          </a:ln>
+        </p:spPr>
+        <p:style>
+          <a:lnRef idx="1">
+            <a:schemeClr val="accent1"/>
+          </a:lnRef>
+          <a:fillRef idx="3">
+            <a:schemeClr val="accent1"/>
+          </a:fillRef>
+          <a:effectRef idx="2">
+            <a:schemeClr val="accent1"/>
+          </a:effectRef>
+          <a:fontRef idx="minor">
+            <a:schemeClr val="lt1"/>
+          </a:fontRef>
+        </p:style>
+        <p:txBody>
+          <a:bodyPr rtlCol="0" anchor="ctr"/>
+          <a:lstStyle/>
+          <a:p>
+            <a:pPr algn="ctr"/>
+            <a:endParaRPr/>
+          </a:p>
+        </p:txBody>
+      </p:sp>
+      <p:sp>
+        <p:nvSpPr>
+          <p:cNvPr id="16" name="TextBox 15"/>
+          <p:cNvSpPr txBox="1"/>
+          <p:nvPr/>
+        </p:nvSpPr>
+        <p:spPr>
+          <a:xfrm>
+            <a:off x="1371600" y="5166360"/>
+            <a:ext cx="9418320" cy="914400"/>
+          </a:xfrm>
+          <a:prstGeom prst="rect">
+            <a:avLst/>
+          </a:prstGeom>
+          <a:noFill/>
+        </p:spPr>
+        <p:txBody>
+          <a:bodyPr wrap="square">
+            <a:spAutoFit/>
+          </a:bodyPr>
+          <a:lstStyle/>
+          <a:p>
+            <a:pPr algn="ctr"/>
+            <a:r>
+              <a:rPr sz="1400" b="1">
+                <a:solidFill>
+                  <a:srgbClr val="757575"/>
+                </a:solidFill>
+                <a:latin typeface="Calibri"/>
+              </a:rPr>
+              <a:t>With Monitoring:</a:t>
+            </a:r>
+          </a:p>
+        </p:txBody>
+      </p:sp>
+      <p:sp>
+        <p:nvSpPr>
+          <p:cNvPr id="17" name="TextBox 16"/>
+          <p:cNvSpPr txBox="1"/>
+          <p:nvPr/>
+        </p:nvSpPr>
+        <p:spPr>
+          <a:xfrm>
+            <a:off x="1371600" y="5486400"/>
+            <a:ext cx="9418320" cy="914400"/>
+          </a:xfrm>
+          <a:prstGeom prst="rect">
+            <a:avLst/>
+          </a:prstGeom>
+          <a:noFill/>
+        </p:spPr>
+        <p:txBody>
+          <a:bodyPr wrap="square">
+            <a:spAutoFit/>
+          </a:bodyPr>
+          <a:lstStyle/>
+          <a:p>
+            <a:pPr algn="ctr"/>
             <a:r>
               <a:rPr sz="1600" b="0">
                 <a:solidFill>
-                  <a:srgbClr val="969696"/>
+                  <a:srgbClr val="212121"/>
                 </a:solidFill>
                 <a:latin typeface="Calibri"/>
               </a:rPr>
@@ -7719,4 +10458,319 @@
   </a:objectDefaults>
   <a:extraClrSchemeLst/>
 </a:theme>
+</file>
+
+<file path=ppt/theme/theme2.xml><?xml version="1.0" encoding="utf-8"?>
+<a:theme xmlns:a="http://schemas.openxmlformats.org/drawingml/2006/main" name="Office Theme">
+  <a:themeElements>
+    <a:clrScheme name="Office">
+      <a:dk1>
+        <a:sysClr val="windowText" lastClr="000000"/>
+      </a:dk1>
+      <a:lt1>
+        <a:sysClr val="window" lastClr="FFFFFF"/>
+      </a:lt1>
+      <a:dk2>
+        <a:srgbClr val="0E2841"/>
+      </a:dk2>
+      <a:lt2>
+        <a:srgbClr val="E8E8E8"/>
+      </a:lt2>
+      <a:accent1>
+        <a:srgbClr val="156082"/>
+      </a:accent1>
+      <a:accent2>
+        <a:srgbClr val="E97132"/>
+      </a:accent2>
+      <a:accent3>
+        <a:srgbClr val="196B24"/>
+      </a:accent3>
+      <a:accent4>
+        <a:srgbClr val="0F9ED5"/>
+      </a:accent4>
+      <a:accent5>
+        <a:srgbClr val="A02B93"/>
+      </a:accent5>
+      <a:accent6>
+        <a:srgbClr val="4EA72E"/>
+      </a:accent6>
+      <a:hlink>
+        <a:srgbClr val="467886"/>
+      </a:hlink>
+      <a:folHlink>
+        <a:srgbClr val="96607D"/>
+      </a:folHlink>
+    </a:clrScheme>
+    <a:fontScheme name="Office">
+      <a:majorFont>
+        <a:latin typeface="Aptos Display" panose="02110004020202020204"/>
+        <a:ea typeface=""/>
+        <a:cs typeface=""/>
+        <a:font script="Jpan" typeface="游ゴシック Light"/>
+        <a:font script="Hang" typeface="맑은 고딕"/>
+        <a:font script="Hans" typeface="等线 Light"/>
+        <a:font script="Hant" typeface="新細明體"/>
+        <a:font script="Arab" typeface="Times New Roman"/>
+        <a:font script="Hebr" typeface="Times New Roman"/>
+        <a:font script="Thai" typeface="Angsana New"/>
+        <a:font script="Ethi" typeface="Nyala"/>
+        <a:font script="Beng" typeface="Vrinda"/>
+        <a:font script="Gujr" typeface="Shruti"/>
+        <a:font script="Khmr" typeface="MoolBoran"/>
+        <a:font script="Knda" typeface="Tunga"/>
+        <a:font script="Guru" typeface="Raavi"/>
+        <a:font script="Cans" typeface="Euphemia"/>
+        <a:font script="Cher" typeface="Plantagenet Cherokee"/>
+        <a:font script="Yiii" typeface="Microsoft Yi Baiti"/>
+        <a:font script="Tibt" typeface="Microsoft Himalaya"/>
+        <a:font script="Thaa" typeface="MV Boli"/>
+        <a:font script="Deva" typeface="Mangal"/>
+        <a:font script="Telu" typeface="Gautami"/>
+        <a:font script="Taml" typeface="Latha"/>
+        <a:font script="Syrc" typeface="Estrangelo Edessa"/>
+        <a:font script="Orya" typeface="Kalinga"/>
+        <a:font script="Mlym" typeface="Kartika"/>
+        <a:font script="Laoo" typeface="DokChampa"/>
+        <a:font script="Sinh" typeface="Iskoola Pota"/>
+        <a:font script="Mong" typeface="Mongolian Baiti"/>
+        <a:font script="Viet" typeface="Times New Roman"/>
+        <a:font script="Uigh" typeface="Microsoft Uighur"/>
+        <a:font script="Geor" typeface="Sylfaen"/>
+        <a:font script="Armn" typeface="Arial"/>
+        <a:font script="Bugi" typeface="Leelawadee UI"/>
+        <a:font script="Bopo" typeface="Microsoft JhengHei"/>
+        <a:font script="Java" typeface="Javanese Text"/>
+        <a:font script="Lisu" typeface="Segoe UI"/>
+        <a:font script="Mymr" typeface="Myanmar Text"/>
+        <a:font script="Nkoo" typeface="Ebrima"/>
+        <a:font script="Olck" typeface="Nirmala UI"/>
+        <a:font script="Osma" typeface="Ebrima"/>
+        <a:font script="Phag" typeface="Phagspa"/>
+        <a:font script="Syrn" typeface="Estrangelo Edessa"/>
+        <a:font script="Syrj" typeface="Estrangelo Edessa"/>
+        <a:font script="Syre" typeface="Estrangelo Edessa"/>
+        <a:font script="Sora" typeface="Nirmala UI"/>
+        <a:font script="Tale" typeface="Microsoft Tai Le"/>
+        <a:font script="Talu" typeface="Microsoft New Tai Lue"/>
+        <a:font script="Tfng" typeface="Ebrima"/>
+      </a:majorFont>
+      <a:minorFont>
+        <a:latin typeface="Aptos" panose="02110004020202020204"/>
+        <a:ea typeface=""/>
+        <a:cs typeface=""/>
+        <a:font script="Jpan" typeface="游ゴシック"/>
+        <a:font script="Hang" typeface="맑은 고딕"/>
+        <a:font script="Hans" typeface="等线"/>
+        <a:font script="Hant" typeface="新細明體"/>
+        <a:font script="Arab" typeface="Arial"/>
+        <a:font script="Hebr" typeface="Arial"/>
+        <a:font script="Thai" typeface="Cordia New"/>
+        <a:font script="Ethi" typeface="Nyala"/>
+        <a:font script="Beng" typeface="Vrinda"/>
+        <a:font script="Gujr" typeface="Shruti"/>
+        <a:font script="Khmr" typeface="DaunPenh"/>
+        <a:font script="Knda" typeface="Tunga"/>
+        <a:font script="Guru" typeface="Raavi"/>
+        <a:font script="Cans" typeface="Euphemia"/>
+        <a:font script="Cher" typeface="Plantagenet Cherokee"/>
+        <a:font script="Yiii" typeface="Microsoft Yi Baiti"/>
+        <a:font script="Tibt" typeface="Microsoft Himalaya"/>
+        <a:font script="Thaa" typeface="MV Boli"/>
+        <a:font script="Deva" typeface="Mangal"/>
+        <a:font script="Telu" typeface="Gautami"/>
+        <a:font script="Taml" typeface="Latha"/>
+        <a:font script="Syrc" typeface="Estrangelo Edessa"/>
+        <a:font script="Orya" typeface="Kalinga"/>
+        <a:font script="Mlym" typeface="Kartika"/>
+        <a:font script="Laoo" typeface="DokChampa"/>
+        <a:font script="Sinh" typeface="Iskoola Pota"/>
+        <a:font script="Mong" typeface="Mongolian Baiti"/>
+        <a:font script="Viet" typeface="Arial"/>
+        <a:font script="Uigh" typeface="Microsoft Uighur"/>
+        <a:font script="Geor" typeface="Sylfaen"/>
+        <a:font script="Armn" typeface="Arial"/>
+        <a:font script="Bugi" typeface="Leelawadee UI"/>
+        <a:font script="Bopo" typeface="Microsoft JhengHei"/>
+        <a:font script="Java" typeface="Javanese Text"/>
+        <a:font script="Lisu" typeface="Segoe UI"/>
+        <a:font script="Mymr" typeface="Myanmar Text"/>
+        <a:font script="Nkoo" typeface="Ebrima"/>
+        <a:font script="Olck" typeface="Nirmala UI"/>
+        <a:font script="Osma" typeface="Ebrima"/>
+        <a:font script="Phag" typeface="Phagspa"/>
+        <a:font script="Syrn" typeface="Estrangelo Edessa"/>
+        <a:font script="Syrj" typeface="Estrangelo Edessa"/>
+        <a:font script="Syre" typeface="Estrangelo Edessa"/>
+        <a:font script="Sora" typeface="Nirmala UI"/>
+        <a:font script="Tale" typeface="Microsoft Tai Le"/>
+        <a:font script="Talu" typeface="Microsoft New Tai Lue"/>
+        <a:font script="Tfng" typeface="Ebrima"/>
+      </a:minorFont>
+    </a:fontScheme>
+    <a:fmtScheme name="Office">
+      <a:fillStyleLst>
+        <a:solidFill>
+          <a:schemeClr val="phClr"/>
+        </a:solidFill>
+        <a:gradFill rotWithShape="1">
+          <a:gsLst>
+            <a:gs pos="0">
+              <a:schemeClr val="phClr">
+                <a:lumMod val="110000"/>
+                <a:satMod val="105000"/>
+                <a:tint val="67000"/>
+              </a:schemeClr>
+            </a:gs>
+            <a:gs pos="50000">
+              <a:schemeClr val="phClr">
+                <a:lumMod val="105000"/>
+                <a:satMod val="103000"/>
+                <a:tint val="73000"/>
+              </a:schemeClr>
+            </a:gs>
+            <a:gs pos="100000">
+              <a:schemeClr val="phClr">
+                <a:lumMod val="105000"/>
+                <a:satMod val="109000"/>
+                <a:tint val="81000"/>
+              </a:schemeClr>
+            </a:gs>
+          </a:gsLst>
+          <a:lin ang="5400000" scaled="0"/>
+        </a:gradFill>
+        <a:gradFill rotWithShape="1">
+          <a:gsLst>
+            <a:gs pos="0">
+              <a:schemeClr val="phClr">
+                <a:satMod val="103000"/>
+                <a:lumMod val="102000"/>
+                <a:tint val="94000"/>
+              </a:schemeClr>
+            </a:gs>
+            <a:gs pos="50000">
+              <a:schemeClr val="phClr">
+                <a:satMod val="110000"/>
+                <a:lumMod val="100000"/>
+                <a:shade val="100000"/>
+              </a:schemeClr>
+            </a:gs>
+            <a:gs pos="100000">
+              <a:schemeClr val="phClr">
+                <a:lumMod val="99000"/>
+                <a:satMod val="120000"/>
+                <a:shade val="78000"/>
+              </a:schemeClr>
+            </a:gs>
+          </a:gsLst>
+          <a:lin ang="5400000" scaled="0"/>
+        </a:gradFill>
+      </a:fillStyleLst>
+      <a:lnStyleLst>
+        <a:ln w="12700" cap="flat" cmpd="sng" algn="ctr">
+          <a:solidFill>
+            <a:schemeClr val="phClr"/>
+          </a:solidFill>
+          <a:prstDash val="solid"/>
+          <a:miter lim="800000"/>
+        </a:ln>
+        <a:ln w="19050" cap="flat" cmpd="sng" algn="ctr">
+          <a:solidFill>
+            <a:schemeClr val="phClr"/>
+          </a:solidFill>
+          <a:prstDash val="solid"/>
+          <a:miter lim="800000"/>
+        </a:ln>
+        <a:ln w="25400" cap="flat" cmpd="sng" algn="ctr">
+          <a:solidFill>
+            <a:schemeClr val="phClr"/>
+          </a:solidFill>
+          <a:prstDash val="solid"/>
+          <a:miter lim="800000"/>
+        </a:ln>
+      </a:lnStyleLst>
+      <a:effectStyleLst>
+        <a:effectStyle>
+          <a:effectLst/>
+        </a:effectStyle>
+        <a:effectStyle>
+          <a:effectLst/>
+        </a:effectStyle>
+        <a:effectStyle>
+          <a:effectLst>
+            <a:outerShdw blurRad="57150" dist="19050" dir="5400000" algn="ctr" rotWithShape="0">
+              <a:srgbClr val="000000">
+                <a:alpha val="63000"/>
+              </a:srgbClr>
+            </a:outerShdw>
+          </a:effectLst>
+        </a:effectStyle>
+      </a:effectStyleLst>
+      <a:bgFillStyleLst>
+        <a:solidFill>
+          <a:schemeClr val="phClr"/>
+        </a:solidFill>
+        <a:solidFill>
+          <a:schemeClr val="phClr">
+            <a:tint val="95000"/>
+            <a:satMod val="170000"/>
+          </a:schemeClr>
+        </a:solidFill>
+        <a:gradFill rotWithShape="1">
+          <a:gsLst>
+            <a:gs pos="0">
+              <a:schemeClr val="phClr">
+                <a:tint val="93000"/>
+                <a:satMod val="150000"/>
+                <a:shade val="98000"/>
+                <a:lumMod val="102000"/>
+              </a:schemeClr>
+            </a:gs>
+            <a:gs pos="50000">
+              <a:schemeClr val="phClr">
+                <a:tint val="98000"/>
+                <a:satMod val="130000"/>
+                <a:shade val="90000"/>
+                <a:lumMod val="103000"/>
+              </a:schemeClr>
+            </a:gs>
+            <a:gs pos="100000">
+              <a:schemeClr val="phClr">
+                <a:shade val="63000"/>
+                <a:satMod val="120000"/>
+              </a:schemeClr>
+            </a:gs>
+          </a:gsLst>
+          <a:lin ang="5400000" scaled="0"/>
+        </a:gradFill>
+      </a:bgFillStyleLst>
+    </a:fmtScheme>
+  </a:themeElements>
+  <a:objectDefaults>
+    <a:lnDef>
+      <a:spPr/>
+      <a:bodyPr/>
+      <a:lstStyle/>
+      <a:style>
+        <a:lnRef idx="2">
+          <a:schemeClr val="accent1"/>
+        </a:lnRef>
+        <a:fillRef idx="0">
+          <a:schemeClr val="accent1"/>
+        </a:fillRef>
+        <a:effectRef idx="1">
+          <a:schemeClr val="accent1"/>
+        </a:effectRef>
+        <a:fontRef idx="minor">
+          <a:schemeClr val="tx1"/>
+        </a:fontRef>
+      </a:style>
+    </a:lnDef>
+  </a:objectDefaults>
+  <a:extraClrSchemeLst/>
+  <a:extLst>
+    <a:ext uri="{05A4C25C-085E-4340-85A3-A5531E510DB2}">
+      <thm15:themeFamily xmlns:thm15="http://schemas.microsoft.com/office/thememl/2012/main" name="Office Theme" id="{2E142A2C-CD16-42D6-873A-C26D2A0506FA}" vid="{1BDDFF52-6CD6-40A5-AB3C-68EB2F1E4D0A}"/>
+    </a:ext>
+  </a:extLst>
+</a:theme>
 </file>
--- a/Delivery 2 A_B_testing/Deliverables/Presentation.pptx
+++ b/Delivery 2 A_B_testing/Deliverables/Presentation.pptx
@@ -3587,7 +3587,7 @@
         </p:nvSpPr>
         <p:spPr>
           <a:xfrm>
-            <a:off x="396392" y="789503"/>
+            <a:off x="457199" y="1084958"/>
             <a:ext cx="11277295" cy="914400"/>
           </a:xfrm>
           <a:prstGeom prst="rect">
@@ -3622,7 +3622,7 @@
         </p:nvSpPr>
         <p:spPr>
           <a:xfrm>
-            <a:off x="457200" y="1577340"/>
+            <a:off x="457200" y="1868329"/>
             <a:ext cx="11277295" cy="914400"/>
           </a:xfrm>
           <a:prstGeom prst="rect">
@@ -3651,146 +3651,14 @@
       </p:sp>
       <p:sp>
         <p:nvSpPr>
-          <p:cNvPr id="5" name="Oval 4"/>
-          <p:cNvSpPr/>
-          <p:nvPr/>
-        </p:nvSpPr>
-        <p:spPr>
-          <a:xfrm>
-            <a:off x="1920240" y="3144083"/>
-            <a:ext cx="731520" cy="731520"/>
-          </a:xfrm>
-          <a:prstGeom prst="ellipse">
-            <a:avLst/>
-          </a:prstGeom>
-          <a:solidFill>
-            <a:srgbClr val="4285F4"/>
-          </a:solidFill>
-          <a:ln>
-            <a:noFill/>
-          </a:ln>
-        </p:spPr>
-        <p:style>
-          <a:lnRef idx="1">
-            <a:schemeClr val="accent1"/>
-          </a:lnRef>
-          <a:fillRef idx="3">
-            <a:schemeClr val="accent1"/>
-          </a:fillRef>
-          <a:effectRef idx="2">
-            <a:schemeClr val="accent1"/>
-          </a:effectRef>
-          <a:fontRef idx="minor">
-            <a:schemeClr val="lt1"/>
-          </a:fontRef>
-        </p:style>
-        <p:txBody>
-          <a:bodyPr rtlCol="0" anchor="ctr"/>
-          <a:lstStyle/>
-          <a:p>
-            <a:pPr algn="ctr"/>
-            <a:endParaRPr/>
-          </a:p>
-        </p:txBody>
-      </p:sp>
-      <p:sp>
-        <p:nvSpPr>
-          <p:cNvPr id="6" name="Oval 5"/>
-          <p:cNvSpPr/>
-          <p:nvPr/>
-        </p:nvSpPr>
-        <p:spPr>
-          <a:xfrm>
-            <a:off x="5760720" y="3144083"/>
-            <a:ext cx="731520" cy="731520"/>
-          </a:xfrm>
-          <a:prstGeom prst="ellipse">
-            <a:avLst/>
-          </a:prstGeom>
-          <a:solidFill>
-            <a:srgbClr val="0F9D58"/>
-          </a:solidFill>
-          <a:ln>
-            <a:noFill/>
-          </a:ln>
-        </p:spPr>
-        <p:style>
-          <a:lnRef idx="1">
-            <a:schemeClr val="accent1"/>
-          </a:lnRef>
-          <a:fillRef idx="3">
-            <a:schemeClr val="accent1"/>
-          </a:fillRef>
-          <a:effectRef idx="2">
-            <a:schemeClr val="accent1"/>
-          </a:effectRef>
-          <a:fontRef idx="minor">
-            <a:schemeClr val="lt1"/>
-          </a:fontRef>
-        </p:style>
-        <p:txBody>
-          <a:bodyPr rtlCol="0" anchor="ctr"/>
-          <a:lstStyle/>
-          <a:p>
-            <a:pPr algn="ctr"/>
-            <a:endParaRPr/>
-          </a:p>
-        </p:txBody>
-      </p:sp>
-      <p:sp>
-        <p:nvSpPr>
-          <p:cNvPr id="7" name="Oval 6"/>
-          <p:cNvSpPr/>
-          <p:nvPr/>
-        </p:nvSpPr>
-        <p:spPr>
-          <a:xfrm>
-            <a:off x="9601200" y="3144083"/>
-            <a:ext cx="731520" cy="731520"/>
-          </a:xfrm>
-          <a:prstGeom prst="ellipse">
-            <a:avLst/>
-          </a:prstGeom>
-          <a:solidFill>
-            <a:srgbClr val="F4B400"/>
-          </a:solidFill>
-          <a:ln>
-            <a:noFill/>
-          </a:ln>
-        </p:spPr>
-        <p:style>
-          <a:lnRef idx="1">
-            <a:schemeClr val="accent1"/>
-          </a:lnRef>
-          <a:fillRef idx="3">
-            <a:schemeClr val="accent1"/>
-          </a:fillRef>
-          <a:effectRef idx="2">
-            <a:schemeClr val="accent1"/>
-          </a:effectRef>
-          <a:fontRef idx="minor">
-            <a:schemeClr val="lt1"/>
-          </a:fontRef>
-        </p:style>
-        <p:txBody>
-          <a:bodyPr rtlCol="0" anchor="ctr"/>
-          <a:lstStyle/>
-          <a:p>
-            <a:pPr algn="ctr"/>
-            <a:endParaRPr/>
-          </a:p>
-        </p:txBody>
-      </p:sp>
-      <p:sp>
-        <p:nvSpPr>
           <p:cNvPr id="8" name="TextBox 7"/>
           <p:cNvSpPr txBox="1"/>
           <p:nvPr/>
         </p:nvSpPr>
         <p:spPr>
           <a:xfrm>
-            <a:off x="1396313" y="4119145"/>
-            <a:ext cx="1828800" cy="914400"/>
+            <a:off x="1396312" y="3729131"/>
+            <a:ext cx="1828800" cy="369332"/>
           </a:xfrm>
           <a:prstGeom prst="rect">
             <a:avLst/>
@@ -3805,7 +3673,7 @@
           <a:p>
             <a:pPr algn="ctr"/>
             <a:r>
-              <a:rPr sz="1400" b="0">
+              <a:rPr b="0" dirty="0">
                 <a:solidFill>
                   <a:srgbClr val="757575"/>
                 </a:solidFill>
@@ -3824,8 +3692,8 @@
         </p:nvSpPr>
         <p:spPr>
           <a:xfrm>
-            <a:off x="5236793" y="4119145"/>
-            <a:ext cx="1828800" cy="914400"/>
+            <a:off x="5236792" y="3729131"/>
+            <a:ext cx="1828800" cy="369332"/>
           </a:xfrm>
           <a:prstGeom prst="rect">
             <a:avLst/>
@@ -3840,7 +3708,7 @@
           <a:p>
             <a:pPr algn="ctr"/>
             <a:r>
-              <a:rPr sz="1400" b="0">
+              <a:rPr b="0" dirty="0">
                 <a:solidFill>
                   <a:srgbClr val="757575"/>
                 </a:solidFill>
@@ -3859,8 +3727,8 @@
         </p:nvSpPr>
         <p:spPr>
           <a:xfrm>
-            <a:off x="9077273" y="4119145"/>
-            <a:ext cx="1828800" cy="914400"/>
+            <a:off x="9077272" y="3729131"/>
+            <a:ext cx="1828800" cy="369332"/>
           </a:xfrm>
           <a:prstGeom prst="rect">
             <a:avLst/>
@@ -3875,7 +3743,7 @@
           <a:p>
             <a:pPr algn="ctr"/>
             <a:r>
-              <a:rPr sz="1400" b="0" dirty="0">
+              <a:rPr b="0" dirty="0">
                 <a:solidFill>
                   <a:srgbClr val="757575"/>
                 </a:solidFill>
@@ -3950,7 +3818,7 @@
         </p:nvSpPr>
         <p:spPr>
           <a:xfrm>
-            <a:off x="4934312" y="5117068"/>
+            <a:off x="4989657" y="5044865"/>
             <a:ext cx="2323070" cy="400110"/>
           </a:xfrm>
           <a:prstGeom prst="rect">
